--- a/tests/corpus/pptx/generated/charts-data.pptx
+++ b/tests/corpus/pptx/generated/charts-data.pptx
@@ -12,6 +12,7 @@
     <p:sldId id="260" r:id="rId6"/>
     <p:sldId id="261" r:id="rId7"/>
     <p:sldId id="262" r:id="rId8"/>
+    <p:sldId id="263" r:id="rId9"/>
   </p:sldIdLst>
   <p:sldSz cx="12192000" cy="6858000"/>
   <p:notesSz cx="6858000" cy="9144000"/>
@@ -251,7 +252,7 @@
           <c:smooth val="0"/>
           <c:extLst>
             <c:ext xmlns:c16="http://schemas.microsoft.com/office/drawing/2014/chart" uri="{C3380CC4-5D6E-409C-BE32-E72D297353CC}">
-              <c16:uniqueId val="{00000000-7CA7-410A-B2B5-A3B98B28ECC8}"/>
+              <c16:uniqueId val="{00000000-388C-48CF-8EBF-7DD393154DDF}"/>
             </c:ext>
           </c:extLst>
         </c:ser>
@@ -265,11 +266,11 @@
         </c:dLbls>
         <c:marker val="1"/>
         <c:smooth val="0"/>
-        <c:axId val="740603584"/>
-        <c:axId val="636729839"/>
+        <c:axId val="14666095"/>
+        <c:axId val="1210382607"/>
       </c:lineChart>
       <c:catAx>
-        <c:axId val="740603584"/>
+        <c:axId val="14666095"/>
         <c:scaling>
           <c:orientation val="minMax"/>
         </c:scaling>
@@ -312,7 +313,7 @@
             <a:endParaRPr lang="de-DE"/>
           </a:p>
         </c:txPr>
-        <c:crossAx val="636729839"/>
+        <c:crossAx val="1210382607"/>
         <c:crosses val="autoZero"/>
         <c:auto val="1"/>
         <c:lblAlgn val="ctr"/>
@@ -320,7 +321,7 @@
         <c:noMultiLvlLbl val="0"/>
       </c:catAx>
       <c:valAx>
-        <c:axId val="636729839"/>
+        <c:axId val="1210382607"/>
         <c:scaling>
           <c:orientation val="minMax"/>
         </c:scaling>
@@ -371,7 +372,7 @@
             <a:endParaRPr lang="de-DE"/>
           </a:p>
         </c:txPr>
-        <c:crossAx val="740603584"/>
+        <c:crossAx val="14666095"/>
         <c:crosses val="autoZero"/>
         <c:crossBetween val="between"/>
       </c:valAx>
@@ -533,7 +534,7 @@
           </c:val>
           <c:extLst>
             <c:ext xmlns:c16="http://schemas.microsoft.com/office/drawing/2014/chart" uri="{C3380CC4-5D6E-409C-BE32-E72D297353CC}">
-              <c16:uniqueId val="{00000000-E398-477D-9AFB-40E8171DACAB}"/>
+              <c16:uniqueId val="{00000000-4554-4D1D-B77B-8B578309A69A}"/>
             </c:ext>
           </c:extLst>
         </c:ser>
@@ -547,11 +548,11 @@
         </c:dLbls>
         <c:gapWidth val="219"/>
         <c:overlap val="-27"/>
-        <c:axId val="628299375"/>
-        <c:axId val="636662639"/>
+        <c:axId val="13142543"/>
+        <c:axId val="1210508847"/>
       </c:barChart>
       <c:catAx>
-        <c:axId val="628299375"/>
+        <c:axId val="13142543"/>
         <c:scaling>
           <c:orientation val="minMax"/>
         </c:scaling>
@@ -594,7 +595,7 @@
             <a:endParaRPr lang="de-DE"/>
           </a:p>
         </c:txPr>
-        <c:crossAx val="636662639"/>
+        <c:crossAx val="1210508847"/>
         <c:crosses val="autoZero"/>
         <c:auto val="1"/>
         <c:lblAlgn val="ctr"/>
@@ -602,7 +603,7 @@
         <c:noMultiLvlLbl val="0"/>
       </c:catAx>
       <c:valAx>
-        <c:axId val="636662639"/>
+        <c:axId val="1210508847"/>
         <c:scaling>
           <c:orientation val="minMax"/>
         </c:scaling>
@@ -653,7 +654,7 @@
             <a:endParaRPr lang="de-DE"/>
           </a:p>
         </c:txPr>
-        <c:crossAx val="628299375"/>
+        <c:crossAx val="13142543"/>
         <c:crosses val="autoZero"/>
         <c:crossBetween val="between"/>
       </c:valAx>
@@ -818,7 +819,7 @@
           </c:val>
           <c:extLst>
             <c:ext xmlns:c16="http://schemas.microsoft.com/office/drawing/2014/chart" uri="{C3380CC4-5D6E-409C-BE32-E72D297353CC}">
-              <c16:uniqueId val="{00000000-04A7-4312-ABAB-CB28FE188869}"/>
+              <c16:uniqueId val="{00000000-90C9-48B6-B868-794D9BD5A1E3}"/>
             </c:ext>
           </c:extLst>
         </c:ser>
@@ -832,11 +833,11 @@
         </c:dLbls>
         <c:gapWidth val="219"/>
         <c:overlap val="-27"/>
-        <c:axId val="630565647"/>
-        <c:axId val="636653519"/>
+        <c:axId val="13135119"/>
+        <c:axId val="1210507887"/>
       </c:barChart>
       <c:catAx>
-        <c:axId val="630565647"/>
+        <c:axId val="13135119"/>
         <c:scaling>
           <c:orientation val="minMax"/>
         </c:scaling>
@@ -879,7 +880,7 @@
             <a:endParaRPr lang="de-DE"/>
           </a:p>
         </c:txPr>
-        <c:crossAx val="636653519"/>
+        <c:crossAx val="1210507887"/>
         <c:crosses val="autoZero"/>
         <c:auto val="1"/>
         <c:lblAlgn val="ctr"/>
@@ -887,7 +888,7 @@
         <c:noMultiLvlLbl val="0"/>
       </c:catAx>
       <c:valAx>
-        <c:axId val="636653519"/>
+        <c:axId val="1210507887"/>
         <c:scaling>
           <c:orientation val="minMax"/>
         </c:scaling>
@@ -938,7 +939,7 @@
             <a:endParaRPr lang="de-DE"/>
           </a:p>
         </c:txPr>
-        <c:crossAx val="630565647"/>
+        <c:crossAx val="13135119"/>
         <c:crosses val="autoZero"/>
         <c:crossBetween val="between"/>
       </c:valAx>
@@ -1104,7 +1105,7 @@
           </c:val>
           <c:extLst>
             <c:ext xmlns:c16="http://schemas.microsoft.com/office/drawing/2014/chart" uri="{C3380CC4-5D6E-409C-BE32-E72D297353CC}">
-              <c16:uniqueId val="{00000000-C69D-408D-821F-8825D2B8C91E}"/>
+              <c16:uniqueId val="{00000000-B6FA-4587-8038-E61794AC7F17}"/>
             </c:ext>
           </c:extLst>
         </c:ser>
@@ -1118,11 +1119,11 @@
         </c:dLbls>
         <c:gapWidth val="219"/>
         <c:overlap val="-27"/>
-        <c:axId val="630554975"/>
-        <c:axId val="636670799"/>
+        <c:axId val="13136047"/>
+        <c:axId val="1210521807"/>
       </c:barChart>
       <c:catAx>
-        <c:axId val="630554975"/>
+        <c:axId val="13136047"/>
         <c:scaling>
           <c:orientation val="minMax"/>
         </c:scaling>
@@ -1165,7 +1166,7 @@
             <a:endParaRPr lang="de-DE"/>
           </a:p>
         </c:txPr>
-        <c:crossAx val="636670799"/>
+        <c:crossAx val="1210521807"/>
         <c:crosses val="autoZero"/>
         <c:auto val="1"/>
         <c:lblAlgn val="ctr"/>
@@ -1173,7 +1174,7 @@
         <c:noMultiLvlLbl val="0"/>
       </c:catAx>
       <c:valAx>
-        <c:axId val="636670799"/>
+        <c:axId val="1210521807"/>
         <c:scaling>
           <c:orientation val="minMax"/>
         </c:scaling>
@@ -1224,7 +1225,7 @@
             <a:endParaRPr lang="de-DE"/>
           </a:p>
         </c:txPr>
-        <c:crossAx val="630554975"/>
+        <c:crossAx val="13136047"/>
         <c:crosses val="autoZero"/>
         <c:crossBetween val="between"/>
       </c:valAx>
@@ -1432,7 +1433,7 @@
           </c:val>
           <c:extLst>
             <c:ext xmlns:c16="http://schemas.microsoft.com/office/drawing/2014/chart" uri="{C3380CC4-5D6E-409C-BE32-E72D297353CC}">
-              <c16:uniqueId val="{00000000-5270-42B8-8A3A-1E68F5246957}"/>
+              <c16:uniqueId val="{00000000-91C6-447E-B0BC-3168C2E6775B}"/>
             </c:ext>
           </c:extLst>
         </c:ser>
@@ -1446,11 +1447,11 @@
         </c:dLbls>
         <c:gapWidth val="219"/>
         <c:overlap val="-27"/>
-        <c:axId val="630545231"/>
-        <c:axId val="636672719"/>
+        <c:axId val="44125087"/>
+        <c:axId val="1210534287"/>
       </c:barChart>
       <c:catAx>
-        <c:axId val="630545231"/>
+        <c:axId val="44125087"/>
         <c:scaling>
           <c:orientation val="minMax"/>
         </c:scaling>
@@ -1493,7 +1494,7 @@
             <a:endParaRPr lang="de-DE"/>
           </a:p>
         </c:txPr>
-        <c:crossAx val="636672719"/>
+        <c:crossAx val="1210534287"/>
         <c:crosses val="autoZero"/>
         <c:auto val="1"/>
         <c:lblAlgn val="ctr"/>
@@ -1501,7 +1502,7 @@
         <c:noMultiLvlLbl val="0"/>
       </c:catAx>
       <c:valAx>
-        <c:axId val="636672719"/>
+        <c:axId val="1210534287"/>
         <c:scaling>
           <c:orientation val="minMax"/>
           <c:max val="6"/>
@@ -1553,7 +1554,7 @@
             <a:endParaRPr lang="de-DE"/>
           </a:p>
         </c:txPr>
-        <c:crossAx val="630545231"/>
+        <c:crossAx val="44125087"/>
         <c:crosses val="autoZero"/>
         <c:crossBetween val="between"/>
       </c:valAx>
@@ -1758,7 +1759,7 @@
           </c:val>
           <c:extLst>
             <c:ext xmlns:c16="http://schemas.microsoft.com/office/drawing/2014/chart" uri="{C3380CC4-5D6E-409C-BE32-E72D297353CC}">
-              <c16:uniqueId val="{00000000-68F8-4042-BAA6-5F0FE93BE302}"/>
+              <c16:uniqueId val="{00000000-6FC8-457D-9FB2-FE753ACBC3A2}"/>
             </c:ext>
           </c:extLst>
         </c:ser>
@@ -1830,7 +1831,7 @@
           </c:val>
           <c:extLst>
             <c:ext xmlns:c16="http://schemas.microsoft.com/office/drawing/2014/chart" uri="{C3380CC4-5D6E-409C-BE32-E72D297353CC}">
-              <c16:uniqueId val="{00000001-68F8-4042-BAA6-5F0FE93BE302}"/>
+              <c16:uniqueId val="{00000001-6FC8-457D-9FB2-FE753ACBC3A2}"/>
             </c:ext>
           </c:extLst>
         </c:ser>
@@ -1902,7 +1903,7 @@
           </c:val>
           <c:extLst>
             <c:ext xmlns:c16="http://schemas.microsoft.com/office/drawing/2014/chart" uri="{C3380CC4-5D6E-409C-BE32-E72D297353CC}">
-              <c16:uniqueId val="{00000002-68F8-4042-BAA6-5F0FE93BE302}"/>
+              <c16:uniqueId val="{00000002-6FC8-457D-9FB2-FE753ACBC3A2}"/>
             </c:ext>
           </c:extLst>
         </c:ser>
@@ -1916,12 +1917,12 @@
         </c:dLbls>
         <c:gapWidth val="150"/>
         <c:shape val="box"/>
-        <c:axId val="627907183"/>
-        <c:axId val="636666959"/>
+        <c:axId val="44118591"/>
+        <c:axId val="1210526607"/>
         <c:axId val="0"/>
       </c:bar3DChart>
       <c:catAx>
-        <c:axId val="627907183"/>
+        <c:axId val="44118591"/>
         <c:scaling>
           <c:orientation val="minMax"/>
         </c:scaling>
@@ -1958,7 +1959,7 @@
             <a:endParaRPr lang="de-DE"/>
           </a:p>
         </c:txPr>
-        <c:crossAx val="636666959"/>
+        <c:crossAx val="1210526607"/>
         <c:crosses val="autoZero"/>
         <c:auto val="1"/>
         <c:lblAlgn val="ctr"/>
@@ -1966,7 +1967,7 @@
         <c:noMultiLvlLbl val="0"/>
       </c:catAx>
       <c:valAx>
-        <c:axId val="636666959"/>
+        <c:axId val="1210526607"/>
         <c:scaling>
           <c:orientation val="minMax"/>
         </c:scaling>
@@ -2017,7 +2018,7 @@
             <a:endParaRPr lang="de-DE"/>
           </a:p>
         </c:txPr>
-        <c:crossAx val="627907183"/>
+        <c:crossAx val="44118591"/>
         <c:crosses val="autoZero"/>
         <c:crossBetween val="between"/>
       </c:valAx>
@@ -2111,9 +2112,8 @@
     <c:autoTitleDeleted val="0"/>
     <c:plotArea>
       <c:layout/>
-      <c:barChart>
-        <c:barDir val="col"/>
-        <c:grouping val="clustered"/>
+      <c:lineChart>
+        <c:grouping val="standard"/>
         <c:varyColors val="0"/>
         <c:ser>
           <c:idx val="0"/>
@@ -2124,67 +2124,202 @@
               <c:strCache>
                 <c:ptCount val="1"/>
                 <c:pt idx="0">
-                  <c:v>Sales</c:v>
+                  <c:v>Up and down</c:v>
                 </c:pt>
               </c:strCache>
             </c:strRef>
           </c:tx>
           <c:spPr>
-            <a:solidFill>
-              <a:schemeClr val="accent1"/>
-            </a:solidFill>
-            <a:ln>
-              <a:noFill/>
+            <a:ln w="28575" cap="rnd">
+              <a:solidFill>
+                <a:schemeClr val="accent1"/>
+              </a:solidFill>
+              <a:round/>
             </a:ln>
             <a:effectLst/>
           </c:spPr>
-          <c:invertIfNegative val="0"/>
+          <c:marker>
+            <c:symbol val="circle"/>
+            <c:size val="5"/>
+            <c:spPr>
+              <a:solidFill>
+                <a:schemeClr val="accent1"/>
+              </a:solidFill>
+              <a:ln w="9525">
+                <a:solidFill>
+                  <a:schemeClr val="accent1"/>
+                </a:solidFill>
+              </a:ln>
+              <a:effectLst/>
+            </c:spPr>
+          </c:marker>
           <c:cat>
             <c:strRef>
-              <c:f>Tabelle1!$A$2:$A$5</c:f>
+              <c:f>Tabelle1!$A$2:$A$8</c:f>
               <c:strCache>
-                <c:ptCount val="4"/>
+                <c:ptCount val="7"/>
                 <c:pt idx="0">
-                  <c:v>North
-region</c:v>
+                  <c:v>A</c:v>
                 </c:pt>
                 <c:pt idx="1">
-                  <c:v>South</c:v>
+                  <c:v>B</c:v>
                 </c:pt>
                 <c:pt idx="2">
-                  <c:v>East
-region</c:v>
+                  <c:v>C</c:v>
                 </c:pt>
                 <c:pt idx="3">
-                  <c:v>West</c:v>
+                  <c:v>D</c:v>
+                </c:pt>
+                <c:pt idx="4">
+                  <c:v>E</c:v>
+                </c:pt>
+                <c:pt idx="5">
+                  <c:v>F</c:v>
+                </c:pt>
+                <c:pt idx="6">
+                  <c:v>G</c:v>
                 </c:pt>
               </c:strCache>
             </c:strRef>
           </c:cat>
           <c:val>
             <c:numRef>
-              <c:f>Tabelle1!$B$2:$B$5</c:f>
+              <c:f>Tabelle1!$B$2:$B$8</c:f>
               <c:numCache>
                 <c:formatCode>General</c:formatCode>
-                <c:ptCount val="4"/>
+                <c:ptCount val="7"/>
                 <c:pt idx="0">
+                  <c:v>2</c:v>
+                </c:pt>
+                <c:pt idx="1">
+                  <c:v>8</c:v>
+                </c:pt>
+                <c:pt idx="2">
+                  <c:v>3</c:v>
+                </c:pt>
+                <c:pt idx="3">
+                  <c:v>9</c:v>
+                </c:pt>
+                <c:pt idx="4">
+                  <c:v>1</c:v>
+                </c:pt>
+                <c:pt idx="5">
+                  <c:v>7</c:v>
+                </c:pt>
+                <c:pt idx="6">
                   <c:v>4</c:v>
-                </c:pt>
-                <c:pt idx="1">
-                  <c:v>6</c:v>
-                </c:pt>
-                <c:pt idx="2">
-                  <c:v>5</c:v>
-                </c:pt>
-                <c:pt idx="3">
-                  <c:v>7</c:v>
                 </c:pt>
               </c:numCache>
             </c:numRef>
           </c:val>
+          <c:smooth val="1"/>
           <c:extLst>
             <c:ext xmlns:c16="http://schemas.microsoft.com/office/drawing/2014/chart" uri="{C3380CC4-5D6E-409C-BE32-E72D297353CC}">
-              <c16:uniqueId val="{00000000-5EC3-4042-B313-FC58F851E7BC}"/>
+              <c16:uniqueId val="{00000000-19B3-4957-86F8-3D85C3BC124F}"/>
+            </c:ext>
+          </c:extLst>
+        </c:ser>
+        <c:ser>
+          <c:idx val="1"/>
+          <c:order val="1"/>
+          <c:tx>
+            <c:strRef>
+              <c:f>Tabelle1!$C$1</c:f>
+              <c:strCache>
+                <c:ptCount val="1"/>
+                <c:pt idx="0">
+                  <c:v>Steps</c:v>
+                </c:pt>
+              </c:strCache>
+            </c:strRef>
+          </c:tx>
+          <c:spPr>
+            <a:ln w="28575" cap="rnd">
+              <a:solidFill>
+                <a:schemeClr val="accent2"/>
+              </a:solidFill>
+              <a:round/>
+            </a:ln>
+            <a:effectLst/>
+          </c:spPr>
+          <c:marker>
+            <c:symbol val="circle"/>
+            <c:size val="5"/>
+            <c:spPr>
+              <a:solidFill>
+                <a:schemeClr val="accent2"/>
+              </a:solidFill>
+              <a:ln w="9525">
+                <a:solidFill>
+                  <a:schemeClr val="accent2"/>
+                </a:solidFill>
+              </a:ln>
+              <a:effectLst/>
+            </c:spPr>
+          </c:marker>
+          <c:cat>
+            <c:strRef>
+              <c:f>Tabelle1!$A$2:$A$8</c:f>
+              <c:strCache>
+                <c:ptCount val="7"/>
+                <c:pt idx="0">
+                  <c:v>A</c:v>
+                </c:pt>
+                <c:pt idx="1">
+                  <c:v>B</c:v>
+                </c:pt>
+                <c:pt idx="2">
+                  <c:v>C</c:v>
+                </c:pt>
+                <c:pt idx="3">
+                  <c:v>D</c:v>
+                </c:pt>
+                <c:pt idx="4">
+                  <c:v>E</c:v>
+                </c:pt>
+                <c:pt idx="5">
+                  <c:v>F</c:v>
+                </c:pt>
+                <c:pt idx="6">
+                  <c:v>G</c:v>
+                </c:pt>
+              </c:strCache>
+            </c:strRef>
+          </c:cat>
+          <c:val>
+            <c:numRef>
+              <c:f>Tabelle1!$C$2:$C$8</c:f>
+              <c:numCache>
+                <c:formatCode>General</c:formatCode>
+                <c:ptCount val="7"/>
+                <c:pt idx="0">
+                  <c:v>1</c:v>
+                </c:pt>
+                <c:pt idx="1">
+                  <c:v>1</c:v>
+                </c:pt>
+                <c:pt idx="2">
+                  <c:v>6</c:v>
+                </c:pt>
+                <c:pt idx="3">
+                  <c:v>6</c:v>
+                </c:pt>
+                <c:pt idx="4">
+                  <c:v>2</c:v>
+                </c:pt>
+                <c:pt idx="5">
+                  <c:v>2</c:v>
+                </c:pt>
+                <c:pt idx="6">
+                  <c:v>5</c:v>
+                </c:pt>
+              </c:numCache>
+            </c:numRef>
+          </c:val>
+          <c:smooth val="1"/>
+          <c:extLst>
+            <c:ext xmlns:c16="http://schemas.microsoft.com/office/drawing/2014/chart" uri="{C3380CC4-5D6E-409C-BE32-E72D297353CC}">
+              <c16:uniqueId val="{00000001-19B3-4957-86F8-3D85C3BC124F}"/>
             </c:ext>
           </c:extLst>
         </c:ser>
@@ -2196,13 +2331,13 @@
           <c:showPercent val="0"/>
           <c:showBubbleSize val="0"/>
         </c:dLbls>
-        <c:gapWidth val="219"/>
-        <c:overlap val="-27"/>
-        <c:axId val="630550799"/>
-        <c:axId val="636668399"/>
-      </c:barChart>
+        <c:marker val="1"/>
+        <c:smooth val="0"/>
+        <c:axId val="44139007"/>
+        <c:axId val="1210522287"/>
+      </c:lineChart>
       <c:catAx>
-        <c:axId val="630550799"/>
+        <c:axId val="44139007"/>
         <c:scaling>
           <c:orientation val="minMax"/>
         </c:scaling>
@@ -2245,15 +2380,15 @@
             <a:endParaRPr lang="de-DE"/>
           </a:p>
         </c:txPr>
-        <c:crossAx val="636668399"/>
+        <c:crossAx val="1210522287"/>
         <c:crosses val="autoZero"/>
         <c:auto val="1"/>
-        <c:lblAlgn val="l"/>
+        <c:lblAlgn val="ctr"/>
         <c:lblOffset val="100"/>
         <c:noMultiLvlLbl val="0"/>
       </c:catAx>
       <c:valAx>
-        <c:axId val="636668399"/>
+        <c:axId val="1210522287"/>
         <c:scaling>
           <c:orientation val="minMax"/>
         </c:scaling>
@@ -2304,7 +2439,7 @@
             <a:endParaRPr lang="de-DE"/>
           </a:p>
         </c:txPr>
-        <c:crossAx val="630550799"/>
+        <c:crossAx val="44139007"/>
         <c:crosses val="autoZero"/>
         <c:crossBetween val="between"/>
       </c:valAx>
@@ -2398,9 +2533,8 @@
     <c:autoTitleDeleted val="0"/>
     <c:plotArea>
       <c:layout/>
-      <c:barChart>
-        <c:barDir val="col"/>
-        <c:grouping val="clustered"/>
+      <c:scatterChart>
+        <c:scatterStyle val="smoothMarker"/>
         <c:varyColors val="0"/>
         <c:ser>
           <c:idx val="0"/>
@@ -2411,67 +2545,87 @@
               <c:strCache>
                 <c:ptCount val="1"/>
                 <c:pt idx="0">
-                  <c:v>Sales</c:v>
+                  <c:v>Y</c:v>
                 </c:pt>
               </c:strCache>
             </c:strRef>
           </c:tx>
           <c:spPr>
-            <a:solidFill>
-              <a:schemeClr val="accent1"/>
-            </a:solidFill>
-            <a:ln>
-              <a:noFill/>
+            <a:ln w="19050" cap="rnd">
+              <a:solidFill>
+                <a:schemeClr val="accent1"/>
+              </a:solidFill>
+              <a:round/>
             </a:ln>
             <a:effectLst/>
           </c:spPr>
-          <c:invertIfNegative val="0"/>
-          <c:cat>
-            <c:strRef>
-              <c:f>Tabelle1!$A$2:$A$5</c:f>
-              <c:strCache>
-                <c:ptCount val="4"/>
-                <c:pt idx="0">
-                  <c:v>North
-region</c:v>
-                </c:pt>
-                <c:pt idx="1">
-                  <c:v>South</c:v>
-                </c:pt>
-                <c:pt idx="2">
-                  <c:v>East
-region</c:v>
-                </c:pt>
-                <c:pt idx="3">
-                  <c:v>West</c:v>
-                </c:pt>
-              </c:strCache>
-            </c:strRef>
-          </c:cat>
-          <c:val>
+          <c:marker>
+            <c:symbol val="none"/>
+          </c:marker>
+          <c:xVal>
             <c:numRef>
-              <c:f>Tabelle1!$B$2:$B$5</c:f>
+              <c:f>Tabelle1!$A$2:$A$8</c:f>
               <c:numCache>
                 <c:formatCode>General</c:formatCode>
-                <c:ptCount val="4"/>
+                <c:ptCount val="7"/>
                 <c:pt idx="0">
+                  <c:v>0</c:v>
+                </c:pt>
+                <c:pt idx="1">
+                  <c:v>1</c:v>
+                </c:pt>
+                <c:pt idx="2">
+                  <c:v>1.5</c:v>
+                </c:pt>
+                <c:pt idx="3">
                   <c:v>4</c:v>
                 </c:pt>
-                <c:pt idx="1">
-                  <c:v>6</c:v>
-                </c:pt>
-                <c:pt idx="2">
-                  <c:v>5</c:v>
-                </c:pt>
-                <c:pt idx="3">
-                  <c:v>7</c:v>
+                <c:pt idx="4">
+                  <c:v>4.5</c:v>
+                </c:pt>
+                <c:pt idx="5">
+                  <c:v>8</c:v>
+                </c:pt>
+                <c:pt idx="6">
+                  <c:v>9</c:v>
                 </c:pt>
               </c:numCache>
             </c:numRef>
-          </c:val>
+          </c:xVal>
+          <c:yVal>
+            <c:numRef>
+              <c:f>Tabelle1!$B$2:$B$8</c:f>
+              <c:numCache>
+                <c:formatCode>General</c:formatCode>
+                <c:ptCount val="7"/>
+                <c:pt idx="0">
+                  <c:v>3</c:v>
+                </c:pt>
+                <c:pt idx="1">
+                  <c:v>7</c:v>
+                </c:pt>
+                <c:pt idx="2">
+                  <c:v>2</c:v>
+                </c:pt>
+                <c:pt idx="3">
+                  <c:v>8</c:v>
+                </c:pt>
+                <c:pt idx="4">
+                  <c:v>1</c:v>
+                </c:pt>
+                <c:pt idx="5">
+                  <c:v>6</c:v>
+                </c:pt>
+                <c:pt idx="6">
+                  <c:v>4</c:v>
+                </c:pt>
+              </c:numCache>
+            </c:numRef>
+          </c:yVal>
+          <c:smooth val="1"/>
           <c:extLst>
             <c:ext xmlns:c16="http://schemas.microsoft.com/office/drawing/2014/chart" uri="{C3380CC4-5D6E-409C-BE32-E72D297353CC}">
-              <c16:uniqueId val="{00000000-0B2F-4C17-A10E-C5ED85323F6D}"/>
+              <c16:uniqueId val="{00000000-20CF-4CD4-9EF3-F88AB305601E}"/>
             </c:ext>
           </c:extLst>
         </c:ser>
@@ -2483,18 +2637,30 @@
           <c:showPercent val="0"/>
           <c:showBubbleSize val="0"/>
         </c:dLbls>
-        <c:gapWidth val="219"/>
-        <c:overlap val="-27"/>
-        <c:axId val="630565183"/>
-        <c:axId val="636671759"/>
-      </c:barChart>
-      <c:catAx>
-        <c:axId val="630565183"/>
+        <c:axId val="44138543"/>
+        <c:axId val="1210523247"/>
+      </c:scatterChart>
+      <c:valAx>
+        <c:axId val="44138543"/>
         <c:scaling>
           <c:orientation val="minMax"/>
         </c:scaling>
         <c:delete val="0"/>
         <c:axPos val="b"/>
+        <c:majorGridlines>
+          <c:spPr>
+            <a:ln w="9525" cap="flat" cmpd="sng" algn="ctr">
+              <a:solidFill>
+                <a:schemeClr val="tx1">
+                  <a:lumMod val="15000"/>
+                  <a:lumOff val="85000"/>
+                </a:schemeClr>
+              </a:solidFill>
+              <a:round/>
+            </a:ln>
+            <a:effectLst/>
+          </c:spPr>
+        </c:majorGridlines>
         <c:numFmt formatCode="General" sourceLinked="1"/>
         <c:majorTickMark val="none"/>
         <c:minorTickMark val="none"/>
@@ -2504,8 +2670,8 @@
           <a:ln w="9525" cap="flat" cmpd="sng" algn="ctr">
             <a:solidFill>
               <a:schemeClr val="tx1">
-                <a:lumMod val="15000"/>
-                <a:lumOff val="85000"/>
+                <a:lumMod val="25000"/>
+                <a:lumOff val="75000"/>
               </a:schemeClr>
             </a:solidFill>
             <a:round/>
@@ -2532,15 +2698,12 @@
             <a:endParaRPr lang="de-DE"/>
           </a:p>
         </c:txPr>
-        <c:crossAx val="636671759"/>
+        <c:crossAx val="1210523247"/>
         <c:crosses val="autoZero"/>
-        <c:auto val="1"/>
-        <c:lblAlgn val="r"/>
-        <c:lblOffset val="100"/>
-        <c:noMultiLvlLbl val="0"/>
-      </c:catAx>
+        <c:crossBetween val="midCat"/>
+      </c:valAx>
       <c:valAx>
-        <c:axId val="636671759"/>
+        <c:axId val="1210523247"/>
         <c:scaling>
           <c:orientation val="minMax"/>
         </c:scaling>
@@ -2566,8 +2729,14 @@
         <c:tickLblPos val="nextTo"/>
         <c:spPr>
           <a:noFill/>
-          <a:ln>
-            <a:noFill/>
+          <a:ln w="9525" cap="flat" cmpd="sng" algn="ctr">
+            <a:solidFill>
+              <a:schemeClr val="tx1">
+                <a:lumMod val="25000"/>
+                <a:lumOff val="75000"/>
+              </a:schemeClr>
+            </a:solidFill>
+            <a:round/>
           </a:ln>
           <a:effectLst/>
         </c:spPr>
@@ -2591,9 +2760,9 @@
             <a:endParaRPr lang="de-DE"/>
           </a:p>
         </c:txPr>
-        <c:crossAx val="630565183"/>
+        <c:crossAx val="44138543"/>
         <c:crosses val="autoZero"/>
-        <c:crossBetween val="between"/>
+        <c:crossBetween val="midCat"/>
       </c:valAx>
       <c:spPr>
         <a:noFill/>
@@ -2684,19 +2853,7 @@
   <c:chart>
     <c:autoTitleDeleted val="0"/>
     <c:plotArea>
-      <c:layout>
-        <c:manualLayout>
-          <c:layoutTarget val="outer"/>
-          <c:xMode val="edge"/>
-          <c:yMode val="edge"/>
-          <c:wMode val="factor"/>
-          <c:hMode val="factor"/>
-          <c:x val="0.25"/>
-          <c:y val="0.2"/>
-          <c:w val="0.6"/>
-          <c:h val="0.5"/>
-        </c:manualLayout>
-      </c:layout>
+      <c:layout/>
       <c:barChart>
         <c:barDir val="col"/>
         <c:grouping val="clustered"/>
@@ -2710,7 +2867,7 @@
               <c:strCache>
                 <c:ptCount val="1"/>
                 <c:pt idx="0">
-                  <c:v>Datenreihe 1</c:v>
+                  <c:v>Sales</c:v>
                 </c:pt>
               </c:strCache>
             </c:strRef>
@@ -2731,16 +2888,18 @@
               <c:strCache>
                 <c:ptCount val="4"/>
                 <c:pt idx="0">
-                  <c:v>Kategorie 1</c:v>
+                  <c:v>North
+region</c:v>
                 </c:pt>
                 <c:pt idx="1">
-                  <c:v>Kategorie 2</c:v>
+                  <c:v>South</c:v>
                 </c:pt>
                 <c:pt idx="2">
-                  <c:v>Kategorie 3</c:v>
+                  <c:v>East
+region</c:v>
                 </c:pt>
                 <c:pt idx="3">
-                  <c:v>Kategorie 4</c:v>
+                  <c:v>West</c:v>
                 </c:pt>
               </c:strCache>
             </c:strRef>
@@ -2752,165 +2911,23 @@
                 <c:formatCode>General</c:formatCode>
                 <c:ptCount val="4"/>
                 <c:pt idx="0">
-                  <c:v>4.3</c:v>
+                  <c:v>4</c:v>
                 </c:pt>
                 <c:pt idx="1">
-                  <c:v>2.5</c:v>
+                  <c:v>6</c:v>
                 </c:pt>
                 <c:pt idx="2">
-                  <c:v>3.5</c:v>
+                  <c:v>5</c:v>
                 </c:pt>
                 <c:pt idx="3">
-                  <c:v>4.5</c:v>
+                  <c:v>7</c:v>
                 </c:pt>
               </c:numCache>
             </c:numRef>
           </c:val>
           <c:extLst>
             <c:ext xmlns:c16="http://schemas.microsoft.com/office/drawing/2014/chart" uri="{C3380CC4-5D6E-409C-BE32-E72D297353CC}">
-              <c16:uniqueId val="{00000000-7983-4E02-B0B7-C152ED2C6657}"/>
-            </c:ext>
-          </c:extLst>
-        </c:ser>
-        <c:ser>
-          <c:idx val="1"/>
-          <c:order val="1"/>
-          <c:tx>
-            <c:strRef>
-              <c:f>Tabelle1!$C$1</c:f>
-              <c:strCache>
-                <c:ptCount val="1"/>
-                <c:pt idx="0">
-                  <c:v>Datenreihe 2</c:v>
-                </c:pt>
-              </c:strCache>
-            </c:strRef>
-          </c:tx>
-          <c:spPr>
-            <a:solidFill>
-              <a:schemeClr val="accent2"/>
-            </a:solidFill>
-            <a:ln>
-              <a:noFill/>
-            </a:ln>
-            <a:effectLst/>
-          </c:spPr>
-          <c:invertIfNegative val="0"/>
-          <c:cat>
-            <c:strRef>
-              <c:f>Tabelle1!$A$2:$A$5</c:f>
-              <c:strCache>
-                <c:ptCount val="4"/>
-                <c:pt idx="0">
-                  <c:v>Kategorie 1</c:v>
-                </c:pt>
-                <c:pt idx="1">
-                  <c:v>Kategorie 2</c:v>
-                </c:pt>
-                <c:pt idx="2">
-                  <c:v>Kategorie 3</c:v>
-                </c:pt>
-                <c:pt idx="3">
-                  <c:v>Kategorie 4</c:v>
-                </c:pt>
-              </c:strCache>
-            </c:strRef>
-          </c:cat>
-          <c:val>
-            <c:numRef>
-              <c:f>Tabelle1!$C$2:$C$5</c:f>
-              <c:numCache>
-                <c:formatCode>General</c:formatCode>
-                <c:ptCount val="4"/>
-                <c:pt idx="0">
-                  <c:v>2.4</c:v>
-                </c:pt>
-                <c:pt idx="1">
-                  <c:v>4.4000000000000004</c:v>
-                </c:pt>
-                <c:pt idx="2">
-                  <c:v>1.8</c:v>
-                </c:pt>
-                <c:pt idx="3">
-                  <c:v>2.8</c:v>
-                </c:pt>
-              </c:numCache>
-            </c:numRef>
-          </c:val>
-          <c:extLst>
-            <c:ext xmlns:c16="http://schemas.microsoft.com/office/drawing/2014/chart" uri="{C3380CC4-5D6E-409C-BE32-E72D297353CC}">
-              <c16:uniqueId val="{00000001-7983-4E02-B0B7-C152ED2C6657}"/>
-            </c:ext>
-          </c:extLst>
-        </c:ser>
-        <c:ser>
-          <c:idx val="2"/>
-          <c:order val="2"/>
-          <c:tx>
-            <c:strRef>
-              <c:f>Tabelle1!$D$1</c:f>
-              <c:strCache>
-                <c:ptCount val="1"/>
-                <c:pt idx="0">
-                  <c:v>Datenreihe 3</c:v>
-                </c:pt>
-              </c:strCache>
-            </c:strRef>
-          </c:tx>
-          <c:spPr>
-            <a:solidFill>
-              <a:schemeClr val="accent3"/>
-            </a:solidFill>
-            <a:ln>
-              <a:noFill/>
-            </a:ln>
-            <a:effectLst/>
-          </c:spPr>
-          <c:invertIfNegative val="0"/>
-          <c:cat>
-            <c:strRef>
-              <c:f>Tabelle1!$A$2:$A$5</c:f>
-              <c:strCache>
-                <c:ptCount val="4"/>
-                <c:pt idx="0">
-                  <c:v>Kategorie 1</c:v>
-                </c:pt>
-                <c:pt idx="1">
-                  <c:v>Kategorie 2</c:v>
-                </c:pt>
-                <c:pt idx="2">
-                  <c:v>Kategorie 3</c:v>
-                </c:pt>
-                <c:pt idx="3">
-                  <c:v>Kategorie 4</c:v>
-                </c:pt>
-              </c:strCache>
-            </c:strRef>
-          </c:cat>
-          <c:val>
-            <c:numRef>
-              <c:f>Tabelle1!$D$2:$D$5</c:f>
-              <c:numCache>
-                <c:formatCode>General</c:formatCode>
-                <c:ptCount val="4"/>
-                <c:pt idx="0">
-                  <c:v>2</c:v>
-                </c:pt>
-                <c:pt idx="1">
-                  <c:v>2</c:v>
-                </c:pt>
-                <c:pt idx="2">
-                  <c:v>3</c:v>
-                </c:pt>
-                <c:pt idx="3">
-                  <c:v>5</c:v>
-                </c:pt>
-              </c:numCache>
-            </c:numRef>
-          </c:val>
-          <c:extLst>
-            <c:ext xmlns:c16="http://schemas.microsoft.com/office/drawing/2014/chart" uri="{C3380CC4-5D6E-409C-BE32-E72D297353CC}">
-              <c16:uniqueId val="{00000002-7983-4E02-B0B7-C152ED2C6657}"/>
+              <c16:uniqueId val="{00000000-41DB-462A-BB0F-34CA206FB9CE}"/>
             </c:ext>
           </c:extLst>
         </c:ser>
@@ -2924,11 +2941,11 @@
         </c:dLbls>
         <c:gapWidth val="219"/>
         <c:overlap val="-27"/>
-        <c:axId val="630562399"/>
-        <c:axId val="636701039"/>
+        <c:axId val="44143183"/>
+        <c:axId val="1210531407"/>
       </c:barChart>
       <c:catAx>
-        <c:axId val="630562399"/>
+        <c:axId val="44143183"/>
         <c:scaling>
           <c:orientation val="minMax"/>
         </c:scaling>
@@ -2971,15 +2988,15 @@
             <a:endParaRPr lang="de-DE"/>
           </a:p>
         </c:txPr>
-        <c:crossAx val="636701039"/>
+        <c:crossAx val="1210531407"/>
         <c:crosses val="autoZero"/>
         <c:auto val="1"/>
-        <c:lblAlgn val="ctr"/>
+        <c:lblAlgn val="l"/>
         <c:lblOffset val="100"/>
         <c:noMultiLvlLbl val="0"/>
       </c:catAx>
       <c:valAx>
-        <c:axId val="636701039"/>
+        <c:axId val="1210531407"/>
         <c:scaling>
           <c:orientation val="minMax"/>
         </c:scaling>
@@ -3030,7 +3047,733 @@
             <a:endParaRPr lang="de-DE"/>
           </a:p>
         </c:txPr>
-        <c:crossAx val="630562399"/>
+        <c:crossAx val="44143183"/>
+        <c:crosses val="autoZero"/>
+        <c:crossBetween val="between"/>
+      </c:valAx>
+      <c:spPr>
+        <a:noFill/>
+        <a:ln>
+          <a:noFill/>
+        </a:ln>
+        <a:effectLst/>
+      </c:spPr>
+    </c:plotArea>
+    <c:legend>
+      <c:legendPos val="b"/>
+      <c:overlay val="0"/>
+      <c:spPr>
+        <a:noFill/>
+        <a:ln>
+          <a:noFill/>
+        </a:ln>
+        <a:effectLst/>
+      </c:spPr>
+      <c:txPr>
+        <a:bodyPr rot="0" spcFirstLastPara="1" vertOverflow="ellipsis" vert="horz" wrap="square" anchor="ctr" anchorCtr="1"/>
+        <a:lstStyle/>
+        <a:p>
+          <a:pPr>
+            <a:defRPr sz="1197" b="0" i="0" u="none" strike="noStrike" kern="1200" baseline="0">
+              <a:solidFill>
+                <a:schemeClr val="tx1">
+                  <a:lumMod val="65000"/>
+                  <a:lumOff val="35000"/>
+                </a:schemeClr>
+              </a:solidFill>
+              <a:latin typeface="+mn-lt"/>
+              <a:ea typeface="+mn-ea"/>
+              <a:cs typeface="+mn-cs"/>
+            </a:defRPr>
+          </a:pPr>
+          <a:endParaRPr lang="de-DE"/>
+        </a:p>
+      </c:txPr>
+    </c:legend>
+    <c:plotVisOnly val="1"/>
+    <c:dispBlanksAs val="gap"/>
+    <c:showDLblsOverMax val="0"/>
+    <c:extLst>
+      <c:ext xmlns:c16r3="http://schemas.microsoft.com/office/drawing/2017/03/chart" uri="{56B9EC1D-385E-4148-901F-78D8002777C0}">
+        <c16r3:dataDisplayOptions16>
+          <c16r3:dispNaAsBlank val="1"/>
+        </c16r3:dataDisplayOptions16>
+      </c:ext>
+    </c:extLst>
+  </c:chart>
+  <c:spPr>
+    <a:noFill/>
+    <a:ln>
+      <a:noFill/>
+    </a:ln>
+    <a:effectLst/>
+  </c:spPr>
+  <c:txPr>
+    <a:bodyPr/>
+    <a:lstStyle/>
+    <a:p>
+      <a:pPr>
+        <a:defRPr/>
+      </a:pPr>
+      <a:endParaRPr lang="de-DE"/>
+    </a:p>
+  </c:txPr>
+  <c:externalData r:id="rId3">
+    <c:autoUpdate val="0"/>
+  </c:externalData>
+</c:chartSpace>
+</file>
+
+<file path=ppt/charts/chart18.xml><?xml version="1.0" encoding="utf-8"?>
+<c:chartSpace xmlns:c="http://schemas.openxmlformats.org/drawingml/2006/chart" xmlns:a="http://schemas.openxmlformats.org/drawingml/2006/main" xmlns:r="http://schemas.openxmlformats.org/officeDocument/2006/relationships" xmlns:c16r2="http://schemas.microsoft.com/office/drawing/2015/06/chart">
+  <c:date1904 val="0"/>
+  <c:lang val="de-DE"/>
+  <c:roundedCorners val="0"/>
+  <mc:AlternateContent xmlns:mc="http://schemas.openxmlformats.org/markup-compatibility/2006">
+    <mc:Choice xmlns:c14="http://schemas.microsoft.com/office/drawing/2007/8/2/chart" Requires="c14">
+      <c14:style val="102"/>
+    </mc:Choice>
+    <mc:Fallback>
+      <c:style val="2"/>
+    </mc:Fallback>
+  </mc:AlternateContent>
+  <c:chart>
+    <c:autoTitleDeleted val="0"/>
+    <c:plotArea>
+      <c:layout/>
+      <c:barChart>
+        <c:barDir val="col"/>
+        <c:grouping val="clustered"/>
+        <c:varyColors val="0"/>
+        <c:ser>
+          <c:idx val="0"/>
+          <c:order val="0"/>
+          <c:tx>
+            <c:strRef>
+              <c:f>Tabelle1!$B$1</c:f>
+              <c:strCache>
+                <c:ptCount val="1"/>
+                <c:pt idx="0">
+                  <c:v>Sales</c:v>
+                </c:pt>
+              </c:strCache>
+            </c:strRef>
+          </c:tx>
+          <c:spPr>
+            <a:solidFill>
+              <a:schemeClr val="accent1"/>
+            </a:solidFill>
+            <a:ln>
+              <a:noFill/>
+            </a:ln>
+            <a:effectLst/>
+          </c:spPr>
+          <c:invertIfNegative val="0"/>
+          <c:cat>
+            <c:strRef>
+              <c:f>Tabelle1!$A$2:$A$5</c:f>
+              <c:strCache>
+                <c:ptCount val="4"/>
+                <c:pt idx="0">
+                  <c:v>North
+region</c:v>
+                </c:pt>
+                <c:pt idx="1">
+                  <c:v>South</c:v>
+                </c:pt>
+                <c:pt idx="2">
+                  <c:v>East
+region</c:v>
+                </c:pt>
+                <c:pt idx="3">
+                  <c:v>West</c:v>
+                </c:pt>
+              </c:strCache>
+            </c:strRef>
+          </c:cat>
+          <c:val>
+            <c:numRef>
+              <c:f>Tabelle1!$B$2:$B$5</c:f>
+              <c:numCache>
+                <c:formatCode>General</c:formatCode>
+                <c:ptCount val="4"/>
+                <c:pt idx="0">
+                  <c:v>4</c:v>
+                </c:pt>
+                <c:pt idx="1">
+                  <c:v>6</c:v>
+                </c:pt>
+                <c:pt idx="2">
+                  <c:v>5</c:v>
+                </c:pt>
+                <c:pt idx="3">
+                  <c:v>7</c:v>
+                </c:pt>
+              </c:numCache>
+            </c:numRef>
+          </c:val>
+          <c:extLst>
+            <c:ext xmlns:c16="http://schemas.microsoft.com/office/drawing/2014/chart" uri="{C3380CC4-5D6E-409C-BE32-E72D297353CC}">
+              <c16:uniqueId val="{00000000-693F-4D4C-87E0-238ABCD7D675}"/>
+            </c:ext>
+          </c:extLst>
+        </c:ser>
+        <c:dLbls>
+          <c:showLegendKey val="0"/>
+          <c:showVal val="0"/>
+          <c:showCatName val="0"/>
+          <c:showSerName val="0"/>
+          <c:showPercent val="0"/>
+          <c:showBubbleSize val="0"/>
+        </c:dLbls>
+        <c:gapWidth val="219"/>
+        <c:overlap val="-27"/>
+        <c:axId val="44150143"/>
+        <c:axId val="1210525167"/>
+      </c:barChart>
+      <c:catAx>
+        <c:axId val="44150143"/>
+        <c:scaling>
+          <c:orientation val="minMax"/>
+        </c:scaling>
+        <c:delete val="0"/>
+        <c:axPos val="b"/>
+        <c:numFmt formatCode="General" sourceLinked="1"/>
+        <c:majorTickMark val="none"/>
+        <c:minorTickMark val="none"/>
+        <c:tickLblPos val="nextTo"/>
+        <c:spPr>
+          <a:noFill/>
+          <a:ln w="9525" cap="flat" cmpd="sng" algn="ctr">
+            <a:solidFill>
+              <a:schemeClr val="tx1">
+                <a:lumMod val="15000"/>
+                <a:lumOff val="85000"/>
+              </a:schemeClr>
+            </a:solidFill>
+            <a:round/>
+          </a:ln>
+          <a:effectLst/>
+        </c:spPr>
+        <c:txPr>
+          <a:bodyPr rot="-60000000" spcFirstLastPara="1" vertOverflow="ellipsis" vert="horz" wrap="square" anchor="ctr" anchorCtr="1"/>
+          <a:lstStyle/>
+          <a:p>
+            <a:pPr>
+              <a:defRPr sz="1197" b="0" i="0" u="none" strike="noStrike" kern="1200" baseline="0">
+                <a:solidFill>
+                  <a:schemeClr val="tx1">
+                    <a:lumMod val="65000"/>
+                    <a:lumOff val="35000"/>
+                  </a:schemeClr>
+                </a:solidFill>
+                <a:latin typeface="+mn-lt"/>
+                <a:ea typeface="+mn-ea"/>
+                <a:cs typeface="+mn-cs"/>
+              </a:defRPr>
+            </a:pPr>
+            <a:endParaRPr lang="de-DE"/>
+          </a:p>
+        </c:txPr>
+        <c:crossAx val="1210525167"/>
+        <c:crosses val="autoZero"/>
+        <c:auto val="1"/>
+        <c:lblAlgn val="r"/>
+        <c:lblOffset val="100"/>
+        <c:noMultiLvlLbl val="0"/>
+      </c:catAx>
+      <c:valAx>
+        <c:axId val="1210525167"/>
+        <c:scaling>
+          <c:orientation val="minMax"/>
+        </c:scaling>
+        <c:delete val="0"/>
+        <c:axPos val="l"/>
+        <c:majorGridlines>
+          <c:spPr>
+            <a:ln w="9525" cap="flat" cmpd="sng" algn="ctr">
+              <a:solidFill>
+                <a:schemeClr val="tx1">
+                  <a:lumMod val="15000"/>
+                  <a:lumOff val="85000"/>
+                </a:schemeClr>
+              </a:solidFill>
+              <a:round/>
+            </a:ln>
+            <a:effectLst/>
+          </c:spPr>
+        </c:majorGridlines>
+        <c:numFmt formatCode="General" sourceLinked="1"/>
+        <c:majorTickMark val="none"/>
+        <c:minorTickMark val="none"/>
+        <c:tickLblPos val="nextTo"/>
+        <c:spPr>
+          <a:noFill/>
+          <a:ln>
+            <a:noFill/>
+          </a:ln>
+          <a:effectLst/>
+        </c:spPr>
+        <c:txPr>
+          <a:bodyPr rot="-60000000" spcFirstLastPara="1" vertOverflow="ellipsis" vert="horz" wrap="square" anchor="ctr" anchorCtr="1"/>
+          <a:lstStyle/>
+          <a:p>
+            <a:pPr>
+              <a:defRPr sz="1197" b="0" i="0" u="none" strike="noStrike" kern="1200" baseline="0">
+                <a:solidFill>
+                  <a:schemeClr val="tx1">
+                    <a:lumMod val="65000"/>
+                    <a:lumOff val="35000"/>
+                  </a:schemeClr>
+                </a:solidFill>
+                <a:latin typeface="+mn-lt"/>
+                <a:ea typeface="+mn-ea"/>
+                <a:cs typeface="+mn-cs"/>
+              </a:defRPr>
+            </a:pPr>
+            <a:endParaRPr lang="de-DE"/>
+          </a:p>
+        </c:txPr>
+        <c:crossAx val="44150143"/>
+        <c:crosses val="autoZero"/>
+        <c:crossBetween val="between"/>
+      </c:valAx>
+      <c:spPr>
+        <a:noFill/>
+        <a:ln>
+          <a:noFill/>
+        </a:ln>
+        <a:effectLst/>
+      </c:spPr>
+    </c:plotArea>
+    <c:legend>
+      <c:legendPos val="b"/>
+      <c:overlay val="0"/>
+      <c:spPr>
+        <a:noFill/>
+        <a:ln>
+          <a:noFill/>
+        </a:ln>
+        <a:effectLst/>
+      </c:spPr>
+      <c:txPr>
+        <a:bodyPr rot="0" spcFirstLastPara="1" vertOverflow="ellipsis" vert="horz" wrap="square" anchor="ctr" anchorCtr="1"/>
+        <a:lstStyle/>
+        <a:p>
+          <a:pPr>
+            <a:defRPr sz="1197" b="0" i="0" u="none" strike="noStrike" kern="1200" baseline="0">
+              <a:solidFill>
+                <a:schemeClr val="tx1">
+                  <a:lumMod val="65000"/>
+                  <a:lumOff val="35000"/>
+                </a:schemeClr>
+              </a:solidFill>
+              <a:latin typeface="+mn-lt"/>
+              <a:ea typeface="+mn-ea"/>
+              <a:cs typeface="+mn-cs"/>
+            </a:defRPr>
+          </a:pPr>
+          <a:endParaRPr lang="de-DE"/>
+        </a:p>
+      </c:txPr>
+    </c:legend>
+    <c:plotVisOnly val="1"/>
+    <c:dispBlanksAs val="gap"/>
+    <c:showDLblsOverMax val="0"/>
+    <c:extLst>
+      <c:ext xmlns:c16r3="http://schemas.microsoft.com/office/drawing/2017/03/chart" uri="{56B9EC1D-385E-4148-901F-78D8002777C0}">
+        <c16r3:dataDisplayOptions16>
+          <c16r3:dispNaAsBlank val="1"/>
+        </c16r3:dataDisplayOptions16>
+      </c:ext>
+    </c:extLst>
+  </c:chart>
+  <c:spPr>
+    <a:noFill/>
+    <a:ln>
+      <a:noFill/>
+    </a:ln>
+    <a:effectLst/>
+  </c:spPr>
+  <c:txPr>
+    <a:bodyPr/>
+    <a:lstStyle/>
+    <a:p>
+      <a:pPr>
+        <a:defRPr/>
+      </a:pPr>
+      <a:endParaRPr lang="de-DE"/>
+    </a:p>
+  </c:txPr>
+  <c:externalData r:id="rId3">
+    <c:autoUpdate val="0"/>
+  </c:externalData>
+</c:chartSpace>
+</file>
+
+<file path=ppt/charts/chart19.xml><?xml version="1.0" encoding="utf-8"?>
+<c:chartSpace xmlns:c="http://schemas.openxmlformats.org/drawingml/2006/chart" xmlns:a="http://schemas.openxmlformats.org/drawingml/2006/main" xmlns:r="http://schemas.openxmlformats.org/officeDocument/2006/relationships" xmlns:c16r2="http://schemas.microsoft.com/office/drawing/2015/06/chart">
+  <c:date1904 val="0"/>
+  <c:lang val="de-DE"/>
+  <c:roundedCorners val="0"/>
+  <mc:AlternateContent xmlns:mc="http://schemas.openxmlformats.org/markup-compatibility/2006">
+    <mc:Choice xmlns:c14="http://schemas.microsoft.com/office/drawing/2007/8/2/chart" Requires="c14">
+      <c14:style val="102"/>
+    </mc:Choice>
+    <mc:Fallback>
+      <c:style val="2"/>
+    </mc:Fallback>
+  </mc:AlternateContent>
+  <c:chart>
+    <c:autoTitleDeleted val="0"/>
+    <c:plotArea>
+      <c:layout>
+        <c:manualLayout>
+          <c:layoutTarget val="outer"/>
+          <c:xMode val="edge"/>
+          <c:yMode val="edge"/>
+          <c:wMode val="factor"/>
+          <c:hMode val="factor"/>
+          <c:x val="0.25"/>
+          <c:y val="0.2"/>
+          <c:w val="0.6"/>
+          <c:h val="0.5"/>
+        </c:manualLayout>
+      </c:layout>
+      <c:barChart>
+        <c:barDir val="col"/>
+        <c:grouping val="clustered"/>
+        <c:varyColors val="0"/>
+        <c:ser>
+          <c:idx val="0"/>
+          <c:order val="0"/>
+          <c:tx>
+            <c:strRef>
+              <c:f>Tabelle1!$B$1</c:f>
+              <c:strCache>
+                <c:ptCount val="1"/>
+                <c:pt idx="0">
+                  <c:v>Datenreihe 1</c:v>
+                </c:pt>
+              </c:strCache>
+            </c:strRef>
+          </c:tx>
+          <c:spPr>
+            <a:solidFill>
+              <a:schemeClr val="accent1"/>
+            </a:solidFill>
+            <a:ln>
+              <a:noFill/>
+            </a:ln>
+            <a:effectLst/>
+          </c:spPr>
+          <c:invertIfNegative val="0"/>
+          <c:cat>
+            <c:strRef>
+              <c:f>Tabelle1!$A$2:$A$5</c:f>
+              <c:strCache>
+                <c:ptCount val="4"/>
+                <c:pt idx="0">
+                  <c:v>Kategorie 1</c:v>
+                </c:pt>
+                <c:pt idx="1">
+                  <c:v>Kategorie 2</c:v>
+                </c:pt>
+                <c:pt idx="2">
+                  <c:v>Kategorie 3</c:v>
+                </c:pt>
+                <c:pt idx="3">
+                  <c:v>Kategorie 4</c:v>
+                </c:pt>
+              </c:strCache>
+            </c:strRef>
+          </c:cat>
+          <c:val>
+            <c:numRef>
+              <c:f>Tabelle1!$B$2:$B$5</c:f>
+              <c:numCache>
+                <c:formatCode>General</c:formatCode>
+                <c:ptCount val="4"/>
+                <c:pt idx="0">
+                  <c:v>4.3</c:v>
+                </c:pt>
+                <c:pt idx="1">
+                  <c:v>2.5</c:v>
+                </c:pt>
+                <c:pt idx="2">
+                  <c:v>3.5</c:v>
+                </c:pt>
+                <c:pt idx="3">
+                  <c:v>4.5</c:v>
+                </c:pt>
+              </c:numCache>
+            </c:numRef>
+          </c:val>
+          <c:extLst>
+            <c:ext xmlns:c16="http://schemas.microsoft.com/office/drawing/2014/chart" uri="{C3380CC4-5D6E-409C-BE32-E72D297353CC}">
+              <c16:uniqueId val="{00000000-C592-4901-A2C4-4895D909A33B}"/>
+            </c:ext>
+          </c:extLst>
+        </c:ser>
+        <c:ser>
+          <c:idx val="1"/>
+          <c:order val="1"/>
+          <c:tx>
+            <c:strRef>
+              <c:f>Tabelle1!$C$1</c:f>
+              <c:strCache>
+                <c:ptCount val="1"/>
+                <c:pt idx="0">
+                  <c:v>Datenreihe 2</c:v>
+                </c:pt>
+              </c:strCache>
+            </c:strRef>
+          </c:tx>
+          <c:spPr>
+            <a:solidFill>
+              <a:schemeClr val="accent2"/>
+            </a:solidFill>
+            <a:ln>
+              <a:noFill/>
+            </a:ln>
+            <a:effectLst/>
+          </c:spPr>
+          <c:invertIfNegative val="0"/>
+          <c:cat>
+            <c:strRef>
+              <c:f>Tabelle1!$A$2:$A$5</c:f>
+              <c:strCache>
+                <c:ptCount val="4"/>
+                <c:pt idx="0">
+                  <c:v>Kategorie 1</c:v>
+                </c:pt>
+                <c:pt idx="1">
+                  <c:v>Kategorie 2</c:v>
+                </c:pt>
+                <c:pt idx="2">
+                  <c:v>Kategorie 3</c:v>
+                </c:pt>
+                <c:pt idx="3">
+                  <c:v>Kategorie 4</c:v>
+                </c:pt>
+              </c:strCache>
+            </c:strRef>
+          </c:cat>
+          <c:val>
+            <c:numRef>
+              <c:f>Tabelle1!$C$2:$C$5</c:f>
+              <c:numCache>
+                <c:formatCode>General</c:formatCode>
+                <c:ptCount val="4"/>
+                <c:pt idx="0">
+                  <c:v>2.4</c:v>
+                </c:pt>
+                <c:pt idx="1">
+                  <c:v>4.4000000000000004</c:v>
+                </c:pt>
+                <c:pt idx="2">
+                  <c:v>1.8</c:v>
+                </c:pt>
+                <c:pt idx="3">
+                  <c:v>2.8</c:v>
+                </c:pt>
+              </c:numCache>
+            </c:numRef>
+          </c:val>
+          <c:extLst>
+            <c:ext xmlns:c16="http://schemas.microsoft.com/office/drawing/2014/chart" uri="{C3380CC4-5D6E-409C-BE32-E72D297353CC}">
+              <c16:uniqueId val="{00000001-C592-4901-A2C4-4895D909A33B}"/>
+            </c:ext>
+          </c:extLst>
+        </c:ser>
+        <c:ser>
+          <c:idx val="2"/>
+          <c:order val="2"/>
+          <c:tx>
+            <c:strRef>
+              <c:f>Tabelle1!$D$1</c:f>
+              <c:strCache>
+                <c:ptCount val="1"/>
+                <c:pt idx="0">
+                  <c:v>Datenreihe 3</c:v>
+                </c:pt>
+              </c:strCache>
+            </c:strRef>
+          </c:tx>
+          <c:spPr>
+            <a:solidFill>
+              <a:schemeClr val="accent3"/>
+            </a:solidFill>
+            <a:ln>
+              <a:noFill/>
+            </a:ln>
+            <a:effectLst/>
+          </c:spPr>
+          <c:invertIfNegative val="0"/>
+          <c:cat>
+            <c:strRef>
+              <c:f>Tabelle1!$A$2:$A$5</c:f>
+              <c:strCache>
+                <c:ptCount val="4"/>
+                <c:pt idx="0">
+                  <c:v>Kategorie 1</c:v>
+                </c:pt>
+                <c:pt idx="1">
+                  <c:v>Kategorie 2</c:v>
+                </c:pt>
+                <c:pt idx="2">
+                  <c:v>Kategorie 3</c:v>
+                </c:pt>
+                <c:pt idx="3">
+                  <c:v>Kategorie 4</c:v>
+                </c:pt>
+              </c:strCache>
+            </c:strRef>
+          </c:cat>
+          <c:val>
+            <c:numRef>
+              <c:f>Tabelle1!$D$2:$D$5</c:f>
+              <c:numCache>
+                <c:formatCode>General</c:formatCode>
+                <c:ptCount val="4"/>
+                <c:pt idx="0">
+                  <c:v>2</c:v>
+                </c:pt>
+                <c:pt idx="1">
+                  <c:v>2</c:v>
+                </c:pt>
+                <c:pt idx="2">
+                  <c:v>3</c:v>
+                </c:pt>
+                <c:pt idx="3">
+                  <c:v>5</c:v>
+                </c:pt>
+              </c:numCache>
+            </c:numRef>
+          </c:val>
+          <c:extLst>
+            <c:ext xmlns:c16="http://schemas.microsoft.com/office/drawing/2014/chart" uri="{C3380CC4-5D6E-409C-BE32-E72D297353CC}">
+              <c16:uniqueId val="{00000002-C592-4901-A2C4-4895D909A33B}"/>
+            </c:ext>
+          </c:extLst>
+        </c:ser>
+        <c:dLbls>
+          <c:showLegendKey val="0"/>
+          <c:showVal val="0"/>
+          <c:showCatName val="0"/>
+          <c:showSerName val="0"/>
+          <c:showPercent val="0"/>
+          <c:showBubbleSize val="0"/>
+        </c:dLbls>
+        <c:gapWidth val="219"/>
+        <c:overlap val="-27"/>
+        <c:axId val="44134831"/>
+        <c:axId val="1210524687"/>
+      </c:barChart>
+      <c:catAx>
+        <c:axId val="44134831"/>
+        <c:scaling>
+          <c:orientation val="minMax"/>
+        </c:scaling>
+        <c:delete val="0"/>
+        <c:axPos val="b"/>
+        <c:numFmt formatCode="General" sourceLinked="1"/>
+        <c:majorTickMark val="none"/>
+        <c:minorTickMark val="none"/>
+        <c:tickLblPos val="nextTo"/>
+        <c:spPr>
+          <a:noFill/>
+          <a:ln w="9525" cap="flat" cmpd="sng" algn="ctr">
+            <a:solidFill>
+              <a:schemeClr val="tx1">
+                <a:lumMod val="15000"/>
+                <a:lumOff val="85000"/>
+              </a:schemeClr>
+            </a:solidFill>
+            <a:round/>
+          </a:ln>
+          <a:effectLst/>
+        </c:spPr>
+        <c:txPr>
+          <a:bodyPr rot="-60000000" spcFirstLastPara="1" vertOverflow="ellipsis" vert="horz" wrap="square" anchor="ctr" anchorCtr="1"/>
+          <a:lstStyle/>
+          <a:p>
+            <a:pPr>
+              <a:defRPr sz="1197" b="0" i="0" u="none" strike="noStrike" kern="1200" baseline="0">
+                <a:solidFill>
+                  <a:schemeClr val="tx1">
+                    <a:lumMod val="65000"/>
+                    <a:lumOff val="35000"/>
+                  </a:schemeClr>
+                </a:solidFill>
+                <a:latin typeface="+mn-lt"/>
+                <a:ea typeface="+mn-ea"/>
+                <a:cs typeface="+mn-cs"/>
+              </a:defRPr>
+            </a:pPr>
+            <a:endParaRPr lang="de-DE"/>
+          </a:p>
+        </c:txPr>
+        <c:crossAx val="1210524687"/>
+        <c:crosses val="autoZero"/>
+        <c:auto val="1"/>
+        <c:lblAlgn val="ctr"/>
+        <c:lblOffset val="100"/>
+        <c:noMultiLvlLbl val="0"/>
+      </c:catAx>
+      <c:valAx>
+        <c:axId val="1210524687"/>
+        <c:scaling>
+          <c:orientation val="minMax"/>
+        </c:scaling>
+        <c:delete val="0"/>
+        <c:axPos val="l"/>
+        <c:majorGridlines>
+          <c:spPr>
+            <a:ln w="9525" cap="flat" cmpd="sng" algn="ctr">
+              <a:solidFill>
+                <a:schemeClr val="tx1">
+                  <a:lumMod val="15000"/>
+                  <a:lumOff val="85000"/>
+                </a:schemeClr>
+              </a:solidFill>
+              <a:round/>
+            </a:ln>
+            <a:effectLst/>
+          </c:spPr>
+        </c:majorGridlines>
+        <c:numFmt formatCode="General" sourceLinked="1"/>
+        <c:majorTickMark val="none"/>
+        <c:minorTickMark val="none"/>
+        <c:tickLblPos val="nextTo"/>
+        <c:spPr>
+          <a:noFill/>
+          <a:ln>
+            <a:noFill/>
+          </a:ln>
+          <a:effectLst/>
+        </c:spPr>
+        <c:txPr>
+          <a:bodyPr rot="-60000000" spcFirstLastPara="1" vertOverflow="ellipsis" vert="horz" wrap="square" anchor="ctr" anchorCtr="1"/>
+          <a:lstStyle/>
+          <a:p>
+            <a:pPr>
+              <a:defRPr sz="1197" b="0" i="0" u="none" strike="noStrike" kern="1200" baseline="0">
+                <a:solidFill>
+                  <a:schemeClr val="tx1">
+                    <a:lumMod val="65000"/>
+                    <a:lumOff val="35000"/>
+                  </a:schemeClr>
+                </a:solidFill>
+                <a:latin typeface="+mn-lt"/>
+                <a:ea typeface="+mn-ea"/>
+                <a:cs typeface="+mn-cs"/>
+              </a:defRPr>
+            </a:pPr>
+            <a:endParaRPr lang="de-DE"/>
+          </a:p>
+        </c:txPr>
+        <c:crossAx val="44134831"/>
         <c:crosses val="autoZero"/>
         <c:crossBetween val="between"/>
       </c:valAx>
@@ -3245,7 +3988,7 @@
           <c:smooth val="0"/>
           <c:extLst>
             <c:ext xmlns:c16="http://schemas.microsoft.com/office/drawing/2014/chart" uri="{C3380CC4-5D6E-409C-BE32-E72D297353CC}">
-              <c16:uniqueId val="{00000000-3204-407C-8A0B-FAF3A3F6C89A}"/>
+              <c16:uniqueId val="{00000000-279E-49C5-BC9A-1DEE13815975}"/>
             </c:ext>
           </c:extLst>
         </c:ser>
@@ -3259,11 +4002,11 @@
         </c:dLbls>
         <c:marker val="1"/>
         <c:smooth val="0"/>
-        <c:axId val="345270335"/>
-        <c:axId val="636752399"/>
+        <c:axId val="1969656144"/>
+        <c:axId val="1210450767"/>
       </c:lineChart>
       <c:catAx>
-        <c:axId val="345270335"/>
+        <c:axId val="1969656144"/>
         <c:scaling>
           <c:orientation val="minMax"/>
         </c:scaling>
@@ -3306,7 +4049,7 @@
             <a:endParaRPr lang="de-DE"/>
           </a:p>
         </c:txPr>
-        <c:crossAx val="636752399"/>
+        <c:crossAx val="1210450767"/>
         <c:crosses val="autoZero"/>
         <c:auto val="1"/>
         <c:lblAlgn val="ctr"/>
@@ -3314,7 +4057,7 @@
         <c:noMultiLvlLbl val="0"/>
       </c:catAx>
       <c:valAx>
-        <c:axId val="636752399"/>
+        <c:axId val="1210450767"/>
         <c:scaling>
           <c:orientation val="minMax"/>
         </c:scaling>
@@ -3365,7 +4108,7 @@
             <a:endParaRPr lang="de-DE"/>
           </a:p>
         </c:txPr>
-        <c:crossAx val="345270335"/>
+        <c:crossAx val="1969656144"/>
         <c:crosses val="autoZero"/>
         <c:crossBetween val="between"/>
       </c:valAx>
@@ -3580,7 +4323,7 @@
           <c:smooth val="0"/>
           <c:extLst>
             <c:ext xmlns:c16="http://schemas.microsoft.com/office/drawing/2014/chart" uri="{C3380CC4-5D6E-409C-BE32-E72D297353CC}">
-              <c16:uniqueId val="{00000000-7F6F-4DB9-90FD-E1DD058CC15D}"/>
+              <c16:uniqueId val="{00000000-48EB-4E17-B5DE-ED063E9EFD22}"/>
             </c:ext>
           </c:extLst>
         </c:ser>
@@ -3594,11 +4337,11 @@
         </c:dLbls>
         <c:marker val="1"/>
         <c:smooth val="0"/>
-        <c:axId val="664645503"/>
-        <c:axId val="636557519"/>
+        <c:axId val="14622207"/>
+        <c:axId val="1210446927"/>
       </c:lineChart>
       <c:catAx>
-        <c:axId val="664645503"/>
+        <c:axId val="14622207"/>
         <c:scaling>
           <c:orientation val="minMax"/>
         </c:scaling>
@@ -3641,7 +4384,7 @@
             <a:endParaRPr lang="de-DE"/>
           </a:p>
         </c:txPr>
-        <c:crossAx val="636557519"/>
+        <c:crossAx val="1210446927"/>
         <c:crosses val="autoZero"/>
         <c:auto val="1"/>
         <c:lblAlgn val="ctr"/>
@@ -3649,7 +4392,7 @@
         <c:noMultiLvlLbl val="0"/>
       </c:catAx>
       <c:valAx>
-        <c:axId val="636557519"/>
+        <c:axId val="1210446927"/>
         <c:scaling>
           <c:orientation val="minMax"/>
         </c:scaling>
@@ -3700,7 +4443,7 @@
             <a:endParaRPr lang="de-DE"/>
           </a:p>
         </c:txPr>
-        <c:crossAx val="664645503"/>
+        <c:crossAx val="14622207"/>
         <c:crosses val="autoZero"/>
         <c:crossBetween val="between"/>
       </c:valAx>
@@ -3859,7 +4602,7 @@
           </c:val>
           <c:extLst>
             <c:ext xmlns:c16="http://schemas.microsoft.com/office/drawing/2014/chart" uri="{C3380CC4-5D6E-409C-BE32-E72D297353CC}">
-              <c16:uniqueId val="{00000000-AE66-4191-9638-96E4FD25218F}"/>
+              <c16:uniqueId val="{00000000-085F-402F-B50D-2E1B56D18E0E}"/>
             </c:ext>
           </c:extLst>
         </c:ser>
@@ -3924,7 +4667,7 @@
           </c:val>
           <c:extLst>
             <c:ext xmlns:c16="http://schemas.microsoft.com/office/drawing/2014/chart" uri="{C3380CC4-5D6E-409C-BE32-E72D297353CC}">
-              <c16:uniqueId val="{00000001-AE66-4191-9638-96E4FD25218F}"/>
+              <c16:uniqueId val="{00000001-085F-402F-B50D-2E1B56D18E0E}"/>
             </c:ext>
           </c:extLst>
         </c:ser>
@@ -3938,11 +4681,11 @@
         </c:dLbls>
         <c:gapWidth val="219"/>
         <c:overlap val="-27"/>
-        <c:axId val="665706207"/>
-        <c:axId val="636576239"/>
+        <c:axId val="2057652128"/>
+        <c:axId val="1210444527"/>
       </c:barChart>
       <c:catAx>
-        <c:axId val="665706207"/>
+        <c:axId val="2057652128"/>
         <c:scaling>
           <c:orientation val="minMax"/>
         </c:scaling>
@@ -3985,7 +4728,7 @@
             <a:endParaRPr lang="de-DE"/>
           </a:p>
         </c:txPr>
-        <c:crossAx val="636576239"/>
+        <c:crossAx val="1210444527"/>
         <c:crosses val="autoZero"/>
         <c:auto val="1"/>
         <c:lblAlgn val="ctr"/>
@@ -3993,7 +4736,7 @@
         <c:noMultiLvlLbl val="0"/>
       </c:catAx>
       <c:valAx>
-        <c:axId val="636576239"/>
+        <c:axId val="1210444527"/>
         <c:scaling>
           <c:orientation val="minMax"/>
         </c:scaling>
@@ -4044,7 +4787,7 @@
             <a:endParaRPr lang="de-DE"/>
           </a:p>
         </c:txPr>
-        <c:crossAx val="665706207"/>
+        <c:crossAx val="2057652128"/>
         <c:crosses val="autoZero"/>
         <c:crossBetween val="between"/>
       </c:valAx>
@@ -4209,7 +4952,7 @@
           </c:val>
           <c:extLst>
             <c:ext xmlns:c16="http://schemas.microsoft.com/office/drawing/2014/chart" uri="{C3380CC4-5D6E-409C-BE32-E72D297353CC}">
-              <c16:uniqueId val="{00000000-09B6-48D5-B507-05D541A33917}"/>
+              <c16:uniqueId val="{00000000-E6F0-49F6-89E8-FFE36DF5CC20}"/>
             </c:ext>
           </c:extLst>
         </c:ser>
@@ -4280,7 +5023,7 @@
           </c:val>
           <c:extLst>
             <c:ext xmlns:c16="http://schemas.microsoft.com/office/drawing/2014/chart" uri="{C3380CC4-5D6E-409C-BE32-E72D297353CC}">
-              <c16:uniqueId val="{00000002-09B6-48D5-B507-05D541A33917}"/>
+              <c16:uniqueId val="{00000002-E6F0-49F6-89E8-FFE36DF5CC20}"/>
             </c:ext>
           </c:extLst>
         </c:ser>
@@ -4294,8 +5037,8 @@
         </c:dLbls>
         <c:gapWidth val="219"/>
         <c:overlap val="-27"/>
-        <c:axId val="740595232"/>
-        <c:axId val="636619439"/>
+        <c:axId val="1969658000"/>
+        <c:axId val="1210516527"/>
         <c:extLst>
           <c:ext xmlns:c15="http://schemas.microsoft.com/office/drawing/2012/chart" uri="{02D57815-91ED-43cb-92C2-25804820EDAC}">
             <c15:filteredBarSeries>
@@ -4384,7 +5127,7 @@
                 </c:val>
                 <c:extLst>
                   <c:ext xmlns:c16="http://schemas.microsoft.com/office/drawing/2014/chart" uri="{C3380CC4-5D6E-409C-BE32-E72D297353CC}">
-                    <c16:uniqueId val="{00000001-09B6-48D5-B507-05D541A33917}"/>
+                    <c16:uniqueId val="{00000001-E6F0-49F6-89E8-FFE36DF5CC20}"/>
                   </c:ext>
                 </c:extLst>
               </c15:ser>
@@ -4393,7 +5136,7 @@
         </c:extLst>
       </c:barChart>
       <c:catAx>
-        <c:axId val="740595232"/>
+        <c:axId val="1969658000"/>
         <c:scaling>
           <c:orientation val="minMax"/>
         </c:scaling>
@@ -4436,7 +5179,7 @@
             <a:endParaRPr lang="de-DE"/>
           </a:p>
         </c:txPr>
-        <c:crossAx val="636619439"/>
+        <c:crossAx val="1210516527"/>
         <c:crosses val="autoZero"/>
         <c:auto val="1"/>
         <c:lblAlgn val="ctr"/>
@@ -4444,7 +5187,7 @@
         <c:noMultiLvlLbl val="0"/>
       </c:catAx>
       <c:valAx>
-        <c:axId val="636619439"/>
+        <c:axId val="1210516527"/>
         <c:scaling>
           <c:orientation val="minMax"/>
         </c:scaling>
@@ -4495,7 +5238,7 @@
             <a:endParaRPr lang="de-DE"/>
           </a:p>
         </c:txPr>
-        <c:crossAx val="740595232"/>
+        <c:crossAx val="1969658000"/>
         <c:crosses val="autoZero"/>
         <c:crossBetween val="between"/>
       </c:valAx>
@@ -4694,7 +5437,7 @@
           </c:val>
           <c:extLst>
             <c:ext xmlns:c16="http://schemas.microsoft.com/office/drawing/2014/chart" uri="{C3380CC4-5D6E-409C-BE32-E72D297353CC}">
-              <c16:uniqueId val="{00000000-C748-41CB-9993-54D72E47BBFF}"/>
+              <c16:uniqueId val="{00000000-A15E-44A8-B574-3C58CA70896E}"/>
             </c:ext>
           </c:extLst>
         </c:ser>
@@ -4708,11 +5451,11 @@
         </c:dLbls>
         <c:gapWidth val="219"/>
         <c:overlap val="-27"/>
-        <c:axId val="740596624"/>
-        <c:axId val="636659279"/>
+        <c:axId val="1212127599"/>
+        <c:axId val="1210506447"/>
       </c:barChart>
       <c:catAx>
-        <c:axId val="740596624"/>
+        <c:axId val="1212127599"/>
         <c:scaling>
           <c:orientation val="minMax"/>
         </c:scaling>
@@ -4755,7 +5498,7 @@
             <a:endParaRPr lang="de-DE"/>
           </a:p>
         </c:txPr>
-        <c:crossAx val="636659279"/>
+        <c:crossAx val="1210506447"/>
         <c:crosses val="autoZero"/>
         <c:auto val="1"/>
         <c:lblAlgn val="ctr"/>
@@ -4763,7 +5506,7 @@
         <c:noMultiLvlLbl val="0"/>
       </c:catAx>
       <c:valAx>
-        <c:axId val="636659279"/>
+        <c:axId val="1210506447"/>
         <c:scaling>
           <c:orientation val="minMax"/>
         </c:scaling>
@@ -4814,7 +5557,7 @@
             <a:endParaRPr lang="de-DE"/>
           </a:p>
         </c:txPr>
-        <c:crossAx val="740596624"/>
+        <c:crossAx val="1212127599"/>
         <c:crosses val="autoZero"/>
         <c:crossBetween val="between"/>
       </c:valAx>
@@ -5013,7 +5756,7 @@
           </c:val>
           <c:extLst>
             <c:ext xmlns:c16="http://schemas.microsoft.com/office/drawing/2014/chart" uri="{C3380CC4-5D6E-409C-BE32-E72D297353CC}">
-              <c16:uniqueId val="{00000000-FE90-44F6-8713-463C7B3C85CA}"/>
+              <c16:uniqueId val="{00000000-F96C-43F9-A49A-40DCF69059E1}"/>
             </c:ext>
           </c:extLst>
         </c:ser>
@@ -5027,11 +5770,11 @@
         </c:dLbls>
         <c:gapWidth val="219"/>
         <c:overlap val="-27"/>
-        <c:axId val="628297519"/>
-        <c:axId val="636650159"/>
+        <c:axId val="1212139663"/>
+        <c:axId val="1210517967"/>
       </c:barChart>
       <c:catAx>
-        <c:axId val="628297519"/>
+        <c:axId val="1212139663"/>
         <c:scaling>
           <c:orientation val="minMax"/>
         </c:scaling>
@@ -5074,7 +5817,7 @@
             <a:endParaRPr lang="de-DE"/>
           </a:p>
         </c:txPr>
-        <c:crossAx val="636650159"/>
+        <c:crossAx val="1210517967"/>
         <c:crosses val="autoZero"/>
         <c:auto val="1"/>
         <c:lblAlgn val="ctr"/>
@@ -5082,7 +5825,7 @@
         <c:noMultiLvlLbl val="1"/>
       </c:catAx>
       <c:valAx>
-        <c:axId val="636650159"/>
+        <c:axId val="1210517967"/>
         <c:scaling>
           <c:orientation val="minMax"/>
         </c:scaling>
@@ -5133,7 +5876,7 @@
             <a:endParaRPr lang="de-DE"/>
           </a:p>
         </c:txPr>
-        <c:crossAx val="628297519"/>
+        <c:crossAx val="1212139663"/>
         <c:crosses val="autoZero"/>
         <c:crossBetween val="between"/>
       </c:valAx>
@@ -5325,7 +6068,7 @@
           <c:smooth val="0"/>
           <c:extLst>
             <c:ext xmlns:c16="http://schemas.microsoft.com/office/drawing/2014/chart" uri="{C3380CC4-5D6E-409C-BE32-E72D297353CC}">
-              <c16:uniqueId val="{00000000-1E0A-4B72-9A3A-B689D00CF79A}"/>
+              <c16:uniqueId val="{00000000-0416-45F0-A2F6-AB29516A00B8}"/>
             </c:ext>
           </c:extLst>
         </c:ser>
@@ -5339,11 +6082,11 @@
         </c:dLbls>
         <c:marker val="1"/>
         <c:smooth val="0"/>
-        <c:axId val="630567967"/>
-        <c:axId val="636652079"/>
+        <c:axId val="1212140127"/>
+        <c:axId val="1210513647"/>
       </c:lineChart>
       <c:dateAx>
-        <c:axId val="630567967"/>
+        <c:axId val="1212140127"/>
         <c:scaling>
           <c:orientation val="minMax"/>
         </c:scaling>
@@ -5386,7 +6129,7 @@
             <a:endParaRPr lang="de-DE"/>
           </a:p>
         </c:txPr>
-        <c:crossAx val="636652079"/>
+        <c:crossAx val="1210513647"/>
         <c:crosses val="autoZero"/>
         <c:auto val="0"/>
         <c:lblOffset val="100"/>
@@ -5395,7 +6138,7 @@
         <c:majorTimeUnit val="days"/>
       </c:dateAx>
       <c:valAx>
-        <c:axId val="636652079"/>
+        <c:axId val="1210513647"/>
         <c:scaling>
           <c:orientation val="minMax"/>
         </c:scaling>
@@ -5446,7 +6189,7 @@
             <a:endParaRPr lang="de-DE"/>
           </a:p>
         </c:txPr>
-        <c:crossAx val="630567967"/>
+        <c:crossAx val="1212140127"/>
         <c:crosses val="autoZero"/>
         <c:crossBetween val="between"/>
       </c:valAx>
@@ -5624,7 +6367,7 @@
           </c:val>
           <c:extLst>
             <c:ext xmlns:c16="http://schemas.microsoft.com/office/drawing/2014/chart" uri="{C3380CC4-5D6E-409C-BE32-E72D297353CC}">
-              <c16:uniqueId val="{00000000-5AF0-4F79-B852-898FDCAB33F2}"/>
+              <c16:uniqueId val="{00000000-2CE1-4B38-92B7-8FC990BFF3AB}"/>
             </c:ext>
           </c:extLst>
         </c:ser>
@@ -5638,11 +6381,11 @@
         </c:dLbls>
         <c:gapWidth val="219"/>
         <c:overlap val="-27"/>
-        <c:axId val="628303551"/>
-        <c:axId val="636654959"/>
+        <c:axId val="14675375"/>
+        <c:axId val="1210515567"/>
       </c:barChart>
       <c:dateAx>
-        <c:axId val="628303551"/>
+        <c:axId val="14675375"/>
         <c:scaling>
           <c:orientation val="minMax"/>
         </c:scaling>
@@ -5685,14 +6428,14 @@
             <a:endParaRPr lang="de-DE"/>
           </a:p>
         </c:txPr>
-        <c:crossAx val="636654959"/>
+        <c:crossAx val="1210515567"/>
         <c:crosses val="autoZero"/>
         <c:auto val="0"/>
         <c:lblOffset val="100"/>
         <c:baseTimeUnit val="months"/>
       </c:dateAx>
       <c:valAx>
-        <c:axId val="636654959"/>
+        <c:axId val="1210515567"/>
         <c:scaling>
           <c:orientation val="minMax"/>
         </c:scaling>
@@ -5743,7 +6486,7 @@
             <a:endParaRPr lang="de-DE"/>
           </a:p>
         </c:txPr>
-        <c:crossAx val="628303551"/>
+        <c:crossAx val="14675375"/>
         <c:crosses val="autoZero"/>
         <c:crossBetween val="between"/>
       </c:valAx>
@@ -6180,6 +6923,86 @@
 </cs:colorStyle>
 </file>
 
+<file path=ppt/charts/colors18.xml><?xml version="1.0" encoding="utf-8"?>
+<cs:colorStyle xmlns:cs="http://schemas.microsoft.com/office/drawing/2012/chartStyle" xmlns:a="http://schemas.openxmlformats.org/drawingml/2006/main" meth="cycle" id="10">
+  <a:schemeClr val="accent1"/>
+  <a:schemeClr val="accent2"/>
+  <a:schemeClr val="accent3"/>
+  <a:schemeClr val="accent4"/>
+  <a:schemeClr val="accent5"/>
+  <a:schemeClr val="accent6"/>
+  <cs:variation/>
+  <cs:variation>
+    <a:lumMod val="60000"/>
+  </cs:variation>
+  <cs:variation>
+    <a:lumMod val="80000"/>
+    <a:lumOff val="20000"/>
+  </cs:variation>
+  <cs:variation>
+    <a:lumMod val="80000"/>
+  </cs:variation>
+  <cs:variation>
+    <a:lumMod val="60000"/>
+    <a:lumOff val="40000"/>
+  </cs:variation>
+  <cs:variation>
+    <a:lumMod val="50000"/>
+  </cs:variation>
+  <cs:variation>
+    <a:lumMod val="70000"/>
+    <a:lumOff val="30000"/>
+  </cs:variation>
+  <cs:variation>
+    <a:lumMod val="70000"/>
+  </cs:variation>
+  <cs:variation>
+    <a:lumMod val="50000"/>
+    <a:lumOff val="50000"/>
+  </cs:variation>
+</cs:colorStyle>
+</file>
+
+<file path=ppt/charts/colors19.xml><?xml version="1.0" encoding="utf-8"?>
+<cs:colorStyle xmlns:cs="http://schemas.microsoft.com/office/drawing/2012/chartStyle" xmlns:a="http://schemas.openxmlformats.org/drawingml/2006/main" meth="cycle" id="10">
+  <a:schemeClr val="accent1"/>
+  <a:schemeClr val="accent2"/>
+  <a:schemeClr val="accent3"/>
+  <a:schemeClr val="accent4"/>
+  <a:schemeClr val="accent5"/>
+  <a:schemeClr val="accent6"/>
+  <cs:variation/>
+  <cs:variation>
+    <a:lumMod val="60000"/>
+  </cs:variation>
+  <cs:variation>
+    <a:lumMod val="80000"/>
+    <a:lumOff val="20000"/>
+  </cs:variation>
+  <cs:variation>
+    <a:lumMod val="80000"/>
+  </cs:variation>
+  <cs:variation>
+    <a:lumMod val="60000"/>
+    <a:lumOff val="40000"/>
+  </cs:variation>
+  <cs:variation>
+    <a:lumMod val="50000"/>
+  </cs:variation>
+  <cs:variation>
+    <a:lumMod val="70000"/>
+    <a:lumOff val="30000"/>
+  </cs:variation>
+  <cs:variation>
+    <a:lumMod val="70000"/>
+  </cs:variation>
+  <cs:variation>
+    <a:lumMod val="50000"/>
+    <a:lumOff val="50000"/>
+  </cs:variation>
+</cs:colorStyle>
+</file>
+
 <file path=ppt/charts/colors2.xml><?xml version="1.0" encoding="utf-8"?>
 <cs:colorStyle xmlns:cs="http://schemas.microsoft.com/office/drawing/2012/chartStyle" xmlns:a="http://schemas.openxmlformats.org/drawingml/2006/main" meth="cycle" id="10">
   <a:schemeClr val="accent1"/>
@@ -9510,7 +10333,7 @@
 </file>
 
 <file path=ppt/charts/style15.xml><?xml version="1.0" encoding="utf-8"?>
-<cs:chartStyle xmlns:cs="http://schemas.microsoft.com/office/drawing/2012/chartStyle" xmlns:a="http://schemas.openxmlformats.org/drawingml/2006/main" id="201">
+<cs:chartStyle xmlns:cs="http://schemas.microsoft.com/office/drawing/2012/chartStyle" xmlns:a="http://schemas.openxmlformats.org/drawingml/2006/main" id="332">
   <cs:axisTitle>
     <cs:lnRef idx="0"/>
     <cs:fillRef idx="0"/>
@@ -10013,7 +10836,7 @@
 </file>
 
 <file path=ppt/charts/style16.xml><?xml version="1.0" encoding="utf-8"?>
-<cs:chartStyle xmlns:cs="http://schemas.microsoft.com/office/drawing/2012/chartStyle" xmlns:a="http://schemas.openxmlformats.org/drawingml/2006/main" id="201">
+<cs:chartStyle xmlns:cs="http://schemas.microsoft.com/office/drawing/2012/chartStyle" xmlns:a="http://schemas.openxmlformats.org/drawingml/2006/main" id="240">
   <cs:axisTitle>
     <cs:lnRef idx="0"/>
     <cs:fillRef idx="0"/>
@@ -10040,8 +10863,8 @@
       <a:ln w="9525" cap="flat" cmpd="sng" algn="ctr">
         <a:solidFill>
           <a:schemeClr val="tx1">
-            <a:lumMod val="15000"/>
-            <a:lumOff val="85000"/>
+            <a:lumMod val="25000"/>
+            <a:lumOff val="75000"/>
           </a:schemeClr>
         </a:solidFill>
         <a:round/>
@@ -10142,7 +10965,7 @@
       <a:schemeClr val="tx1"/>
     </cs:fontRef>
     <cs:spPr>
-      <a:ln w="28575" cap="rnd">
+      <a:ln w="19050" cap="rnd">
         <a:solidFill>
           <a:schemeClr val="phClr"/>
         </a:solidFill>
@@ -10174,6 +10997,522 @@
     <cs:lnRef idx="0">
       <cs:styleClr val="auto"/>
     </cs:lnRef>
+    <cs:fillRef idx="0"/>
+    <cs:effectRef idx="0"/>
+    <cs:fontRef idx="minor">
+      <a:schemeClr val="dk1"/>
+    </cs:fontRef>
+    <cs:spPr>
+      <a:ln w="9525" cap="rnd">
+        <a:solidFill>
+          <a:schemeClr val="phClr"/>
+        </a:solidFill>
+        <a:round/>
+      </a:ln>
+    </cs:spPr>
+  </cs:dataPointWireframe>
+  <cs:dataTable>
+    <cs:lnRef idx="0"/>
+    <cs:fillRef idx="0"/>
+    <cs:effectRef idx="0"/>
+    <cs:fontRef idx="minor">
+      <a:schemeClr val="tx1">
+        <a:lumMod val="65000"/>
+        <a:lumOff val="35000"/>
+      </a:schemeClr>
+    </cs:fontRef>
+    <cs:spPr>
+      <a:noFill/>
+      <a:ln w="9525" cap="flat" cmpd="sng" algn="ctr">
+        <a:solidFill>
+          <a:schemeClr val="tx1">
+            <a:lumMod val="15000"/>
+            <a:lumOff val="85000"/>
+          </a:schemeClr>
+        </a:solidFill>
+        <a:round/>
+      </a:ln>
+    </cs:spPr>
+    <cs:defRPr sz="1197" kern="1200"/>
+  </cs:dataTable>
+  <cs:downBar>
+    <cs:lnRef idx="0"/>
+    <cs:fillRef idx="0"/>
+    <cs:effectRef idx="0"/>
+    <cs:fontRef idx="minor">
+      <a:schemeClr val="tx1"/>
+    </cs:fontRef>
+    <cs:spPr>
+      <a:solidFill>
+        <a:schemeClr val="dk1">
+          <a:lumMod val="75000"/>
+          <a:lumOff val="25000"/>
+        </a:schemeClr>
+      </a:solidFill>
+      <a:ln w="9525" cap="flat" cmpd="sng" algn="ctr">
+        <a:solidFill>
+          <a:schemeClr val="tx1">
+            <a:lumMod val="65000"/>
+            <a:lumOff val="35000"/>
+          </a:schemeClr>
+        </a:solidFill>
+        <a:round/>
+      </a:ln>
+    </cs:spPr>
+  </cs:downBar>
+  <cs:dropLine>
+    <cs:lnRef idx="0"/>
+    <cs:fillRef idx="0"/>
+    <cs:effectRef idx="0"/>
+    <cs:fontRef idx="minor">
+      <a:schemeClr val="tx1"/>
+    </cs:fontRef>
+    <cs:spPr>
+      <a:ln w="9525" cap="flat" cmpd="sng" algn="ctr">
+        <a:solidFill>
+          <a:schemeClr val="tx1">
+            <a:lumMod val="35000"/>
+            <a:lumOff val="65000"/>
+          </a:schemeClr>
+        </a:solidFill>
+        <a:round/>
+      </a:ln>
+    </cs:spPr>
+  </cs:dropLine>
+  <cs:errorBar>
+    <cs:lnRef idx="0"/>
+    <cs:fillRef idx="0"/>
+    <cs:effectRef idx="0"/>
+    <cs:fontRef idx="minor">
+      <a:schemeClr val="tx1"/>
+    </cs:fontRef>
+    <cs:spPr>
+      <a:ln w="9525" cap="flat" cmpd="sng" algn="ctr">
+        <a:solidFill>
+          <a:schemeClr val="tx1">
+            <a:lumMod val="65000"/>
+            <a:lumOff val="35000"/>
+          </a:schemeClr>
+        </a:solidFill>
+        <a:round/>
+      </a:ln>
+    </cs:spPr>
+  </cs:errorBar>
+  <cs:floor>
+    <cs:lnRef idx="0"/>
+    <cs:fillRef idx="0"/>
+    <cs:effectRef idx="0"/>
+    <cs:fontRef idx="minor">
+      <a:schemeClr val="tx1"/>
+    </cs:fontRef>
+    <cs:spPr>
+      <a:noFill/>
+      <a:ln>
+        <a:noFill/>
+      </a:ln>
+    </cs:spPr>
+  </cs:floor>
+  <cs:gridlineMajor>
+    <cs:lnRef idx="0"/>
+    <cs:fillRef idx="0"/>
+    <cs:effectRef idx="0"/>
+    <cs:fontRef idx="minor">
+      <a:schemeClr val="tx1"/>
+    </cs:fontRef>
+    <cs:spPr>
+      <a:ln w="9525" cap="flat" cmpd="sng" algn="ctr">
+        <a:solidFill>
+          <a:schemeClr val="tx1">
+            <a:lumMod val="15000"/>
+            <a:lumOff val="85000"/>
+          </a:schemeClr>
+        </a:solidFill>
+        <a:round/>
+      </a:ln>
+    </cs:spPr>
+  </cs:gridlineMajor>
+  <cs:gridlineMinor>
+    <cs:lnRef idx="0"/>
+    <cs:fillRef idx="0"/>
+    <cs:effectRef idx="0"/>
+    <cs:fontRef idx="minor">
+      <a:schemeClr val="tx1"/>
+    </cs:fontRef>
+    <cs:spPr>
+      <a:ln w="9525" cap="flat" cmpd="sng" algn="ctr">
+        <a:solidFill>
+          <a:schemeClr val="tx1">
+            <a:lumMod val="5000"/>
+            <a:lumOff val="95000"/>
+          </a:schemeClr>
+        </a:solidFill>
+        <a:round/>
+      </a:ln>
+    </cs:spPr>
+  </cs:gridlineMinor>
+  <cs:hiLoLine>
+    <cs:lnRef idx="0"/>
+    <cs:fillRef idx="0"/>
+    <cs:effectRef idx="0"/>
+    <cs:fontRef idx="minor">
+      <a:schemeClr val="tx1"/>
+    </cs:fontRef>
+    <cs:spPr>
+      <a:ln w="9525" cap="flat" cmpd="sng" algn="ctr">
+        <a:solidFill>
+          <a:schemeClr val="tx1">
+            <a:lumMod val="50000"/>
+            <a:lumOff val="50000"/>
+          </a:schemeClr>
+        </a:solidFill>
+        <a:round/>
+      </a:ln>
+    </cs:spPr>
+  </cs:hiLoLine>
+  <cs:leaderLine>
+    <cs:lnRef idx="0"/>
+    <cs:fillRef idx="0"/>
+    <cs:effectRef idx="0"/>
+    <cs:fontRef idx="minor">
+      <a:schemeClr val="tx1"/>
+    </cs:fontRef>
+    <cs:spPr>
+      <a:ln w="9525" cap="flat" cmpd="sng" algn="ctr">
+        <a:solidFill>
+          <a:schemeClr val="tx1">
+            <a:lumMod val="35000"/>
+            <a:lumOff val="65000"/>
+          </a:schemeClr>
+        </a:solidFill>
+        <a:round/>
+      </a:ln>
+    </cs:spPr>
+  </cs:leaderLine>
+  <cs:legend>
+    <cs:lnRef idx="0"/>
+    <cs:fillRef idx="0"/>
+    <cs:effectRef idx="0"/>
+    <cs:fontRef idx="minor">
+      <a:schemeClr val="tx1">
+        <a:lumMod val="65000"/>
+        <a:lumOff val="35000"/>
+      </a:schemeClr>
+    </cs:fontRef>
+    <cs:defRPr sz="1197" kern="1200"/>
+  </cs:legend>
+  <cs:plotArea mods="allowNoFillOverride allowNoLineOverride">
+    <cs:lnRef idx="0"/>
+    <cs:fillRef idx="0"/>
+    <cs:effectRef idx="0"/>
+    <cs:fontRef idx="minor">
+      <a:schemeClr val="tx1"/>
+    </cs:fontRef>
+  </cs:plotArea>
+  <cs:plotArea3D mods="allowNoFillOverride allowNoLineOverride">
+    <cs:lnRef idx="0"/>
+    <cs:fillRef idx="0"/>
+    <cs:effectRef idx="0"/>
+    <cs:fontRef idx="minor">
+      <a:schemeClr val="tx1"/>
+    </cs:fontRef>
+  </cs:plotArea3D>
+  <cs:seriesAxis>
+    <cs:lnRef idx="0"/>
+    <cs:fillRef idx="0"/>
+    <cs:effectRef idx="0"/>
+    <cs:fontRef idx="minor">
+      <a:schemeClr val="tx1">
+        <a:lumMod val="65000"/>
+        <a:lumOff val="35000"/>
+      </a:schemeClr>
+    </cs:fontRef>
+    <cs:defRPr sz="1197" kern="1200"/>
+  </cs:seriesAxis>
+  <cs:seriesLine>
+    <cs:lnRef idx="0"/>
+    <cs:fillRef idx="0"/>
+    <cs:effectRef idx="0"/>
+    <cs:fontRef idx="minor">
+      <a:schemeClr val="tx1"/>
+    </cs:fontRef>
+    <cs:spPr>
+      <a:ln w="9525" cap="flat" cmpd="sng" algn="ctr">
+        <a:solidFill>
+          <a:schemeClr val="tx1">
+            <a:lumMod val="35000"/>
+            <a:lumOff val="65000"/>
+          </a:schemeClr>
+        </a:solidFill>
+        <a:round/>
+      </a:ln>
+    </cs:spPr>
+  </cs:seriesLine>
+  <cs:title>
+    <cs:lnRef idx="0"/>
+    <cs:fillRef idx="0"/>
+    <cs:effectRef idx="0"/>
+    <cs:fontRef idx="minor">
+      <a:schemeClr val="tx1">
+        <a:lumMod val="65000"/>
+        <a:lumOff val="35000"/>
+      </a:schemeClr>
+    </cs:fontRef>
+    <cs:defRPr sz="1862" b="0" kern="1200" spc="0" baseline="0"/>
+  </cs:title>
+  <cs:trendline>
+    <cs:lnRef idx="0">
+      <cs:styleClr val="auto"/>
+    </cs:lnRef>
+    <cs:fillRef idx="0"/>
+    <cs:effectRef idx="0"/>
+    <cs:fontRef idx="minor">
+      <a:schemeClr val="tx1"/>
+    </cs:fontRef>
+    <cs:spPr>
+      <a:ln w="19050" cap="rnd">
+        <a:solidFill>
+          <a:schemeClr val="phClr"/>
+        </a:solidFill>
+        <a:prstDash val="sysDot"/>
+      </a:ln>
+    </cs:spPr>
+  </cs:trendline>
+  <cs:trendlineLabel>
+    <cs:lnRef idx="0"/>
+    <cs:fillRef idx="0"/>
+    <cs:effectRef idx="0"/>
+    <cs:fontRef idx="minor">
+      <a:schemeClr val="tx1">
+        <a:lumMod val="65000"/>
+        <a:lumOff val="35000"/>
+      </a:schemeClr>
+    </cs:fontRef>
+    <cs:defRPr sz="1197" kern="1200"/>
+  </cs:trendlineLabel>
+  <cs:upBar>
+    <cs:lnRef idx="0"/>
+    <cs:fillRef idx="0"/>
+    <cs:effectRef idx="0"/>
+    <cs:fontRef idx="minor">
+      <a:schemeClr val="tx1"/>
+    </cs:fontRef>
+    <cs:spPr>
+      <a:solidFill>
+        <a:schemeClr val="lt1"/>
+      </a:solidFill>
+      <a:ln w="9525" cap="flat" cmpd="sng" algn="ctr">
+        <a:solidFill>
+          <a:schemeClr val="tx1">
+            <a:lumMod val="65000"/>
+            <a:lumOff val="35000"/>
+          </a:schemeClr>
+        </a:solidFill>
+        <a:round/>
+      </a:ln>
+    </cs:spPr>
+  </cs:upBar>
+  <cs:valueAxis>
+    <cs:lnRef idx="0"/>
+    <cs:fillRef idx="0"/>
+    <cs:effectRef idx="0"/>
+    <cs:fontRef idx="minor">
+      <a:schemeClr val="tx1">
+        <a:lumMod val="65000"/>
+        <a:lumOff val="35000"/>
+      </a:schemeClr>
+    </cs:fontRef>
+    <cs:spPr>
+      <a:ln w="9525" cap="flat" cmpd="sng" algn="ctr">
+        <a:solidFill>
+          <a:schemeClr val="tx1">
+            <a:lumMod val="25000"/>
+            <a:lumOff val="75000"/>
+          </a:schemeClr>
+        </a:solidFill>
+        <a:round/>
+      </a:ln>
+    </cs:spPr>
+    <cs:defRPr sz="1197" kern="1200"/>
+  </cs:valueAxis>
+  <cs:wall>
+    <cs:lnRef idx="0"/>
+    <cs:fillRef idx="0"/>
+    <cs:effectRef idx="0"/>
+    <cs:fontRef idx="minor">
+      <a:schemeClr val="tx1"/>
+    </cs:fontRef>
+    <cs:spPr>
+      <a:noFill/>
+      <a:ln>
+        <a:noFill/>
+      </a:ln>
+    </cs:spPr>
+  </cs:wall>
+</cs:chartStyle>
+</file>
+
+<file path=ppt/charts/style17.xml><?xml version="1.0" encoding="utf-8"?>
+<cs:chartStyle xmlns:cs="http://schemas.microsoft.com/office/drawing/2012/chartStyle" xmlns:a="http://schemas.openxmlformats.org/drawingml/2006/main" id="201">
+  <cs:axisTitle>
+    <cs:lnRef idx="0"/>
+    <cs:fillRef idx="0"/>
+    <cs:effectRef idx="0"/>
+    <cs:fontRef idx="minor">
+      <a:schemeClr val="tx1">
+        <a:lumMod val="65000"/>
+        <a:lumOff val="35000"/>
+      </a:schemeClr>
+    </cs:fontRef>
+    <cs:defRPr sz="1330" kern="1200"/>
+  </cs:axisTitle>
+  <cs:categoryAxis>
+    <cs:lnRef idx="0"/>
+    <cs:fillRef idx="0"/>
+    <cs:effectRef idx="0"/>
+    <cs:fontRef idx="minor">
+      <a:schemeClr val="tx1">
+        <a:lumMod val="65000"/>
+        <a:lumOff val="35000"/>
+      </a:schemeClr>
+    </cs:fontRef>
+    <cs:spPr>
+      <a:ln w="9525" cap="flat" cmpd="sng" algn="ctr">
+        <a:solidFill>
+          <a:schemeClr val="tx1">
+            <a:lumMod val="15000"/>
+            <a:lumOff val="85000"/>
+          </a:schemeClr>
+        </a:solidFill>
+        <a:round/>
+      </a:ln>
+    </cs:spPr>
+    <cs:defRPr sz="1197" kern="1200"/>
+  </cs:categoryAxis>
+  <cs:chartArea mods="allowNoFillOverride allowNoLineOverride">
+    <cs:lnRef idx="0"/>
+    <cs:fillRef idx="0"/>
+    <cs:effectRef idx="0"/>
+    <cs:fontRef idx="minor">
+      <a:schemeClr val="tx1"/>
+    </cs:fontRef>
+    <cs:spPr>
+      <a:solidFill>
+        <a:schemeClr val="bg1"/>
+      </a:solidFill>
+      <a:ln w="9525" cap="flat" cmpd="sng" algn="ctr">
+        <a:solidFill>
+          <a:schemeClr val="tx1">
+            <a:lumMod val="15000"/>
+            <a:lumOff val="85000"/>
+          </a:schemeClr>
+        </a:solidFill>
+        <a:round/>
+      </a:ln>
+    </cs:spPr>
+    <cs:defRPr sz="1330" kern="1200"/>
+  </cs:chartArea>
+  <cs:dataLabel>
+    <cs:lnRef idx="0"/>
+    <cs:fillRef idx="0"/>
+    <cs:effectRef idx="0"/>
+    <cs:fontRef idx="minor">
+      <a:schemeClr val="tx1">
+        <a:lumMod val="75000"/>
+        <a:lumOff val="25000"/>
+      </a:schemeClr>
+    </cs:fontRef>
+    <cs:defRPr sz="1197" kern="1200"/>
+  </cs:dataLabel>
+  <cs:dataLabelCallout>
+    <cs:lnRef idx="0"/>
+    <cs:fillRef idx="0"/>
+    <cs:effectRef idx="0"/>
+    <cs:fontRef idx="minor">
+      <a:schemeClr val="dk1">
+        <a:lumMod val="65000"/>
+        <a:lumOff val="35000"/>
+      </a:schemeClr>
+    </cs:fontRef>
+    <cs:spPr>
+      <a:solidFill>
+        <a:schemeClr val="lt1"/>
+      </a:solidFill>
+      <a:ln>
+        <a:solidFill>
+          <a:schemeClr val="dk1">
+            <a:lumMod val="25000"/>
+            <a:lumOff val="75000"/>
+          </a:schemeClr>
+        </a:solidFill>
+      </a:ln>
+    </cs:spPr>
+    <cs:defRPr sz="1197" kern="1200"/>
+    <cs:bodyPr rot="0" spcFirstLastPara="1" vertOverflow="clip" horzOverflow="clip" vert="horz" wrap="square" lIns="36576" tIns="18288" rIns="36576" bIns="18288" anchor="ctr" anchorCtr="1">
+      <a:spAutoFit/>
+    </cs:bodyPr>
+  </cs:dataLabelCallout>
+  <cs:dataPoint>
+    <cs:lnRef idx="0"/>
+    <cs:fillRef idx="1">
+      <cs:styleClr val="auto"/>
+    </cs:fillRef>
+    <cs:effectRef idx="0"/>
+    <cs:fontRef idx="minor">
+      <a:schemeClr val="tx1"/>
+    </cs:fontRef>
+  </cs:dataPoint>
+  <cs:dataPoint3D>
+    <cs:lnRef idx="0"/>
+    <cs:fillRef idx="1">
+      <cs:styleClr val="auto"/>
+    </cs:fillRef>
+    <cs:effectRef idx="0"/>
+    <cs:fontRef idx="minor">
+      <a:schemeClr val="tx1"/>
+    </cs:fontRef>
+  </cs:dataPoint3D>
+  <cs:dataPointLine>
+    <cs:lnRef idx="0">
+      <cs:styleClr val="auto"/>
+    </cs:lnRef>
+    <cs:fillRef idx="1"/>
+    <cs:effectRef idx="0"/>
+    <cs:fontRef idx="minor">
+      <a:schemeClr val="tx1"/>
+    </cs:fontRef>
+    <cs:spPr>
+      <a:ln w="28575" cap="rnd">
+        <a:solidFill>
+          <a:schemeClr val="phClr"/>
+        </a:solidFill>
+        <a:round/>
+      </a:ln>
+    </cs:spPr>
+  </cs:dataPointLine>
+  <cs:dataPointMarker>
+    <cs:lnRef idx="0">
+      <cs:styleClr val="auto"/>
+    </cs:lnRef>
+    <cs:fillRef idx="1">
+      <cs:styleClr val="auto"/>
+    </cs:fillRef>
+    <cs:effectRef idx="0"/>
+    <cs:fontRef idx="minor">
+      <a:schemeClr val="tx1"/>
+    </cs:fontRef>
+    <cs:spPr>
+      <a:ln w="9525">
+        <a:solidFill>
+          <a:schemeClr val="phClr"/>
+        </a:solidFill>
+      </a:ln>
+    </cs:spPr>
+  </cs:dataPointMarker>
+  <cs:dataPointMarkerLayout symbol="circle" size="5"/>
+  <cs:dataPointWireframe>
+    <cs:lnRef idx="0">
+      <cs:styleClr val="auto"/>
+    </cs:lnRef>
     <cs:fillRef idx="1"/>
     <cs:effectRef idx="0"/>
     <cs:fontRef idx="minor">
@@ -10515,7 +11854,510 @@
 </cs:chartStyle>
 </file>
 
-<file path=ppt/charts/style17.xml><?xml version="1.0" encoding="utf-8"?>
+<file path=ppt/charts/style18.xml><?xml version="1.0" encoding="utf-8"?>
+<cs:chartStyle xmlns:cs="http://schemas.microsoft.com/office/drawing/2012/chartStyle" xmlns:a="http://schemas.openxmlformats.org/drawingml/2006/main" id="201">
+  <cs:axisTitle>
+    <cs:lnRef idx="0"/>
+    <cs:fillRef idx="0"/>
+    <cs:effectRef idx="0"/>
+    <cs:fontRef idx="minor">
+      <a:schemeClr val="tx1">
+        <a:lumMod val="65000"/>
+        <a:lumOff val="35000"/>
+      </a:schemeClr>
+    </cs:fontRef>
+    <cs:defRPr sz="1330" kern="1200"/>
+  </cs:axisTitle>
+  <cs:categoryAxis>
+    <cs:lnRef idx="0"/>
+    <cs:fillRef idx="0"/>
+    <cs:effectRef idx="0"/>
+    <cs:fontRef idx="minor">
+      <a:schemeClr val="tx1">
+        <a:lumMod val="65000"/>
+        <a:lumOff val="35000"/>
+      </a:schemeClr>
+    </cs:fontRef>
+    <cs:spPr>
+      <a:ln w="9525" cap="flat" cmpd="sng" algn="ctr">
+        <a:solidFill>
+          <a:schemeClr val="tx1">
+            <a:lumMod val="15000"/>
+            <a:lumOff val="85000"/>
+          </a:schemeClr>
+        </a:solidFill>
+        <a:round/>
+      </a:ln>
+    </cs:spPr>
+    <cs:defRPr sz="1197" kern="1200"/>
+  </cs:categoryAxis>
+  <cs:chartArea mods="allowNoFillOverride allowNoLineOverride">
+    <cs:lnRef idx="0"/>
+    <cs:fillRef idx="0"/>
+    <cs:effectRef idx="0"/>
+    <cs:fontRef idx="minor">
+      <a:schemeClr val="tx1"/>
+    </cs:fontRef>
+    <cs:spPr>
+      <a:solidFill>
+        <a:schemeClr val="bg1"/>
+      </a:solidFill>
+      <a:ln w="9525" cap="flat" cmpd="sng" algn="ctr">
+        <a:solidFill>
+          <a:schemeClr val="tx1">
+            <a:lumMod val="15000"/>
+            <a:lumOff val="85000"/>
+          </a:schemeClr>
+        </a:solidFill>
+        <a:round/>
+      </a:ln>
+    </cs:spPr>
+    <cs:defRPr sz="1330" kern="1200"/>
+  </cs:chartArea>
+  <cs:dataLabel>
+    <cs:lnRef idx="0"/>
+    <cs:fillRef idx="0"/>
+    <cs:effectRef idx="0"/>
+    <cs:fontRef idx="minor">
+      <a:schemeClr val="tx1">
+        <a:lumMod val="75000"/>
+        <a:lumOff val="25000"/>
+      </a:schemeClr>
+    </cs:fontRef>
+    <cs:defRPr sz="1197" kern="1200"/>
+  </cs:dataLabel>
+  <cs:dataLabelCallout>
+    <cs:lnRef idx="0"/>
+    <cs:fillRef idx="0"/>
+    <cs:effectRef idx="0"/>
+    <cs:fontRef idx="minor">
+      <a:schemeClr val="dk1">
+        <a:lumMod val="65000"/>
+        <a:lumOff val="35000"/>
+      </a:schemeClr>
+    </cs:fontRef>
+    <cs:spPr>
+      <a:solidFill>
+        <a:schemeClr val="lt1"/>
+      </a:solidFill>
+      <a:ln>
+        <a:solidFill>
+          <a:schemeClr val="dk1">
+            <a:lumMod val="25000"/>
+            <a:lumOff val="75000"/>
+          </a:schemeClr>
+        </a:solidFill>
+      </a:ln>
+    </cs:spPr>
+    <cs:defRPr sz="1197" kern="1200"/>
+    <cs:bodyPr rot="0" spcFirstLastPara="1" vertOverflow="clip" horzOverflow="clip" vert="horz" wrap="square" lIns="36576" tIns="18288" rIns="36576" bIns="18288" anchor="ctr" anchorCtr="1">
+      <a:spAutoFit/>
+    </cs:bodyPr>
+  </cs:dataLabelCallout>
+  <cs:dataPoint>
+    <cs:lnRef idx="0"/>
+    <cs:fillRef idx="1">
+      <cs:styleClr val="auto"/>
+    </cs:fillRef>
+    <cs:effectRef idx="0"/>
+    <cs:fontRef idx="minor">
+      <a:schemeClr val="tx1"/>
+    </cs:fontRef>
+  </cs:dataPoint>
+  <cs:dataPoint3D>
+    <cs:lnRef idx="0"/>
+    <cs:fillRef idx="1">
+      <cs:styleClr val="auto"/>
+    </cs:fillRef>
+    <cs:effectRef idx="0"/>
+    <cs:fontRef idx="minor">
+      <a:schemeClr val="tx1"/>
+    </cs:fontRef>
+  </cs:dataPoint3D>
+  <cs:dataPointLine>
+    <cs:lnRef idx="0">
+      <cs:styleClr val="auto"/>
+    </cs:lnRef>
+    <cs:fillRef idx="1"/>
+    <cs:effectRef idx="0"/>
+    <cs:fontRef idx="minor">
+      <a:schemeClr val="tx1"/>
+    </cs:fontRef>
+    <cs:spPr>
+      <a:ln w="28575" cap="rnd">
+        <a:solidFill>
+          <a:schemeClr val="phClr"/>
+        </a:solidFill>
+        <a:round/>
+      </a:ln>
+    </cs:spPr>
+  </cs:dataPointLine>
+  <cs:dataPointMarker>
+    <cs:lnRef idx="0">
+      <cs:styleClr val="auto"/>
+    </cs:lnRef>
+    <cs:fillRef idx="1">
+      <cs:styleClr val="auto"/>
+    </cs:fillRef>
+    <cs:effectRef idx="0"/>
+    <cs:fontRef idx="minor">
+      <a:schemeClr val="tx1"/>
+    </cs:fontRef>
+    <cs:spPr>
+      <a:ln w="9525">
+        <a:solidFill>
+          <a:schemeClr val="phClr"/>
+        </a:solidFill>
+      </a:ln>
+    </cs:spPr>
+  </cs:dataPointMarker>
+  <cs:dataPointMarkerLayout symbol="circle" size="5"/>
+  <cs:dataPointWireframe>
+    <cs:lnRef idx="0">
+      <cs:styleClr val="auto"/>
+    </cs:lnRef>
+    <cs:fillRef idx="1"/>
+    <cs:effectRef idx="0"/>
+    <cs:fontRef idx="minor">
+      <a:schemeClr val="tx1"/>
+    </cs:fontRef>
+    <cs:spPr>
+      <a:ln w="9525" cap="rnd">
+        <a:solidFill>
+          <a:schemeClr val="phClr"/>
+        </a:solidFill>
+        <a:round/>
+      </a:ln>
+    </cs:spPr>
+  </cs:dataPointWireframe>
+  <cs:dataTable>
+    <cs:lnRef idx="0"/>
+    <cs:fillRef idx="0"/>
+    <cs:effectRef idx="0"/>
+    <cs:fontRef idx="minor">
+      <a:schemeClr val="tx1">
+        <a:lumMod val="65000"/>
+        <a:lumOff val="35000"/>
+      </a:schemeClr>
+    </cs:fontRef>
+    <cs:spPr>
+      <a:noFill/>
+      <a:ln w="9525" cap="flat" cmpd="sng" algn="ctr">
+        <a:solidFill>
+          <a:schemeClr val="tx1">
+            <a:lumMod val="15000"/>
+            <a:lumOff val="85000"/>
+          </a:schemeClr>
+        </a:solidFill>
+        <a:round/>
+      </a:ln>
+    </cs:spPr>
+    <cs:defRPr sz="1197" kern="1200"/>
+  </cs:dataTable>
+  <cs:downBar>
+    <cs:lnRef idx="0"/>
+    <cs:fillRef idx="0"/>
+    <cs:effectRef idx="0"/>
+    <cs:fontRef idx="minor">
+      <a:schemeClr val="dk1"/>
+    </cs:fontRef>
+    <cs:spPr>
+      <a:solidFill>
+        <a:schemeClr val="dk1">
+          <a:lumMod val="65000"/>
+          <a:lumOff val="35000"/>
+        </a:schemeClr>
+      </a:solidFill>
+      <a:ln w="9525">
+        <a:solidFill>
+          <a:schemeClr val="tx1">
+            <a:lumMod val="65000"/>
+            <a:lumOff val="35000"/>
+          </a:schemeClr>
+        </a:solidFill>
+      </a:ln>
+    </cs:spPr>
+  </cs:downBar>
+  <cs:dropLine>
+    <cs:lnRef idx="0"/>
+    <cs:fillRef idx="0"/>
+    <cs:effectRef idx="0"/>
+    <cs:fontRef idx="minor">
+      <a:schemeClr val="tx1"/>
+    </cs:fontRef>
+    <cs:spPr>
+      <a:ln w="9525" cap="flat" cmpd="sng" algn="ctr">
+        <a:solidFill>
+          <a:schemeClr val="tx1">
+            <a:lumMod val="35000"/>
+            <a:lumOff val="65000"/>
+          </a:schemeClr>
+        </a:solidFill>
+        <a:round/>
+      </a:ln>
+    </cs:spPr>
+  </cs:dropLine>
+  <cs:errorBar>
+    <cs:lnRef idx="0"/>
+    <cs:fillRef idx="0"/>
+    <cs:effectRef idx="0"/>
+    <cs:fontRef idx="minor">
+      <a:schemeClr val="tx1"/>
+    </cs:fontRef>
+    <cs:spPr>
+      <a:ln w="9525" cap="flat" cmpd="sng" algn="ctr">
+        <a:solidFill>
+          <a:schemeClr val="tx1">
+            <a:lumMod val="65000"/>
+            <a:lumOff val="35000"/>
+          </a:schemeClr>
+        </a:solidFill>
+        <a:round/>
+      </a:ln>
+    </cs:spPr>
+  </cs:errorBar>
+  <cs:floor>
+    <cs:lnRef idx="0"/>
+    <cs:fillRef idx="0"/>
+    <cs:effectRef idx="0"/>
+    <cs:fontRef idx="minor">
+      <a:schemeClr val="tx1"/>
+    </cs:fontRef>
+    <cs:spPr>
+      <a:noFill/>
+      <a:ln>
+        <a:noFill/>
+      </a:ln>
+    </cs:spPr>
+  </cs:floor>
+  <cs:gridlineMajor>
+    <cs:lnRef idx="0"/>
+    <cs:fillRef idx="0"/>
+    <cs:effectRef idx="0"/>
+    <cs:fontRef idx="minor">
+      <a:schemeClr val="tx1"/>
+    </cs:fontRef>
+    <cs:spPr>
+      <a:ln w="9525" cap="flat" cmpd="sng" algn="ctr">
+        <a:solidFill>
+          <a:schemeClr val="tx1">
+            <a:lumMod val="15000"/>
+            <a:lumOff val="85000"/>
+          </a:schemeClr>
+        </a:solidFill>
+        <a:round/>
+      </a:ln>
+    </cs:spPr>
+  </cs:gridlineMajor>
+  <cs:gridlineMinor>
+    <cs:lnRef idx="0"/>
+    <cs:fillRef idx="0"/>
+    <cs:effectRef idx="0"/>
+    <cs:fontRef idx="minor">
+      <a:schemeClr val="tx1"/>
+    </cs:fontRef>
+    <cs:spPr>
+      <a:ln w="9525" cap="flat" cmpd="sng" algn="ctr">
+        <a:solidFill>
+          <a:schemeClr val="tx1">
+            <a:lumMod val="5000"/>
+            <a:lumOff val="95000"/>
+          </a:schemeClr>
+        </a:solidFill>
+        <a:round/>
+      </a:ln>
+    </cs:spPr>
+  </cs:gridlineMinor>
+  <cs:hiLoLine>
+    <cs:lnRef idx="0"/>
+    <cs:fillRef idx="0"/>
+    <cs:effectRef idx="0"/>
+    <cs:fontRef idx="minor">
+      <a:schemeClr val="tx1"/>
+    </cs:fontRef>
+    <cs:spPr>
+      <a:ln w="9525" cap="flat" cmpd="sng" algn="ctr">
+        <a:solidFill>
+          <a:schemeClr val="tx1">
+            <a:lumMod val="75000"/>
+            <a:lumOff val="25000"/>
+          </a:schemeClr>
+        </a:solidFill>
+        <a:round/>
+      </a:ln>
+    </cs:spPr>
+  </cs:hiLoLine>
+  <cs:leaderLine>
+    <cs:lnRef idx="0"/>
+    <cs:fillRef idx="0"/>
+    <cs:effectRef idx="0"/>
+    <cs:fontRef idx="minor">
+      <a:schemeClr val="tx1"/>
+    </cs:fontRef>
+    <cs:spPr>
+      <a:ln w="9525" cap="flat" cmpd="sng" algn="ctr">
+        <a:solidFill>
+          <a:schemeClr val="tx1">
+            <a:lumMod val="35000"/>
+            <a:lumOff val="65000"/>
+          </a:schemeClr>
+        </a:solidFill>
+        <a:round/>
+      </a:ln>
+    </cs:spPr>
+  </cs:leaderLine>
+  <cs:legend>
+    <cs:lnRef idx="0"/>
+    <cs:fillRef idx="0"/>
+    <cs:effectRef idx="0"/>
+    <cs:fontRef idx="minor">
+      <a:schemeClr val="tx1">
+        <a:lumMod val="65000"/>
+        <a:lumOff val="35000"/>
+      </a:schemeClr>
+    </cs:fontRef>
+    <cs:defRPr sz="1197" kern="1200"/>
+  </cs:legend>
+  <cs:plotArea mods="allowNoFillOverride allowNoLineOverride">
+    <cs:lnRef idx="0"/>
+    <cs:fillRef idx="0"/>
+    <cs:effectRef idx="0"/>
+    <cs:fontRef idx="minor">
+      <a:schemeClr val="tx1"/>
+    </cs:fontRef>
+  </cs:plotArea>
+  <cs:plotArea3D mods="allowNoFillOverride allowNoLineOverride">
+    <cs:lnRef idx="0"/>
+    <cs:fillRef idx="0"/>
+    <cs:effectRef idx="0"/>
+    <cs:fontRef idx="minor">
+      <a:schemeClr val="tx1"/>
+    </cs:fontRef>
+  </cs:plotArea3D>
+  <cs:seriesAxis>
+    <cs:lnRef idx="0"/>
+    <cs:fillRef idx="0"/>
+    <cs:effectRef idx="0"/>
+    <cs:fontRef idx="minor">
+      <a:schemeClr val="tx1">
+        <a:lumMod val="65000"/>
+        <a:lumOff val="35000"/>
+      </a:schemeClr>
+    </cs:fontRef>
+    <cs:defRPr sz="1197" kern="1200"/>
+  </cs:seriesAxis>
+  <cs:seriesLine>
+    <cs:lnRef idx="0"/>
+    <cs:fillRef idx="0"/>
+    <cs:effectRef idx="0"/>
+    <cs:fontRef idx="minor">
+      <a:schemeClr val="tx1"/>
+    </cs:fontRef>
+    <cs:spPr>
+      <a:ln w="9525" cap="flat" cmpd="sng" algn="ctr">
+        <a:solidFill>
+          <a:schemeClr val="tx1">
+            <a:lumMod val="35000"/>
+            <a:lumOff val="65000"/>
+          </a:schemeClr>
+        </a:solidFill>
+        <a:round/>
+      </a:ln>
+    </cs:spPr>
+  </cs:seriesLine>
+  <cs:title>
+    <cs:lnRef idx="0"/>
+    <cs:fillRef idx="0"/>
+    <cs:effectRef idx="0"/>
+    <cs:fontRef idx="minor">
+      <a:schemeClr val="tx1">
+        <a:lumMod val="65000"/>
+        <a:lumOff val="35000"/>
+      </a:schemeClr>
+    </cs:fontRef>
+    <cs:defRPr sz="1862" b="0" kern="1200" spc="0" baseline="0"/>
+  </cs:title>
+  <cs:trendline>
+    <cs:lnRef idx="0">
+      <cs:styleClr val="auto"/>
+    </cs:lnRef>
+    <cs:fillRef idx="0"/>
+    <cs:effectRef idx="0"/>
+    <cs:fontRef idx="minor">
+      <a:schemeClr val="tx1"/>
+    </cs:fontRef>
+    <cs:spPr>
+      <a:ln w="19050" cap="rnd">
+        <a:solidFill>
+          <a:schemeClr val="phClr"/>
+        </a:solidFill>
+        <a:prstDash val="sysDot"/>
+      </a:ln>
+    </cs:spPr>
+  </cs:trendline>
+  <cs:trendlineLabel>
+    <cs:lnRef idx="0"/>
+    <cs:fillRef idx="0"/>
+    <cs:effectRef idx="0"/>
+    <cs:fontRef idx="minor">
+      <a:schemeClr val="tx1">
+        <a:lumMod val="65000"/>
+        <a:lumOff val="35000"/>
+      </a:schemeClr>
+    </cs:fontRef>
+    <cs:defRPr sz="1197" kern="1200"/>
+  </cs:trendlineLabel>
+  <cs:upBar>
+    <cs:lnRef idx="0"/>
+    <cs:fillRef idx="0"/>
+    <cs:effectRef idx="0"/>
+    <cs:fontRef idx="minor">
+      <a:schemeClr val="dk1"/>
+    </cs:fontRef>
+    <cs:spPr>
+      <a:solidFill>
+        <a:schemeClr val="lt1"/>
+      </a:solidFill>
+      <a:ln w="9525">
+        <a:solidFill>
+          <a:schemeClr val="tx1">
+            <a:lumMod val="15000"/>
+            <a:lumOff val="85000"/>
+          </a:schemeClr>
+        </a:solidFill>
+      </a:ln>
+    </cs:spPr>
+  </cs:upBar>
+  <cs:valueAxis>
+    <cs:lnRef idx="0"/>
+    <cs:fillRef idx="0"/>
+    <cs:effectRef idx="0"/>
+    <cs:fontRef idx="minor">
+      <a:schemeClr val="tx1">
+        <a:lumMod val="65000"/>
+        <a:lumOff val="35000"/>
+      </a:schemeClr>
+    </cs:fontRef>
+    <cs:defRPr sz="1197" kern="1200"/>
+  </cs:valueAxis>
+  <cs:wall>
+    <cs:lnRef idx="0"/>
+    <cs:fillRef idx="0"/>
+    <cs:effectRef idx="0"/>
+    <cs:fontRef idx="minor">
+      <a:schemeClr val="tx1"/>
+    </cs:fontRef>
+    <cs:spPr>
+      <a:noFill/>
+      <a:ln>
+        <a:noFill/>
+      </a:ln>
+    </cs:spPr>
+  </cs:wall>
+</cs:chartStyle>
+</file>
+
+<file path=ppt/charts/style19.xml><?xml version="1.0" encoding="utf-8"?>
 <cs:chartStyle xmlns:cs="http://schemas.microsoft.com/office/drawing/2012/chartStyle" xmlns:a="http://schemas.openxmlformats.org/drawingml/2006/main" id="201">
   <cs:axisTitle>
     <cs:lnRef idx="0"/>
@@ -15064,7 +16906,7 @@
           <p:cNvPr id="2" name="Titel 1">
             <a:extLst>
               <a:ext uri="{FF2B5EF4-FFF2-40B4-BE49-F238E27FC236}">
-                <a16:creationId xmlns:a16="http://schemas.microsoft.com/office/drawing/2014/main" id="{0CC2DAD5-AF36-8D12-D5F9-C8E20B76A5FF}"/>
+                <a16:creationId xmlns:a16="http://schemas.microsoft.com/office/drawing/2014/main" id="{8EC6BD71-9B38-71FF-DB56-B4C982714A38}"/>
               </a:ext>
             </a:extLst>
           </p:cNvPr>
@@ -15101,7 +16943,7 @@
           <p:cNvPr id="3" name="Untertitel 2">
             <a:extLst>
               <a:ext uri="{FF2B5EF4-FFF2-40B4-BE49-F238E27FC236}">
-                <a16:creationId xmlns:a16="http://schemas.microsoft.com/office/drawing/2014/main" id="{3CF5AF91-86F0-CAEC-22FF-13CA08EBEDD4}"/>
+                <a16:creationId xmlns:a16="http://schemas.microsoft.com/office/drawing/2014/main" id="{32D36777-F40E-6DFA-36C5-D85ACCA50B14}"/>
               </a:ext>
             </a:extLst>
           </p:cNvPr>
@@ -15171,7 +17013,7 @@
           <p:cNvPr id="4" name="Datumsplatzhalter 3">
             <a:extLst>
               <a:ext uri="{FF2B5EF4-FFF2-40B4-BE49-F238E27FC236}">
-                <a16:creationId xmlns:a16="http://schemas.microsoft.com/office/drawing/2014/main" id="{C990BA5C-CEDF-489F-0659-E78B0434C74F}"/>
+                <a16:creationId xmlns:a16="http://schemas.microsoft.com/office/drawing/2014/main" id="{35322C1F-B993-3D37-8E65-008B2538AE5E}"/>
               </a:ext>
             </a:extLst>
           </p:cNvPr>
@@ -15187,7 +17029,7 @@
           <a:bodyPr/>
           <a:lstStyle/>
           <a:p>
-            <a:fld id="{ECA477E0-FCFD-47FA-91EB-F183162F2E03}" type="datetimeFigureOut">
+            <a:fld id="{1B5E35DF-C35B-4244-9099-45A8D04D01B6}" type="datetimeFigureOut">
               <a:rPr lang="de-DE" smtClean="0"/>
               <a:t>09.10.2026</a:t>
             </a:fld>
@@ -15200,7 +17042,7 @@
           <p:cNvPr id="5" name="Fußzeilenplatzhalter 4">
             <a:extLst>
               <a:ext uri="{FF2B5EF4-FFF2-40B4-BE49-F238E27FC236}">
-                <a16:creationId xmlns:a16="http://schemas.microsoft.com/office/drawing/2014/main" id="{54D672A0-8CD0-2F16-978F-3ABBE87867FE}"/>
+                <a16:creationId xmlns:a16="http://schemas.microsoft.com/office/drawing/2014/main" id="{C2BF248A-88E4-B276-B50C-DA02B83ABFD5}"/>
               </a:ext>
             </a:extLst>
           </p:cNvPr>
@@ -15225,7 +17067,7 @@
           <p:cNvPr id="6" name="Foliennummernplatzhalter 5">
             <a:extLst>
               <a:ext uri="{FF2B5EF4-FFF2-40B4-BE49-F238E27FC236}">
-                <a16:creationId xmlns:a16="http://schemas.microsoft.com/office/drawing/2014/main" id="{93F06135-CEA0-6C9E-A9D1-26C862769B6D}"/>
+                <a16:creationId xmlns:a16="http://schemas.microsoft.com/office/drawing/2014/main" id="{676754BC-BF9F-0377-7FB8-8973FF8CF3ED}"/>
               </a:ext>
             </a:extLst>
           </p:cNvPr>
@@ -15241,7 +17083,7 @@
           <a:bodyPr/>
           <a:lstStyle/>
           <a:p>
-            <a:fld id="{C41A99F7-991B-4D1E-AE48-3919C6026035}" type="slidenum">
+            <a:fld id="{C3E42750-23E9-4012-B2D1-959593B92499}" type="slidenum">
               <a:rPr lang="de-DE" smtClean="0"/>
               <a:t>‹Nr.›</a:t>
             </a:fld>
@@ -15252,7 +17094,7 @@
     </p:spTree>
     <p:extLst>
       <p:ext uri="{BB962C8B-B14F-4D97-AF65-F5344CB8AC3E}">
-        <p14:creationId xmlns:p14="http://schemas.microsoft.com/office/powerpoint/2010/main" val="2203722249"/>
+        <p14:creationId xmlns:p14="http://schemas.microsoft.com/office/powerpoint/2010/main" val="3167808149"/>
       </p:ext>
     </p:extLst>
   </p:cSld>
@@ -15284,7 +17126,7 @@
           <p:cNvPr id="2" name="Titel 1">
             <a:extLst>
               <a:ext uri="{FF2B5EF4-FFF2-40B4-BE49-F238E27FC236}">
-                <a16:creationId xmlns:a16="http://schemas.microsoft.com/office/drawing/2014/main" id="{C0EC15E3-A8AB-0B24-1844-2936761AB8D9}"/>
+                <a16:creationId xmlns:a16="http://schemas.microsoft.com/office/drawing/2014/main" id="{92902531-24B7-C82E-14B8-FAB253C2B448}"/>
               </a:ext>
             </a:extLst>
           </p:cNvPr>
@@ -15312,7 +17154,7 @@
           <p:cNvPr id="3" name="Vertikaler Textplatzhalter 2">
             <a:extLst>
               <a:ext uri="{FF2B5EF4-FFF2-40B4-BE49-F238E27FC236}">
-                <a16:creationId xmlns:a16="http://schemas.microsoft.com/office/drawing/2014/main" id="{93EADBA7-82B1-57AD-37E4-E0129BFEC65B}"/>
+                <a16:creationId xmlns:a16="http://schemas.microsoft.com/office/drawing/2014/main" id="{AD7655BE-A090-BDF1-06A1-DF64A9A5248A}"/>
               </a:ext>
             </a:extLst>
           </p:cNvPr>
@@ -15369,7 +17211,7 @@
           <p:cNvPr id="4" name="Datumsplatzhalter 3">
             <a:extLst>
               <a:ext uri="{FF2B5EF4-FFF2-40B4-BE49-F238E27FC236}">
-                <a16:creationId xmlns:a16="http://schemas.microsoft.com/office/drawing/2014/main" id="{565C3320-4493-4953-3442-015355C4CBA6}"/>
+                <a16:creationId xmlns:a16="http://schemas.microsoft.com/office/drawing/2014/main" id="{60897398-A53B-9254-EF87-A603D2B68F02}"/>
               </a:ext>
             </a:extLst>
           </p:cNvPr>
@@ -15385,7 +17227,7 @@
           <a:bodyPr/>
           <a:lstStyle/>
           <a:p>
-            <a:fld id="{ECA477E0-FCFD-47FA-91EB-F183162F2E03}" type="datetimeFigureOut">
+            <a:fld id="{1B5E35DF-C35B-4244-9099-45A8D04D01B6}" type="datetimeFigureOut">
               <a:rPr lang="de-DE" smtClean="0"/>
               <a:t>09.10.2026</a:t>
             </a:fld>
@@ -15398,7 +17240,7 @@
           <p:cNvPr id="5" name="Fußzeilenplatzhalter 4">
             <a:extLst>
               <a:ext uri="{FF2B5EF4-FFF2-40B4-BE49-F238E27FC236}">
-                <a16:creationId xmlns:a16="http://schemas.microsoft.com/office/drawing/2014/main" id="{37780BBA-AD5E-AB4B-8271-759C7A34F7D0}"/>
+                <a16:creationId xmlns:a16="http://schemas.microsoft.com/office/drawing/2014/main" id="{31810DDB-0A62-4642-B656-D58DE23D6772}"/>
               </a:ext>
             </a:extLst>
           </p:cNvPr>
@@ -15423,7 +17265,7 @@
           <p:cNvPr id="6" name="Foliennummernplatzhalter 5">
             <a:extLst>
               <a:ext uri="{FF2B5EF4-FFF2-40B4-BE49-F238E27FC236}">
-                <a16:creationId xmlns:a16="http://schemas.microsoft.com/office/drawing/2014/main" id="{EE133E21-83D6-E2C0-E34B-CF184259F583}"/>
+                <a16:creationId xmlns:a16="http://schemas.microsoft.com/office/drawing/2014/main" id="{0CFD388D-D448-922A-C1A0-8248AAF7B6B7}"/>
               </a:ext>
             </a:extLst>
           </p:cNvPr>
@@ -15439,7 +17281,7 @@
           <a:bodyPr/>
           <a:lstStyle/>
           <a:p>
-            <a:fld id="{C41A99F7-991B-4D1E-AE48-3919C6026035}" type="slidenum">
+            <a:fld id="{C3E42750-23E9-4012-B2D1-959593B92499}" type="slidenum">
               <a:rPr lang="de-DE" smtClean="0"/>
               <a:t>‹Nr.›</a:t>
             </a:fld>
@@ -15450,7 +17292,7 @@
     </p:spTree>
     <p:extLst>
       <p:ext uri="{BB962C8B-B14F-4D97-AF65-F5344CB8AC3E}">
-        <p14:creationId xmlns:p14="http://schemas.microsoft.com/office/powerpoint/2010/main" val="1678261581"/>
+        <p14:creationId xmlns:p14="http://schemas.microsoft.com/office/powerpoint/2010/main" val="1520864867"/>
       </p:ext>
     </p:extLst>
   </p:cSld>
@@ -15482,7 +17324,7 @@
           <p:cNvPr id="2" name="Vertikaler Titel 1">
             <a:extLst>
               <a:ext uri="{FF2B5EF4-FFF2-40B4-BE49-F238E27FC236}">
-                <a16:creationId xmlns:a16="http://schemas.microsoft.com/office/drawing/2014/main" id="{2C91CFAC-E0D3-6894-B589-253BEDB73C17}"/>
+                <a16:creationId xmlns:a16="http://schemas.microsoft.com/office/drawing/2014/main" id="{AB7009A7-0899-09EC-D4C7-5A60AACF56E6}"/>
               </a:ext>
             </a:extLst>
           </p:cNvPr>
@@ -15515,7 +17357,7 @@
           <p:cNvPr id="3" name="Vertikaler Textplatzhalter 2">
             <a:extLst>
               <a:ext uri="{FF2B5EF4-FFF2-40B4-BE49-F238E27FC236}">
-                <a16:creationId xmlns:a16="http://schemas.microsoft.com/office/drawing/2014/main" id="{91B8BA9C-8F5A-A457-7335-F0338AD12EB5}"/>
+                <a16:creationId xmlns:a16="http://schemas.microsoft.com/office/drawing/2014/main" id="{6D7702FC-66AE-FDDA-73B4-522ECFDA24DC}"/>
               </a:ext>
             </a:extLst>
           </p:cNvPr>
@@ -15577,7 +17419,7 @@
           <p:cNvPr id="4" name="Datumsplatzhalter 3">
             <a:extLst>
               <a:ext uri="{FF2B5EF4-FFF2-40B4-BE49-F238E27FC236}">
-                <a16:creationId xmlns:a16="http://schemas.microsoft.com/office/drawing/2014/main" id="{589FE710-3515-5128-5BEF-0FF0039E4BC0}"/>
+                <a16:creationId xmlns:a16="http://schemas.microsoft.com/office/drawing/2014/main" id="{5FDFCF58-13EB-74B7-1B46-50D8662B4140}"/>
               </a:ext>
             </a:extLst>
           </p:cNvPr>
@@ -15593,7 +17435,7 @@
           <a:bodyPr/>
           <a:lstStyle/>
           <a:p>
-            <a:fld id="{ECA477E0-FCFD-47FA-91EB-F183162F2E03}" type="datetimeFigureOut">
+            <a:fld id="{1B5E35DF-C35B-4244-9099-45A8D04D01B6}" type="datetimeFigureOut">
               <a:rPr lang="de-DE" smtClean="0"/>
               <a:t>09.10.2026</a:t>
             </a:fld>
@@ -15606,7 +17448,7 @@
           <p:cNvPr id="5" name="Fußzeilenplatzhalter 4">
             <a:extLst>
               <a:ext uri="{FF2B5EF4-FFF2-40B4-BE49-F238E27FC236}">
-                <a16:creationId xmlns:a16="http://schemas.microsoft.com/office/drawing/2014/main" id="{24FE69A3-4640-649F-F4E0-C745FCFB53D3}"/>
+                <a16:creationId xmlns:a16="http://schemas.microsoft.com/office/drawing/2014/main" id="{22181794-39B3-6012-6D36-6B2C926CE452}"/>
               </a:ext>
             </a:extLst>
           </p:cNvPr>
@@ -15631,7 +17473,7 @@
           <p:cNvPr id="6" name="Foliennummernplatzhalter 5">
             <a:extLst>
               <a:ext uri="{FF2B5EF4-FFF2-40B4-BE49-F238E27FC236}">
-                <a16:creationId xmlns:a16="http://schemas.microsoft.com/office/drawing/2014/main" id="{4032EDBE-7A1C-1D2F-EF39-445A8CC1FCEC}"/>
+                <a16:creationId xmlns:a16="http://schemas.microsoft.com/office/drawing/2014/main" id="{81A11A39-414D-69BF-FFD8-AAB3C3E73D77}"/>
               </a:ext>
             </a:extLst>
           </p:cNvPr>
@@ -15647,7 +17489,7 @@
           <a:bodyPr/>
           <a:lstStyle/>
           <a:p>
-            <a:fld id="{C41A99F7-991B-4D1E-AE48-3919C6026035}" type="slidenum">
+            <a:fld id="{C3E42750-23E9-4012-B2D1-959593B92499}" type="slidenum">
               <a:rPr lang="de-DE" smtClean="0"/>
               <a:t>‹Nr.›</a:t>
             </a:fld>
@@ -15658,7 +17500,7 @@
     </p:spTree>
     <p:extLst>
       <p:ext uri="{BB962C8B-B14F-4D97-AF65-F5344CB8AC3E}">
-        <p14:creationId xmlns:p14="http://schemas.microsoft.com/office/powerpoint/2010/main" val="3714337951"/>
+        <p14:creationId xmlns:p14="http://schemas.microsoft.com/office/powerpoint/2010/main" val="1857118157"/>
       </p:ext>
     </p:extLst>
   </p:cSld>
@@ -15690,7 +17532,7 @@
           <p:cNvPr id="2" name="Titel 1">
             <a:extLst>
               <a:ext uri="{FF2B5EF4-FFF2-40B4-BE49-F238E27FC236}">
-                <a16:creationId xmlns:a16="http://schemas.microsoft.com/office/drawing/2014/main" id="{34549DE0-98E9-5C38-FF3D-04DDFDAEFE6D}"/>
+                <a16:creationId xmlns:a16="http://schemas.microsoft.com/office/drawing/2014/main" id="{299BE933-8C29-7E37-62CB-B020987ACF40}"/>
               </a:ext>
             </a:extLst>
           </p:cNvPr>
@@ -15718,7 +17560,7 @@
           <p:cNvPr id="3" name="Inhaltsplatzhalter 2">
             <a:extLst>
               <a:ext uri="{FF2B5EF4-FFF2-40B4-BE49-F238E27FC236}">
-                <a16:creationId xmlns:a16="http://schemas.microsoft.com/office/drawing/2014/main" id="{04FEC028-A248-54AB-625B-F101D8B1B882}"/>
+                <a16:creationId xmlns:a16="http://schemas.microsoft.com/office/drawing/2014/main" id="{FFC1DE59-F6A4-13DB-B179-87829FD2E6DA}"/>
               </a:ext>
             </a:extLst>
           </p:cNvPr>
@@ -15775,7 +17617,7 @@
           <p:cNvPr id="4" name="Datumsplatzhalter 3">
             <a:extLst>
               <a:ext uri="{FF2B5EF4-FFF2-40B4-BE49-F238E27FC236}">
-                <a16:creationId xmlns:a16="http://schemas.microsoft.com/office/drawing/2014/main" id="{022AF06B-1B2A-9316-1769-AD2CD9C4223F}"/>
+                <a16:creationId xmlns:a16="http://schemas.microsoft.com/office/drawing/2014/main" id="{6A80CC7E-6D08-D88A-33FC-411C5029CFCF}"/>
               </a:ext>
             </a:extLst>
           </p:cNvPr>
@@ -15791,7 +17633,7 @@
           <a:bodyPr/>
           <a:lstStyle/>
           <a:p>
-            <a:fld id="{ECA477E0-FCFD-47FA-91EB-F183162F2E03}" type="datetimeFigureOut">
+            <a:fld id="{1B5E35DF-C35B-4244-9099-45A8D04D01B6}" type="datetimeFigureOut">
               <a:rPr lang="de-DE" smtClean="0"/>
               <a:t>09.10.2026</a:t>
             </a:fld>
@@ -15804,7 +17646,7 @@
           <p:cNvPr id="5" name="Fußzeilenplatzhalter 4">
             <a:extLst>
               <a:ext uri="{FF2B5EF4-FFF2-40B4-BE49-F238E27FC236}">
-                <a16:creationId xmlns:a16="http://schemas.microsoft.com/office/drawing/2014/main" id="{0129F8F5-1C94-BAEE-6C6D-0780DC63EB2D}"/>
+                <a16:creationId xmlns:a16="http://schemas.microsoft.com/office/drawing/2014/main" id="{8828A5C0-BAAC-D789-758C-31EE96960F4E}"/>
               </a:ext>
             </a:extLst>
           </p:cNvPr>
@@ -15829,7 +17671,7 @@
           <p:cNvPr id="6" name="Foliennummernplatzhalter 5">
             <a:extLst>
               <a:ext uri="{FF2B5EF4-FFF2-40B4-BE49-F238E27FC236}">
-                <a16:creationId xmlns:a16="http://schemas.microsoft.com/office/drawing/2014/main" id="{45896FF1-2324-ECCD-0938-3F18EA4CC94F}"/>
+                <a16:creationId xmlns:a16="http://schemas.microsoft.com/office/drawing/2014/main" id="{0462E7C3-B450-7F85-5C20-FD28AA9A46F8}"/>
               </a:ext>
             </a:extLst>
           </p:cNvPr>
@@ -15845,7 +17687,7 @@
           <a:bodyPr/>
           <a:lstStyle/>
           <a:p>
-            <a:fld id="{C41A99F7-991B-4D1E-AE48-3919C6026035}" type="slidenum">
+            <a:fld id="{C3E42750-23E9-4012-B2D1-959593B92499}" type="slidenum">
               <a:rPr lang="de-DE" smtClean="0"/>
               <a:t>‹Nr.›</a:t>
             </a:fld>
@@ -15856,7 +17698,7 @@
     </p:spTree>
     <p:extLst>
       <p:ext uri="{BB962C8B-B14F-4D97-AF65-F5344CB8AC3E}">
-        <p14:creationId xmlns:p14="http://schemas.microsoft.com/office/powerpoint/2010/main" val="588479593"/>
+        <p14:creationId xmlns:p14="http://schemas.microsoft.com/office/powerpoint/2010/main" val="4188975913"/>
       </p:ext>
     </p:extLst>
   </p:cSld>
@@ -15888,7 +17730,7 @@
           <p:cNvPr id="2" name="Titel 1">
             <a:extLst>
               <a:ext uri="{FF2B5EF4-FFF2-40B4-BE49-F238E27FC236}">
-                <a16:creationId xmlns:a16="http://schemas.microsoft.com/office/drawing/2014/main" id="{1CD601C4-E034-DDBE-C2EC-51869E565CFB}"/>
+                <a16:creationId xmlns:a16="http://schemas.microsoft.com/office/drawing/2014/main" id="{2526B447-7453-D337-51E1-2606508E38CF}"/>
               </a:ext>
             </a:extLst>
           </p:cNvPr>
@@ -15925,7 +17767,7 @@
           <p:cNvPr id="3" name="Textplatzhalter 2">
             <a:extLst>
               <a:ext uri="{FF2B5EF4-FFF2-40B4-BE49-F238E27FC236}">
-                <a16:creationId xmlns:a16="http://schemas.microsoft.com/office/drawing/2014/main" id="{5562E049-4670-6FA2-5561-174DABBC04CB}"/>
+                <a16:creationId xmlns:a16="http://schemas.microsoft.com/office/drawing/2014/main" id="{213C9184-715D-8566-B9EC-B501785BD595}"/>
               </a:ext>
             </a:extLst>
           </p:cNvPr>
@@ -16050,7 +17892,7 @@
           <p:cNvPr id="4" name="Datumsplatzhalter 3">
             <a:extLst>
               <a:ext uri="{FF2B5EF4-FFF2-40B4-BE49-F238E27FC236}">
-                <a16:creationId xmlns:a16="http://schemas.microsoft.com/office/drawing/2014/main" id="{EE651C43-35CE-2163-8BE8-AF4BCA88E7A3}"/>
+                <a16:creationId xmlns:a16="http://schemas.microsoft.com/office/drawing/2014/main" id="{00378B0A-1C0D-899F-9134-CC16614D3773}"/>
               </a:ext>
             </a:extLst>
           </p:cNvPr>
@@ -16066,7 +17908,7 @@
           <a:bodyPr/>
           <a:lstStyle/>
           <a:p>
-            <a:fld id="{ECA477E0-FCFD-47FA-91EB-F183162F2E03}" type="datetimeFigureOut">
+            <a:fld id="{1B5E35DF-C35B-4244-9099-45A8D04D01B6}" type="datetimeFigureOut">
               <a:rPr lang="de-DE" smtClean="0"/>
               <a:t>09.10.2026</a:t>
             </a:fld>
@@ -16079,7 +17921,7 @@
           <p:cNvPr id="5" name="Fußzeilenplatzhalter 4">
             <a:extLst>
               <a:ext uri="{FF2B5EF4-FFF2-40B4-BE49-F238E27FC236}">
-                <a16:creationId xmlns:a16="http://schemas.microsoft.com/office/drawing/2014/main" id="{1EC2874E-1E5A-D32E-EC4B-DD8D152764FC}"/>
+                <a16:creationId xmlns:a16="http://schemas.microsoft.com/office/drawing/2014/main" id="{2D9F3EE7-9767-F42F-0CC3-B1F3DE9C5FFE}"/>
               </a:ext>
             </a:extLst>
           </p:cNvPr>
@@ -16104,7 +17946,7 @@
           <p:cNvPr id="6" name="Foliennummernplatzhalter 5">
             <a:extLst>
               <a:ext uri="{FF2B5EF4-FFF2-40B4-BE49-F238E27FC236}">
-                <a16:creationId xmlns:a16="http://schemas.microsoft.com/office/drawing/2014/main" id="{9D8F261F-CE9F-B79F-EFBA-69E9F4F38D56}"/>
+                <a16:creationId xmlns:a16="http://schemas.microsoft.com/office/drawing/2014/main" id="{FA2D78FB-6AF0-FA15-CE67-DEE69756ED7F}"/>
               </a:ext>
             </a:extLst>
           </p:cNvPr>
@@ -16120,7 +17962,7 @@
           <a:bodyPr/>
           <a:lstStyle/>
           <a:p>
-            <a:fld id="{C41A99F7-991B-4D1E-AE48-3919C6026035}" type="slidenum">
+            <a:fld id="{C3E42750-23E9-4012-B2D1-959593B92499}" type="slidenum">
               <a:rPr lang="de-DE" smtClean="0"/>
               <a:t>‹Nr.›</a:t>
             </a:fld>
@@ -16131,7 +17973,7 @@
     </p:spTree>
     <p:extLst>
       <p:ext uri="{BB962C8B-B14F-4D97-AF65-F5344CB8AC3E}">
-        <p14:creationId xmlns:p14="http://schemas.microsoft.com/office/powerpoint/2010/main" val="1253909574"/>
+        <p14:creationId xmlns:p14="http://schemas.microsoft.com/office/powerpoint/2010/main" val="2102365318"/>
       </p:ext>
     </p:extLst>
   </p:cSld>
@@ -16163,7 +18005,7 @@
           <p:cNvPr id="2" name="Titel 1">
             <a:extLst>
               <a:ext uri="{FF2B5EF4-FFF2-40B4-BE49-F238E27FC236}">
-                <a16:creationId xmlns:a16="http://schemas.microsoft.com/office/drawing/2014/main" id="{299A7170-81B0-74CE-E51E-2C7CD0779FF7}"/>
+                <a16:creationId xmlns:a16="http://schemas.microsoft.com/office/drawing/2014/main" id="{9A3A598D-17EA-EA5B-D190-936CF39D83EA}"/>
               </a:ext>
             </a:extLst>
           </p:cNvPr>
@@ -16191,7 +18033,7 @@
           <p:cNvPr id="3" name="Inhaltsplatzhalter 2">
             <a:extLst>
               <a:ext uri="{FF2B5EF4-FFF2-40B4-BE49-F238E27FC236}">
-                <a16:creationId xmlns:a16="http://schemas.microsoft.com/office/drawing/2014/main" id="{AAB2C0BC-1E57-EB6E-F838-D067A2CAFBAF}"/>
+                <a16:creationId xmlns:a16="http://schemas.microsoft.com/office/drawing/2014/main" id="{F992C595-F8C2-C386-72D6-558CD21A1604}"/>
               </a:ext>
             </a:extLst>
           </p:cNvPr>
@@ -16253,7 +18095,7 @@
           <p:cNvPr id="4" name="Inhaltsplatzhalter 3">
             <a:extLst>
               <a:ext uri="{FF2B5EF4-FFF2-40B4-BE49-F238E27FC236}">
-                <a16:creationId xmlns:a16="http://schemas.microsoft.com/office/drawing/2014/main" id="{2A9B1984-5A7D-75AD-F27C-268C553E1C13}"/>
+                <a16:creationId xmlns:a16="http://schemas.microsoft.com/office/drawing/2014/main" id="{4B766DB1-E781-98FA-9CE0-6B73EE4579F6}"/>
               </a:ext>
             </a:extLst>
           </p:cNvPr>
@@ -16315,7 +18157,7 @@
           <p:cNvPr id="5" name="Datumsplatzhalter 4">
             <a:extLst>
               <a:ext uri="{FF2B5EF4-FFF2-40B4-BE49-F238E27FC236}">
-                <a16:creationId xmlns:a16="http://schemas.microsoft.com/office/drawing/2014/main" id="{0BEB8353-AB49-A27E-75C9-3AB79357B2F9}"/>
+                <a16:creationId xmlns:a16="http://schemas.microsoft.com/office/drawing/2014/main" id="{8610EF28-8A35-834D-AB11-53B27BD3D0A1}"/>
               </a:ext>
             </a:extLst>
           </p:cNvPr>
@@ -16331,7 +18173,7 @@
           <a:bodyPr/>
           <a:lstStyle/>
           <a:p>
-            <a:fld id="{ECA477E0-FCFD-47FA-91EB-F183162F2E03}" type="datetimeFigureOut">
+            <a:fld id="{1B5E35DF-C35B-4244-9099-45A8D04D01B6}" type="datetimeFigureOut">
               <a:rPr lang="de-DE" smtClean="0"/>
               <a:t>09.10.2026</a:t>
             </a:fld>
@@ -16344,7 +18186,7 @@
           <p:cNvPr id="6" name="Fußzeilenplatzhalter 5">
             <a:extLst>
               <a:ext uri="{FF2B5EF4-FFF2-40B4-BE49-F238E27FC236}">
-                <a16:creationId xmlns:a16="http://schemas.microsoft.com/office/drawing/2014/main" id="{ACC588BE-00A4-22B1-56B0-200F30E6AC8C}"/>
+                <a16:creationId xmlns:a16="http://schemas.microsoft.com/office/drawing/2014/main" id="{5109A42A-219D-70B0-0E7E-786B6396A9F9}"/>
               </a:ext>
             </a:extLst>
           </p:cNvPr>
@@ -16369,7 +18211,7 @@
           <p:cNvPr id="7" name="Foliennummernplatzhalter 6">
             <a:extLst>
               <a:ext uri="{FF2B5EF4-FFF2-40B4-BE49-F238E27FC236}">
-                <a16:creationId xmlns:a16="http://schemas.microsoft.com/office/drawing/2014/main" id="{A350CEAA-48F6-F930-2F63-B79384E8F68C}"/>
+                <a16:creationId xmlns:a16="http://schemas.microsoft.com/office/drawing/2014/main" id="{12B26C7C-43B5-D592-8FD6-36F02E5414F6}"/>
               </a:ext>
             </a:extLst>
           </p:cNvPr>
@@ -16385,7 +18227,7 @@
           <a:bodyPr/>
           <a:lstStyle/>
           <a:p>
-            <a:fld id="{C41A99F7-991B-4D1E-AE48-3919C6026035}" type="slidenum">
+            <a:fld id="{C3E42750-23E9-4012-B2D1-959593B92499}" type="slidenum">
               <a:rPr lang="de-DE" smtClean="0"/>
               <a:t>‹Nr.›</a:t>
             </a:fld>
@@ -16396,7 +18238,7 @@
     </p:spTree>
     <p:extLst>
       <p:ext uri="{BB962C8B-B14F-4D97-AF65-F5344CB8AC3E}">
-        <p14:creationId xmlns:p14="http://schemas.microsoft.com/office/powerpoint/2010/main" val="637243054"/>
+        <p14:creationId xmlns:p14="http://schemas.microsoft.com/office/powerpoint/2010/main" val="2643735813"/>
       </p:ext>
     </p:extLst>
   </p:cSld>
@@ -16428,7 +18270,7 @@
           <p:cNvPr id="2" name="Titel 1">
             <a:extLst>
               <a:ext uri="{FF2B5EF4-FFF2-40B4-BE49-F238E27FC236}">
-                <a16:creationId xmlns:a16="http://schemas.microsoft.com/office/drawing/2014/main" id="{7ECC0440-746F-BF1D-9A4D-926681B2FF7B}"/>
+                <a16:creationId xmlns:a16="http://schemas.microsoft.com/office/drawing/2014/main" id="{C57E6647-CF8A-EF7F-5CFC-692E6E5DA9B6}"/>
               </a:ext>
             </a:extLst>
           </p:cNvPr>
@@ -16461,7 +18303,7 @@
           <p:cNvPr id="3" name="Textplatzhalter 2">
             <a:extLst>
               <a:ext uri="{FF2B5EF4-FFF2-40B4-BE49-F238E27FC236}">
-                <a16:creationId xmlns:a16="http://schemas.microsoft.com/office/drawing/2014/main" id="{E7742D7F-A66E-B635-BDB6-E337F946733C}"/>
+                <a16:creationId xmlns:a16="http://schemas.microsoft.com/office/drawing/2014/main" id="{EA00825C-6EF1-7578-4E3B-56E5B7B08458}"/>
               </a:ext>
             </a:extLst>
           </p:cNvPr>
@@ -16532,7 +18374,7 @@
           <p:cNvPr id="4" name="Inhaltsplatzhalter 3">
             <a:extLst>
               <a:ext uri="{FF2B5EF4-FFF2-40B4-BE49-F238E27FC236}">
-                <a16:creationId xmlns:a16="http://schemas.microsoft.com/office/drawing/2014/main" id="{BFB22150-4FF7-8BDE-54E9-53A8A2DE496E}"/>
+                <a16:creationId xmlns:a16="http://schemas.microsoft.com/office/drawing/2014/main" id="{7254591C-F201-3015-0B1B-43371457F0F5}"/>
               </a:ext>
             </a:extLst>
           </p:cNvPr>
@@ -16594,7 +18436,7 @@
           <p:cNvPr id="5" name="Textplatzhalter 4">
             <a:extLst>
               <a:ext uri="{FF2B5EF4-FFF2-40B4-BE49-F238E27FC236}">
-                <a16:creationId xmlns:a16="http://schemas.microsoft.com/office/drawing/2014/main" id="{FA1AA9B9-0F74-4978-84B6-5D0AA6251F41}"/>
+                <a16:creationId xmlns:a16="http://schemas.microsoft.com/office/drawing/2014/main" id="{6CCE877D-9038-EAD6-5406-D09DC77B9CEF}"/>
               </a:ext>
             </a:extLst>
           </p:cNvPr>
@@ -16665,7 +18507,7 @@
           <p:cNvPr id="6" name="Inhaltsplatzhalter 5">
             <a:extLst>
               <a:ext uri="{FF2B5EF4-FFF2-40B4-BE49-F238E27FC236}">
-                <a16:creationId xmlns:a16="http://schemas.microsoft.com/office/drawing/2014/main" id="{EA262A0B-29CB-E699-11EA-DA957632007F}"/>
+                <a16:creationId xmlns:a16="http://schemas.microsoft.com/office/drawing/2014/main" id="{F793E38C-2891-774A-0743-D247B34F1A73}"/>
               </a:ext>
             </a:extLst>
           </p:cNvPr>
@@ -16727,7 +18569,7 @@
           <p:cNvPr id="7" name="Datumsplatzhalter 6">
             <a:extLst>
               <a:ext uri="{FF2B5EF4-FFF2-40B4-BE49-F238E27FC236}">
-                <a16:creationId xmlns:a16="http://schemas.microsoft.com/office/drawing/2014/main" id="{ADA321D7-43E2-4711-C410-5B1B57FA2E7C}"/>
+                <a16:creationId xmlns:a16="http://schemas.microsoft.com/office/drawing/2014/main" id="{0E37B560-0E06-DE97-1EED-CD996E0BDAF6}"/>
               </a:ext>
             </a:extLst>
           </p:cNvPr>
@@ -16743,7 +18585,7 @@
           <a:bodyPr/>
           <a:lstStyle/>
           <a:p>
-            <a:fld id="{ECA477E0-FCFD-47FA-91EB-F183162F2E03}" type="datetimeFigureOut">
+            <a:fld id="{1B5E35DF-C35B-4244-9099-45A8D04D01B6}" type="datetimeFigureOut">
               <a:rPr lang="de-DE" smtClean="0"/>
               <a:t>09.10.2026</a:t>
             </a:fld>
@@ -16756,7 +18598,7 @@
           <p:cNvPr id="8" name="Fußzeilenplatzhalter 7">
             <a:extLst>
               <a:ext uri="{FF2B5EF4-FFF2-40B4-BE49-F238E27FC236}">
-                <a16:creationId xmlns:a16="http://schemas.microsoft.com/office/drawing/2014/main" id="{A4B7B059-F28C-38FA-9A91-2D1493C2E062}"/>
+                <a16:creationId xmlns:a16="http://schemas.microsoft.com/office/drawing/2014/main" id="{8499C07E-0ABE-F4A2-9C3E-CB8BA59B7A19}"/>
               </a:ext>
             </a:extLst>
           </p:cNvPr>
@@ -16781,7 +18623,7 @@
           <p:cNvPr id="9" name="Foliennummernplatzhalter 8">
             <a:extLst>
               <a:ext uri="{FF2B5EF4-FFF2-40B4-BE49-F238E27FC236}">
-                <a16:creationId xmlns:a16="http://schemas.microsoft.com/office/drawing/2014/main" id="{BB662636-9615-FB7C-2881-1F8B43715377}"/>
+                <a16:creationId xmlns:a16="http://schemas.microsoft.com/office/drawing/2014/main" id="{D05965AA-31D2-4E41-EEAB-C57A5DB27AF8}"/>
               </a:ext>
             </a:extLst>
           </p:cNvPr>
@@ -16797,7 +18639,7 @@
           <a:bodyPr/>
           <a:lstStyle/>
           <a:p>
-            <a:fld id="{C41A99F7-991B-4D1E-AE48-3919C6026035}" type="slidenum">
+            <a:fld id="{C3E42750-23E9-4012-B2D1-959593B92499}" type="slidenum">
               <a:rPr lang="de-DE" smtClean="0"/>
               <a:t>‹Nr.›</a:t>
             </a:fld>
@@ -16808,7 +18650,7 @@
     </p:spTree>
     <p:extLst>
       <p:ext uri="{BB962C8B-B14F-4D97-AF65-F5344CB8AC3E}">
-        <p14:creationId xmlns:p14="http://schemas.microsoft.com/office/powerpoint/2010/main" val="3897881765"/>
+        <p14:creationId xmlns:p14="http://schemas.microsoft.com/office/powerpoint/2010/main" val="1084328708"/>
       </p:ext>
     </p:extLst>
   </p:cSld>
@@ -16840,7 +18682,7 @@
           <p:cNvPr id="2" name="Titel 1">
             <a:extLst>
               <a:ext uri="{FF2B5EF4-FFF2-40B4-BE49-F238E27FC236}">
-                <a16:creationId xmlns:a16="http://schemas.microsoft.com/office/drawing/2014/main" id="{A771881C-2DE4-15CA-2C51-F336EB5B83FF}"/>
+                <a16:creationId xmlns:a16="http://schemas.microsoft.com/office/drawing/2014/main" id="{AD887E73-BE1F-5B45-1519-AFA73E13FF3A}"/>
               </a:ext>
             </a:extLst>
           </p:cNvPr>
@@ -16868,7 +18710,7 @@
           <p:cNvPr id="3" name="Datumsplatzhalter 2">
             <a:extLst>
               <a:ext uri="{FF2B5EF4-FFF2-40B4-BE49-F238E27FC236}">
-                <a16:creationId xmlns:a16="http://schemas.microsoft.com/office/drawing/2014/main" id="{0B34A5B3-6B83-108A-B8DC-4FF72EEAC3A4}"/>
+                <a16:creationId xmlns:a16="http://schemas.microsoft.com/office/drawing/2014/main" id="{C9371C46-F023-0D79-157C-2CF79E5B3678}"/>
               </a:ext>
             </a:extLst>
           </p:cNvPr>
@@ -16884,7 +18726,7 @@
           <a:bodyPr/>
           <a:lstStyle/>
           <a:p>
-            <a:fld id="{ECA477E0-FCFD-47FA-91EB-F183162F2E03}" type="datetimeFigureOut">
+            <a:fld id="{1B5E35DF-C35B-4244-9099-45A8D04D01B6}" type="datetimeFigureOut">
               <a:rPr lang="de-DE" smtClean="0"/>
               <a:t>09.10.2026</a:t>
             </a:fld>
@@ -16897,7 +18739,7 @@
           <p:cNvPr id="4" name="Fußzeilenplatzhalter 3">
             <a:extLst>
               <a:ext uri="{FF2B5EF4-FFF2-40B4-BE49-F238E27FC236}">
-                <a16:creationId xmlns:a16="http://schemas.microsoft.com/office/drawing/2014/main" id="{B00F0ACF-A002-BC76-1563-0C97C1C9A928}"/>
+                <a16:creationId xmlns:a16="http://schemas.microsoft.com/office/drawing/2014/main" id="{B564BEF8-0F42-AAFD-B450-0822A6E64E5C}"/>
               </a:ext>
             </a:extLst>
           </p:cNvPr>
@@ -16922,7 +18764,7 @@
           <p:cNvPr id="5" name="Foliennummernplatzhalter 4">
             <a:extLst>
               <a:ext uri="{FF2B5EF4-FFF2-40B4-BE49-F238E27FC236}">
-                <a16:creationId xmlns:a16="http://schemas.microsoft.com/office/drawing/2014/main" id="{26CB5CD3-3771-BCF2-20ED-84C343E482CB}"/>
+                <a16:creationId xmlns:a16="http://schemas.microsoft.com/office/drawing/2014/main" id="{A5459D0A-27B7-58E7-2449-E3F1B156063E}"/>
               </a:ext>
             </a:extLst>
           </p:cNvPr>
@@ -16938,7 +18780,7 @@
           <a:bodyPr/>
           <a:lstStyle/>
           <a:p>
-            <a:fld id="{C41A99F7-991B-4D1E-AE48-3919C6026035}" type="slidenum">
+            <a:fld id="{C3E42750-23E9-4012-B2D1-959593B92499}" type="slidenum">
               <a:rPr lang="de-DE" smtClean="0"/>
               <a:t>‹Nr.›</a:t>
             </a:fld>
@@ -16949,7 +18791,7 @@
     </p:spTree>
     <p:extLst>
       <p:ext uri="{BB962C8B-B14F-4D97-AF65-F5344CB8AC3E}">
-        <p14:creationId xmlns:p14="http://schemas.microsoft.com/office/powerpoint/2010/main" val="4063160351"/>
+        <p14:creationId xmlns:p14="http://schemas.microsoft.com/office/powerpoint/2010/main" val="1188303216"/>
       </p:ext>
     </p:extLst>
   </p:cSld>
@@ -16981,7 +18823,7 @@
           <p:cNvPr id="2" name="Datumsplatzhalter 1">
             <a:extLst>
               <a:ext uri="{FF2B5EF4-FFF2-40B4-BE49-F238E27FC236}">
-                <a16:creationId xmlns:a16="http://schemas.microsoft.com/office/drawing/2014/main" id="{AB1D2A47-10E0-AED2-B16C-3FE3FFF65FD2}"/>
+                <a16:creationId xmlns:a16="http://schemas.microsoft.com/office/drawing/2014/main" id="{B81568FC-6B91-7813-0EDB-2D2DFFC61F25}"/>
               </a:ext>
             </a:extLst>
           </p:cNvPr>
@@ -16997,7 +18839,7 @@
           <a:bodyPr/>
           <a:lstStyle/>
           <a:p>
-            <a:fld id="{ECA477E0-FCFD-47FA-91EB-F183162F2E03}" type="datetimeFigureOut">
+            <a:fld id="{1B5E35DF-C35B-4244-9099-45A8D04D01B6}" type="datetimeFigureOut">
               <a:rPr lang="de-DE" smtClean="0"/>
               <a:t>09.10.2026</a:t>
             </a:fld>
@@ -17010,7 +18852,7 @@
           <p:cNvPr id="3" name="Fußzeilenplatzhalter 2">
             <a:extLst>
               <a:ext uri="{FF2B5EF4-FFF2-40B4-BE49-F238E27FC236}">
-                <a16:creationId xmlns:a16="http://schemas.microsoft.com/office/drawing/2014/main" id="{A6805B73-8E26-E8A4-AE55-5363D755D35B}"/>
+                <a16:creationId xmlns:a16="http://schemas.microsoft.com/office/drawing/2014/main" id="{B301A565-7F29-DFDC-8D46-63F4F9FD8D29}"/>
               </a:ext>
             </a:extLst>
           </p:cNvPr>
@@ -17035,7 +18877,7 @@
           <p:cNvPr id="4" name="Foliennummernplatzhalter 3">
             <a:extLst>
               <a:ext uri="{FF2B5EF4-FFF2-40B4-BE49-F238E27FC236}">
-                <a16:creationId xmlns:a16="http://schemas.microsoft.com/office/drawing/2014/main" id="{1FE191CC-78AF-F6F5-474E-DCE7D4480D4A}"/>
+                <a16:creationId xmlns:a16="http://schemas.microsoft.com/office/drawing/2014/main" id="{203BC195-467D-1D7A-189C-20DD9FF166D7}"/>
               </a:ext>
             </a:extLst>
           </p:cNvPr>
@@ -17051,7 +18893,7 @@
           <a:bodyPr/>
           <a:lstStyle/>
           <a:p>
-            <a:fld id="{C41A99F7-991B-4D1E-AE48-3919C6026035}" type="slidenum">
+            <a:fld id="{C3E42750-23E9-4012-B2D1-959593B92499}" type="slidenum">
               <a:rPr lang="de-DE" smtClean="0"/>
               <a:t>‹Nr.›</a:t>
             </a:fld>
@@ -17062,7 +18904,7 @@
     </p:spTree>
     <p:extLst>
       <p:ext uri="{BB962C8B-B14F-4D97-AF65-F5344CB8AC3E}">
-        <p14:creationId xmlns:p14="http://schemas.microsoft.com/office/powerpoint/2010/main" val="2234088096"/>
+        <p14:creationId xmlns:p14="http://schemas.microsoft.com/office/powerpoint/2010/main" val="3413860196"/>
       </p:ext>
     </p:extLst>
   </p:cSld>
@@ -17094,7 +18936,7 @@
           <p:cNvPr id="2" name="Titel 1">
             <a:extLst>
               <a:ext uri="{FF2B5EF4-FFF2-40B4-BE49-F238E27FC236}">
-                <a16:creationId xmlns:a16="http://schemas.microsoft.com/office/drawing/2014/main" id="{526AA5EF-4F11-D086-D8D9-5B41CD7AAFDA}"/>
+                <a16:creationId xmlns:a16="http://schemas.microsoft.com/office/drawing/2014/main" id="{B4428D89-8ACB-39EF-0761-892B047A2770}"/>
               </a:ext>
             </a:extLst>
           </p:cNvPr>
@@ -17131,7 +18973,7 @@
           <p:cNvPr id="3" name="Inhaltsplatzhalter 2">
             <a:extLst>
               <a:ext uri="{FF2B5EF4-FFF2-40B4-BE49-F238E27FC236}">
-                <a16:creationId xmlns:a16="http://schemas.microsoft.com/office/drawing/2014/main" id="{29238C77-6C3A-0A4C-4E6B-EFDFAEBDEFA2}"/>
+                <a16:creationId xmlns:a16="http://schemas.microsoft.com/office/drawing/2014/main" id="{06A05F01-3BAF-9604-157A-6A258F3D30ED}"/>
               </a:ext>
             </a:extLst>
           </p:cNvPr>
@@ -17221,7 +19063,7 @@
           <p:cNvPr id="4" name="Textplatzhalter 3">
             <a:extLst>
               <a:ext uri="{FF2B5EF4-FFF2-40B4-BE49-F238E27FC236}">
-                <a16:creationId xmlns:a16="http://schemas.microsoft.com/office/drawing/2014/main" id="{C3610C81-0660-7552-10F7-660A6C782A20}"/>
+                <a16:creationId xmlns:a16="http://schemas.microsoft.com/office/drawing/2014/main" id="{DFC106EF-5EE0-8AD2-C0DB-497DBF68FD89}"/>
               </a:ext>
             </a:extLst>
           </p:cNvPr>
@@ -17292,7 +19134,7 @@
           <p:cNvPr id="5" name="Datumsplatzhalter 4">
             <a:extLst>
               <a:ext uri="{FF2B5EF4-FFF2-40B4-BE49-F238E27FC236}">
-                <a16:creationId xmlns:a16="http://schemas.microsoft.com/office/drawing/2014/main" id="{AB99602D-C2C5-9D71-0943-AA713484A9E6}"/>
+                <a16:creationId xmlns:a16="http://schemas.microsoft.com/office/drawing/2014/main" id="{85A515C5-E184-C623-7C3A-184140F40DDF}"/>
               </a:ext>
             </a:extLst>
           </p:cNvPr>
@@ -17308,7 +19150,7 @@
           <a:bodyPr/>
           <a:lstStyle/>
           <a:p>
-            <a:fld id="{ECA477E0-FCFD-47FA-91EB-F183162F2E03}" type="datetimeFigureOut">
+            <a:fld id="{1B5E35DF-C35B-4244-9099-45A8D04D01B6}" type="datetimeFigureOut">
               <a:rPr lang="de-DE" smtClean="0"/>
               <a:t>09.10.2026</a:t>
             </a:fld>
@@ -17321,7 +19163,7 @@
           <p:cNvPr id="6" name="Fußzeilenplatzhalter 5">
             <a:extLst>
               <a:ext uri="{FF2B5EF4-FFF2-40B4-BE49-F238E27FC236}">
-                <a16:creationId xmlns:a16="http://schemas.microsoft.com/office/drawing/2014/main" id="{7CD40030-2B4A-EE9C-932B-350AC40244A2}"/>
+                <a16:creationId xmlns:a16="http://schemas.microsoft.com/office/drawing/2014/main" id="{181B6F80-8D5A-8860-C599-E236E42D10FE}"/>
               </a:ext>
             </a:extLst>
           </p:cNvPr>
@@ -17346,7 +19188,7 @@
           <p:cNvPr id="7" name="Foliennummernplatzhalter 6">
             <a:extLst>
               <a:ext uri="{FF2B5EF4-FFF2-40B4-BE49-F238E27FC236}">
-                <a16:creationId xmlns:a16="http://schemas.microsoft.com/office/drawing/2014/main" id="{8E818CFB-6F92-66B2-C5A9-3FC5631FA7D1}"/>
+                <a16:creationId xmlns:a16="http://schemas.microsoft.com/office/drawing/2014/main" id="{923D7D7A-7186-831D-01C9-E65C2FF2E3FA}"/>
               </a:ext>
             </a:extLst>
           </p:cNvPr>
@@ -17362,7 +19204,7 @@
           <a:bodyPr/>
           <a:lstStyle/>
           <a:p>
-            <a:fld id="{C41A99F7-991B-4D1E-AE48-3919C6026035}" type="slidenum">
+            <a:fld id="{C3E42750-23E9-4012-B2D1-959593B92499}" type="slidenum">
               <a:rPr lang="de-DE" smtClean="0"/>
               <a:t>‹Nr.›</a:t>
             </a:fld>
@@ -17373,7 +19215,7 @@
     </p:spTree>
     <p:extLst>
       <p:ext uri="{BB962C8B-B14F-4D97-AF65-F5344CB8AC3E}">
-        <p14:creationId xmlns:p14="http://schemas.microsoft.com/office/powerpoint/2010/main" val="634180967"/>
+        <p14:creationId xmlns:p14="http://schemas.microsoft.com/office/powerpoint/2010/main" val="3196431045"/>
       </p:ext>
     </p:extLst>
   </p:cSld>
@@ -17405,7 +19247,7 @@
           <p:cNvPr id="2" name="Titel 1">
             <a:extLst>
               <a:ext uri="{FF2B5EF4-FFF2-40B4-BE49-F238E27FC236}">
-                <a16:creationId xmlns:a16="http://schemas.microsoft.com/office/drawing/2014/main" id="{2C0305BC-ACDD-B2DF-1FCB-D8CFCE20EF70}"/>
+                <a16:creationId xmlns:a16="http://schemas.microsoft.com/office/drawing/2014/main" id="{4DA354DF-2ED9-E450-118C-21B1BCFC4602}"/>
               </a:ext>
             </a:extLst>
           </p:cNvPr>
@@ -17442,7 +19284,7 @@
           <p:cNvPr id="3" name="Bildplatzhalter 2">
             <a:extLst>
               <a:ext uri="{FF2B5EF4-FFF2-40B4-BE49-F238E27FC236}">
-                <a16:creationId xmlns:a16="http://schemas.microsoft.com/office/drawing/2014/main" id="{3314873A-1CA4-70A8-6C93-66DAF7687513}"/>
+                <a16:creationId xmlns:a16="http://schemas.microsoft.com/office/drawing/2014/main" id="{7A7D9AF6-E286-2D07-260A-A0B1BD022DB7}"/>
               </a:ext>
             </a:extLst>
           </p:cNvPr>
@@ -17509,7 +19351,7 @@
           <p:cNvPr id="4" name="Textplatzhalter 3">
             <a:extLst>
               <a:ext uri="{FF2B5EF4-FFF2-40B4-BE49-F238E27FC236}">
-                <a16:creationId xmlns:a16="http://schemas.microsoft.com/office/drawing/2014/main" id="{1717FE42-8156-0D37-A57A-E5C5D8B7D72C}"/>
+                <a16:creationId xmlns:a16="http://schemas.microsoft.com/office/drawing/2014/main" id="{626D5847-F151-54FF-29C1-9C40FC3498A3}"/>
               </a:ext>
             </a:extLst>
           </p:cNvPr>
@@ -17580,7 +19422,7 @@
           <p:cNvPr id="5" name="Datumsplatzhalter 4">
             <a:extLst>
               <a:ext uri="{FF2B5EF4-FFF2-40B4-BE49-F238E27FC236}">
-                <a16:creationId xmlns:a16="http://schemas.microsoft.com/office/drawing/2014/main" id="{2B9E63DF-6F43-8EE6-82E0-B408AD4562A1}"/>
+                <a16:creationId xmlns:a16="http://schemas.microsoft.com/office/drawing/2014/main" id="{3F0D0E5A-6EEF-6FD4-E448-BC0889367BE0}"/>
               </a:ext>
             </a:extLst>
           </p:cNvPr>
@@ -17596,7 +19438,7 @@
           <a:bodyPr/>
           <a:lstStyle/>
           <a:p>
-            <a:fld id="{ECA477E0-FCFD-47FA-91EB-F183162F2E03}" type="datetimeFigureOut">
+            <a:fld id="{1B5E35DF-C35B-4244-9099-45A8D04D01B6}" type="datetimeFigureOut">
               <a:rPr lang="de-DE" smtClean="0"/>
               <a:t>09.10.2026</a:t>
             </a:fld>
@@ -17609,7 +19451,7 @@
           <p:cNvPr id="6" name="Fußzeilenplatzhalter 5">
             <a:extLst>
               <a:ext uri="{FF2B5EF4-FFF2-40B4-BE49-F238E27FC236}">
-                <a16:creationId xmlns:a16="http://schemas.microsoft.com/office/drawing/2014/main" id="{973A1A0E-66BF-5709-E3BE-0BD48B096A4A}"/>
+                <a16:creationId xmlns:a16="http://schemas.microsoft.com/office/drawing/2014/main" id="{5BB52C4B-506F-7059-A117-7C8286F76AAB}"/>
               </a:ext>
             </a:extLst>
           </p:cNvPr>
@@ -17634,7 +19476,7 @@
           <p:cNvPr id="7" name="Foliennummernplatzhalter 6">
             <a:extLst>
               <a:ext uri="{FF2B5EF4-FFF2-40B4-BE49-F238E27FC236}">
-                <a16:creationId xmlns:a16="http://schemas.microsoft.com/office/drawing/2014/main" id="{31C3E84C-DCFB-CE1C-CBF2-9E9601455735}"/>
+                <a16:creationId xmlns:a16="http://schemas.microsoft.com/office/drawing/2014/main" id="{0C6C4032-8E28-5857-B480-8817D44A465B}"/>
               </a:ext>
             </a:extLst>
           </p:cNvPr>
@@ -17650,7 +19492,7 @@
           <a:bodyPr/>
           <a:lstStyle/>
           <a:p>
-            <a:fld id="{C41A99F7-991B-4D1E-AE48-3919C6026035}" type="slidenum">
+            <a:fld id="{C3E42750-23E9-4012-B2D1-959593B92499}" type="slidenum">
               <a:rPr lang="de-DE" smtClean="0"/>
               <a:t>‹Nr.›</a:t>
             </a:fld>
@@ -17661,7 +19503,7 @@
     </p:spTree>
     <p:extLst>
       <p:ext uri="{BB962C8B-B14F-4D97-AF65-F5344CB8AC3E}">
-        <p14:creationId xmlns:p14="http://schemas.microsoft.com/office/powerpoint/2010/main" val="174134119"/>
+        <p14:creationId xmlns:p14="http://schemas.microsoft.com/office/powerpoint/2010/main" val="677141133"/>
       </p:ext>
     </p:extLst>
   </p:cSld>
@@ -17698,7 +19540,7 @@
           <p:cNvPr id="2" name="Titelplatzhalter 1">
             <a:extLst>
               <a:ext uri="{FF2B5EF4-FFF2-40B4-BE49-F238E27FC236}">
-                <a16:creationId xmlns:a16="http://schemas.microsoft.com/office/drawing/2014/main" id="{4B224871-252B-CEF4-22C2-67928EA58E98}"/>
+                <a16:creationId xmlns:a16="http://schemas.microsoft.com/office/drawing/2014/main" id="{B6854319-DB0A-399B-36DB-8E6F096E6B91}"/>
               </a:ext>
             </a:extLst>
           </p:cNvPr>
@@ -17736,7 +19578,7 @@
           <p:cNvPr id="3" name="Textplatzhalter 2">
             <a:extLst>
               <a:ext uri="{FF2B5EF4-FFF2-40B4-BE49-F238E27FC236}">
-                <a16:creationId xmlns:a16="http://schemas.microsoft.com/office/drawing/2014/main" id="{053B0960-91DF-14C4-1C93-D9ECB1F774F3}"/>
+                <a16:creationId xmlns:a16="http://schemas.microsoft.com/office/drawing/2014/main" id="{3B3B383D-2334-31BB-143A-D94FECC44377}"/>
               </a:ext>
             </a:extLst>
           </p:cNvPr>
@@ -17803,7 +19645,7 @@
           <p:cNvPr id="4" name="Datumsplatzhalter 3">
             <a:extLst>
               <a:ext uri="{FF2B5EF4-FFF2-40B4-BE49-F238E27FC236}">
-                <a16:creationId xmlns:a16="http://schemas.microsoft.com/office/drawing/2014/main" id="{A9ED2D2B-991F-29AE-6333-FF3714FBD2B2}"/>
+                <a16:creationId xmlns:a16="http://schemas.microsoft.com/office/drawing/2014/main" id="{69F432C2-B8F8-529A-4144-CF55668B07CC}"/>
               </a:ext>
             </a:extLst>
           </p:cNvPr>
@@ -17837,7 +19679,7 @@
             </a:lvl1pPr>
           </a:lstStyle>
           <a:p>
-            <a:fld id="{ECA477E0-FCFD-47FA-91EB-F183162F2E03}" type="datetimeFigureOut">
+            <a:fld id="{1B5E35DF-C35B-4244-9099-45A8D04D01B6}" type="datetimeFigureOut">
               <a:rPr lang="de-DE" smtClean="0"/>
               <a:t>09.10.2026</a:t>
             </a:fld>
@@ -17850,7 +19692,7 @@
           <p:cNvPr id="5" name="Fußzeilenplatzhalter 4">
             <a:extLst>
               <a:ext uri="{FF2B5EF4-FFF2-40B4-BE49-F238E27FC236}">
-                <a16:creationId xmlns:a16="http://schemas.microsoft.com/office/drawing/2014/main" id="{1AA23E57-CBFA-656A-822F-20B8D3EC93B5}"/>
+                <a16:creationId xmlns:a16="http://schemas.microsoft.com/office/drawing/2014/main" id="{44ED305A-CA81-A119-E363-355A7C22B5A9}"/>
               </a:ext>
             </a:extLst>
           </p:cNvPr>
@@ -17893,7 +19735,7 @@
           <p:cNvPr id="6" name="Foliennummernplatzhalter 5">
             <a:extLst>
               <a:ext uri="{FF2B5EF4-FFF2-40B4-BE49-F238E27FC236}">
-                <a16:creationId xmlns:a16="http://schemas.microsoft.com/office/drawing/2014/main" id="{A9294CC5-3DD7-6CE8-CAAF-A604A47FCA8E}"/>
+                <a16:creationId xmlns:a16="http://schemas.microsoft.com/office/drawing/2014/main" id="{54FE7E7F-E360-1905-AC56-30B8688950E0}"/>
               </a:ext>
             </a:extLst>
           </p:cNvPr>
@@ -17927,7 +19769,7 @@
             </a:lvl1pPr>
           </a:lstStyle>
           <a:p>
-            <a:fld id="{C41A99F7-991B-4D1E-AE48-3919C6026035}" type="slidenum">
+            <a:fld id="{C3E42750-23E9-4012-B2D1-959593B92499}" type="slidenum">
               <a:rPr lang="de-DE" smtClean="0"/>
               <a:t>‹Nr.›</a:t>
             </a:fld>
@@ -17938,7 +19780,7 @@
     </p:spTree>
     <p:extLst>
       <p:ext uri="{BB962C8B-B14F-4D97-AF65-F5344CB8AC3E}">
-        <p14:creationId xmlns:p14="http://schemas.microsoft.com/office/powerpoint/2010/main" val="3158574578"/>
+        <p14:creationId xmlns:p14="http://schemas.microsoft.com/office/powerpoint/2010/main" val="438147647"/>
       </p:ext>
     </p:extLst>
   </p:cSld>
@@ -18261,7 +20103,7 @@
           <p:cNvPr id="2" name="Titel 1">
             <a:extLst>
               <a:ext uri="{FF2B5EF4-FFF2-40B4-BE49-F238E27FC236}">
-                <a16:creationId xmlns:a16="http://schemas.microsoft.com/office/drawing/2014/main" id="{3E555090-BE40-52C0-E072-6D5EDAE20816}"/>
+                <a16:creationId xmlns:a16="http://schemas.microsoft.com/office/drawing/2014/main" id="{5F66A962-7F95-74E8-8D2B-5836708A09BD}"/>
               </a:ext>
             </a:extLst>
           </p:cNvPr>
@@ -18289,7 +20131,7 @@
           <p:cNvPr id="3" name="Diagramm 2">
             <a:extLst>
               <a:ext uri="{FF2B5EF4-FFF2-40B4-BE49-F238E27FC236}">
-                <a16:creationId xmlns:a16="http://schemas.microsoft.com/office/drawing/2014/main" id="{91BA0A2A-6632-0524-5D17-D72158744E48}"/>
+                <a16:creationId xmlns:a16="http://schemas.microsoft.com/office/drawing/2014/main" id="{8B95F511-0868-4DEC-ABB4-281562497F35}"/>
               </a:ext>
             </a:extLst>
           </p:cNvPr>
@@ -18297,7 +20139,7 @@
           <p:nvPr>
             <p:extLst>
               <p:ext uri="{D42A27DB-BD31-4B8C-83A1-F6EECF244321}">
-                <p14:modId xmlns:p14="http://schemas.microsoft.com/office/powerpoint/2010/main" val="1510106982"/>
+                <p14:modId xmlns:p14="http://schemas.microsoft.com/office/powerpoint/2010/main" val="888902310"/>
               </p:ext>
             </p:extLst>
           </p:nvPr>
@@ -18317,7 +20159,7 @@
           <p:cNvPr id="4" name="Diagramm 3">
             <a:extLst>
               <a:ext uri="{FF2B5EF4-FFF2-40B4-BE49-F238E27FC236}">
-                <a16:creationId xmlns:a16="http://schemas.microsoft.com/office/drawing/2014/main" id="{087AABBE-5C49-FE2D-C335-06DCFE948157}"/>
+                <a16:creationId xmlns:a16="http://schemas.microsoft.com/office/drawing/2014/main" id="{97D9627B-E8E5-A9DC-4ECD-38B9176E48C9}"/>
               </a:ext>
             </a:extLst>
           </p:cNvPr>
@@ -18325,7 +20167,7 @@
           <p:nvPr>
             <p:extLst>
               <p:ext uri="{D42A27DB-BD31-4B8C-83A1-F6EECF244321}">
-                <p14:modId xmlns:p14="http://schemas.microsoft.com/office/powerpoint/2010/main" val="4228172377"/>
+                <p14:modId xmlns:p14="http://schemas.microsoft.com/office/powerpoint/2010/main" val="1109287729"/>
               </p:ext>
             </p:extLst>
           </p:nvPr>
@@ -18345,7 +20187,7 @@
           <p:cNvPr id="5" name="Diagramm 4">
             <a:extLst>
               <a:ext uri="{FF2B5EF4-FFF2-40B4-BE49-F238E27FC236}">
-                <a16:creationId xmlns:a16="http://schemas.microsoft.com/office/drawing/2014/main" id="{9D22C26C-83AA-2BD9-30C7-F660EA946575}"/>
+                <a16:creationId xmlns:a16="http://schemas.microsoft.com/office/drawing/2014/main" id="{BDDD0ADE-B758-618B-8665-96090E5A5421}"/>
               </a:ext>
             </a:extLst>
           </p:cNvPr>
@@ -18353,7 +20195,7 @@
           <p:nvPr>
             <p:extLst>
               <p:ext uri="{D42A27DB-BD31-4B8C-83A1-F6EECF244321}">
-                <p14:modId xmlns:p14="http://schemas.microsoft.com/office/powerpoint/2010/main" val="1268479021"/>
+                <p14:modId xmlns:p14="http://schemas.microsoft.com/office/powerpoint/2010/main" val="1926917653"/>
               </p:ext>
             </p:extLst>
           </p:nvPr>
@@ -18371,7 +20213,7 @@
     </p:spTree>
     <p:extLst>
       <p:ext uri="{BB962C8B-B14F-4D97-AF65-F5344CB8AC3E}">
-        <p14:creationId xmlns:p14="http://schemas.microsoft.com/office/powerpoint/2010/main" val="1630793947"/>
+        <p14:creationId xmlns:p14="http://schemas.microsoft.com/office/powerpoint/2010/main" val="275231929"/>
       </p:ext>
     </p:extLst>
   </p:cSld>
@@ -18403,7 +20245,7 @@
           <p:cNvPr id="2" name="Titel 1">
             <a:extLst>
               <a:ext uri="{FF2B5EF4-FFF2-40B4-BE49-F238E27FC236}">
-                <a16:creationId xmlns:a16="http://schemas.microsoft.com/office/drawing/2014/main" id="{55104003-9F7E-95E4-60C5-FF248A4848F3}"/>
+                <a16:creationId xmlns:a16="http://schemas.microsoft.com/office/drawing/2014/main" id="{A23F390B-F5EB-514C-030E-137A5C93C4BA}"/>
               </a:ext>
             </a:extLst>
           </p:cNvPr>
@@ -18432,7 +20274,7 @@
           <p:cNvPr id="3" name="Diagramm 2">
             <a:extLst>
               <a:ext uri="{FF2B5EF4-FFF2-40B4-BE49-F238E27FC236}">
-                <a16:creationId xmlns:a16="http://schemas.microsoft.com/office/drawing/2014/main" id="{27B72357-4685-1058-1A02-663B84E59407}"/>
+                <a16:creationId xmlns:a16="http://schemas.microsoft.com/office/drawing/2014/main" id="{C26D2D41-0888-92D7-9AED-2455979FD133}"/>
               </a:ext>
             </a:extLst>
           </p:cNvPr>
@@ -18440,7 +20282,7 @@
           <p:nvPr>
             <p:extLst>
               <p:ext uri="{D42A27DB-BD31-4B8C-83A1-F6EECF244321}">
-                <p14:modId xmlns:p14="http://schemas.microsoft.com/office/powerpoint/2010/main" val="1433385884"/>
+                <p14:modId xmlns:p14="http://schemas.microsoft.com/office/powerpoint/2010/main" val="285720524"/>
               </p:ext>
             </p:extLst>
           </p:nvPr>
@@ -18460,7 +20302,7 @@
           <p:cNvPr id="4" name="Diagramm 3">
             <a:extLst>
               <a:ext uri="{FF2B5EF4-FFF2-40B4-BE49-F238E27FC236}">
-                <a16:creationId xmlns:a16="http://schemas.microsoft.com/office/drawing/2014/main" id="{2AFBCEAD-8B51-B19F-B1F5-D897976A6037}"/>
+                <a16:creationId xmlns:a16="http://schemas.microsoft.com/office/drawing/2014/main" id="{8691FBB3-7F0A-BCB0-039F-013E9564232A}"/>
               </a:ext>
             </a:extLst>
           </p:cNvPr>
@@ -18468,7 +20310,7 @@
           <p:nvPr>
             <p:extLst>
               <p:ext uri="{D42A27DB-BD31-4B8C-83A1-F6EECF244321}">
-                <p14:modId xmlns:p14="http://schemas.microsoft.com/office/powerpoint/2010/main" val="3678860217"/>
+                <p14:modId xmlns:p14="http://schemas.microsoft.com/office/powerpoint/2010/main" val="430006489"/>
               </p:ext>
             </p:extLst>
           </p:nvPr>
@@ -18486,7 +20328,7 @@
     </p:spTree>
     <p:extLst>
       <p:ext uri="{BB962C8B-B14F-4D97-AF65-F5344CB8AC3E}">
-        <p14:creationId xmlns:p14="http://schemas.microsoft.com/office/powerpoint/2010/main" val="2823115399"/>
+        <p14:creationId xmlns:p14="http://schemas.microsoft.com/office/powerpoint/2010/main" val="2770001125"/>
       </p:ext>
     </p:extLst>
   </p:cSld>
@@ -18518,7 +20360,7 @@
           <p:cNvPr id="2" name="Titel 1">
             <a:extLst>
               <a:ext uri="{FF2B5EF4-FFF2-40B4-BE49-F238E27FC236}">
-                <a16:creationId xmlns:a16="http://schemas.microsoft.com/office/drawing/2014/main" id="{0818D8AB-64B1-AE61-FB4C-FABC49C329F7}"/>
+                <a16:creationId xmlns:a16="http://schemas.microsoft.com/office/drawing/2014/main" id="{8A32BC0B-CDB4-2D09-AFFE-BBF660421A95}"/>
               </a:ext>
             </a:extLst>
           </p:cNvPr>
@@ -18546,7 +20388,7 @@
           <p:cNvPr id="3" name="Diagramm 2">
             <a:extLst>
               <a:ext uri="{FF2B5EF4-FFF2-40B4-BE49-F238E27FC236}">
-                <a16:creationId xmlns:a16="http://schemas.microsoft.com/office/drawing/2014/main" id="{D0E32FC2-A1D5-C991-BB9E-BB2EF190A44E}"/>
+                <a16:creationId xmlns:a16="http://schemas.microsoft.com/office/drawing/2014/main" id="{B23FD68F-D0F6-1D42-8EB4-5D2394ECBA5B}"/>
               </a:ext>
             </a:extLst>
           </p:cNvPr>
@@ -18554,7 +20396,7 @@
           <p:nvPr>
             <p:extLst>
               <p:ext uri="{D42A27DB-BD31-4B8C-83A1-F6EECF244321}">
-                <p14:modId xmlns:p14="http://schemas.microsoft.com/office/powerpoint/2010/main" val="2617951043"/>
+                <p14:modId xmlns:p14="http://schemas.microsoft.com/office/powerpoint/2010/main" val="1660935004"/>
               </p:ext>
             </p:extLst>
           </p:nvPr>
@@ -18574,7 +20416,7 @@
           <p:cNvPr id="4" name="Diagramm 3">
             <a:extLst>
               <a:ext uri="{FF2B5EF4-FFF2-40B4-BE49-F238E27FC236}">
-                <a16:creationId xmlns:a16="http://schemas.microsoft.com/office/drawing/2014/main" id="{0EB83672-1E0B-1509-1B6C-916B631535DE}"/>
+                <a16:creationId xmlns:a16="http://schemas.microsoft.com/office/drawing/2014/main" id="{0B8434FA-6330-BD3B-9954-DF2C692F23A1}"/>
               </a:ext>
             </a:extLst>
           </p:cNvPr>
@@ -18582,7 +20424,7 @@
           <p:nvPr>
             <p:extLst>
               <p:ext uri="{D42A27DB-BD31-4B8C-83A1-F6EECF244321}">
-                <p14:modId xmlns:p14="http://schemas.microsoft.com/office/powerpoint/2010/main" val="3277659081"/>
+                <p14:modId xmlns:p14="http://schemas.microsoft.com/office/powerpoint/2010/main" val="4056035038"/>
               </p:ext>
             </p:extLst>
           </p:nvPr>
@@ -18600,7 +20442,7 @@
     </p:spTree>
     <p:extLst>
       <p:ext uri="{BB962C8B-B14F-4D97-AF65-F5344CB8AC3E}">
-        <p14:creationId xmlns:p14="http://schemas.microsoft.com/office/powerpoint/2010/main" val="1983150846"/>
+        <p14:creationId xmlns:p14="http://schemas.microsoft.com/office/powerpoint/2010/main" val="2886810834"/>
       </p:ext>
     </p:extLst>
   </p:cSld>
@@ -18632,7 +20474,7 @@
           <p:cNvPr id="2" name="Titel 1">
             <a:extLst>
               <a:ext uri="{FF2B5EF4-FFF2-40B4-BE49-F238E27FC236}">
-                <a16:creationId xmlns:a16="http://schemas.microsoft.com/office/drawing/2014/main" id="{0F6D9909-A0B9-2961-B1EB-55869F0B7015}"/>
+                <a16:creationId xmlns:a16="http://schemas.microsoft.com/office/drawing/2014/main" id="{D57C0277-A87A-8DDB-D8DC-0BECD166CC3A}"/>
               </a:ext>
             </a:extLst>
           </p:cNvPr>
@@ -18661,7 +20503,7 @@
           <p:cNvPr id="3" name="Diagramm 2">
             <a:extLst>
               <a:ext uri="{FF2B5EF4-FFF2-40B4-BE49-F238E27FC236}">
-                <a16:creationId xmlns:a16="http://schemas.microsoft.com/office/drawing/2014/main" id="{F5E16215-D8D1-223C-D8AF-D57F022A28C4}"/>
+                <a16:creationId xmlns:a16="http://schemas.microsoft.com/office/drawing/2014/main" id="{4D2FDA05-5588-F40B-3D48-5DB8391F8152}"/>
               </a:ext>
             </a:extLst>
           </p:cNvPr>
@@ -18669,7 +20511,7 @@
           <p:nvPr>
             <p:extLst>
               <p:ext uri="{D42A27DB-BD31-4B8C-83A1-F6EECF244321}">
-                <p14:modId xmlns:p14="http://schemas.microsoft.com/office/powerpoint/2010/main" val="57153042"/>
+                <p14:modId xmlns:p14="http://schemas.microsoft.com/office/powerpoint/2010/main" val="50438732"/>
               </p:ext>
             </p:extLst>
           </p:nvPr>
@@ -18689,7 +20531,7 @@
           <p:cNvPr id="4" name="Diagramm 3">
             <a:extLst>
               <a:ext uri="{FF2B5EF4-FFF2-40B4-BE49-F238E27FC236}">
-                <a16:creationId xmlns:a16="http://schemas.microsoft.com/office/drawing/2014/main" id="{7471BDBD-7C85-0856-68DF-A9EACF2908E8}"/>
+                <a16:creationId xmlns:a16="http://schemas.microsoft.com/office/drawing/2014/main" id="{D26F954C-52AA-FCD0-0D6B-9ABBD474FD41}"/>
               </a:ext>
             </a:extLst>
           </p:cNvPr>
@@ -18697,7 +20539,7 @@
           <p:nvPr>
             <p:extLst>
               <p:ext uri="{D42A27DB-BD31-4B8C-83A1-F6EECF244321}">
-                <p14:modId xmlns:p14="http://schemas.microsoft.com/office/powerpoint/2010/main" val="2909025480"/>
+                <p14:modId xmlns:p14="http://schemas.microsoft.com/office/powerpoint/2010/main" val="673441652"/>
               </p:ext>
             </p:extLst>
           </p:nvPr>
@@ -18715,7 +20557,7 @@
     </p:spTree>
     <p:extLst>
       <p:ext uri="{BB962C8B-B14F-4D97-AF65-F5344CB8AC3E}">
-        <p14:creationId xmlns:p14="http://schemas.microsoft.com/office/powerpoint/2010/main" val="244296354"/>
+        <p14:creationId xmlns:p14="http://schemas.microsoft.com/office/powerpoint/2010/main" val="1435363067"/>
       </p:ext>
     </p:extLst>
   </p:cSld>
@@ -18747,7 +20589,7 @@
           <p:cNvPr id="2" name="Titel 1">
             <a:extLst>
               <a:ext uri="{FF2B5EF4-FFF2-40B4-BE49-F238E27FC236}">
-                <a16:creationId xmlns:a16="http://schemas.microsoft.com/office/drawing/2014/main" id="{6270D5EE-07B4-6793-5A09-DBD5B09FEFED}"/>
+                <a16:creationId xmlns:a16="http://schemas.microsoft.com/office/drawing/2014/main" id="{E6E21DDA-86FA-7F17-4754-55FA04FCB382}"/>
               </a:ext>
             </a:extLst>
           </p:cNvPr>
@@ -18776,7 +20618,7 @@
           <p:cNvPr id="3" name="Diagramm 2">
             <a:extLst>
               <a:ext uri="{FF2B5EF4-FFF2-40B4-BE49-F238E27FC236}">
-                <a16:creationId xmlns:a16="http://schemas.microsoft.com/office/drawing/2014/main" id="{A90B7914-F81A-9A74-C3C6-015EE41F608B}"/>
+                <a16:creationId xmlns:a16="http://schemas.microsoft.com/office/drawing/2014/main" id="{9ACC069E-8C3B-6403-CA9B-E4B39CC3A540}"/>
               </a:ext>
             </a:extLst>
           </p:cNvPr>
@@ -18784,7 +20626,7 @@
           <p:nvPr>
             <p:extLst>
               <p:ext uri="{D42A27DB-BD31-4B8C-83A1-F6EECF244321}">
-                <p14:modId xmlns:p14="http://schemas.microsoft.com/office/powerpoint/2010/main" val="3115855303"/>
+                <p14:modId xmlns:p14="http://schemas.microsoft.com/office/powerpoint/2010/main" val="3740774234"/>
               </p:ext>
             </p:extLst>
           </p:nvPr>
@@ -18804,7 +20646,7 @@
           <p:cNvPr id="4" name="Diagramm 3">
             <a:extLst>
               <a:ext uri="{FF2B5EF4-FFF2-40B4-BE49-F238E27FC236}">
-                <a16:creationId xmlns:a16="http://schemas.microsoft.com/office/drawing/2014/main" id="{FFAF93B4-4586-6419-9336-C74776B628B5}"/>
+                <a16:creationId xmlns:a16="http://schemas.microsoft.com/office/drawing/2014/main" id="{3E3DA610-26AC-9CCC-1C7C-BD2F9BB580E6}"/>
               </a:ext>
             </a:extLst>
           </p:cNvPr>
@@ -18812,7 +20654,7 @@
           <p:nvPr>
             <p:extLst>
               <p:ext uri="{D42A27DB-BD31-4B8C-83A1-F6EECF244321}">
-                <p14:modId xmlns:p14="http://schemas.microsoft.com/office/powerpoint/2010/main" val="732459624"/>
+                <p14:modId xmlns:p14="http://schemas.microsoft.com/office/powerpoint/2010/main" val="4272757785"/>
               </p:ext>
             </p:extLst>
           </p:nvPr>
@@ -18832,7 +20674,7 @@
           <p:cNvPr id="5" name="Diagramm 4">
             <a:extLst>
               <a:ext uri="{FF2B5EF4-FFF2-40B4-BE49-F238E27FC236}">
-                <a16:creationId xmlns:a16="http://schemas.microsoft.com/office/drawing/2014/main" id="{939CAFAA-8564-8C85-62CA-24DD5B01D833}"/>
+                <a16:creationId xmlns:a16="http://schemas.microsoft.com/office/drawing/2014/main" id="{6EE6E7F5-980B-307F-AA8D-19974825531B}"/>
               </a:ext>
             </a:extLst>
           </p:cNvPr>
@@ -18840,7 +20682,7 @@
           <p:nvPr>
             <p:extLst>
               <p:ext uri="{D42A27DB-BD31-4B8C-83A1-F6EECF244321}">
-                <p14:modId xmlns:p14="http://schemas.microsoft.com/office/powerpoint/2010/main" val="1484647595"/>
+                <p14:modId xmlns:p14="http://schemas.microsoft.com/office/powerpoint/2010/main" val="2573820761"/>
               </p:ext>
             </p:extLst>
           </p:nvPr>
@@ -18858,7 +20700,7 @@
     </p:spTree>
     <p:extLst>
       <p:ext uri="{BB962C8B-B14F-4D97-AF65-F5344CB8AC3E}">
-        <p14:creationId xmlns:p14="http://schemas.microsoft.com/office/powerpoint/2010/main" val="1021675083"/>
+        <p14:creationId xmlns:p14="http://schemas.microsoft.com/office/powerpoint/2010/main" val="1037441708"/>
       </p:ext>
     </p:extLst>
   </p:cSld>
@@ -18890,7 +20732,7 @@
           <p:cNvPr id="2" name="Titel 1">
             <a:extLst>
               <a:ext uri="{FF2B5EF4-FFF2-40B4-BE49-F238E27FC236}">
-                <a16:creationId xmlns:a16="http://schemas.microsoft.com/office/drawing/2014/main" id="{2C1F7AFD-A5B4-D4B4-692E-A1758D38F566}"/>
+                <a16:creationId xmlns:a16="http://schemas.microsoft.com/office/drawing/2014/main" id="{E88E203E-BDB9-B3F1-D266-09A05519B408}"/>
               </a:ext>
             </a:extLst>
           </p:cNvPr>
@@ -18919,7 +20761,7 @@
           <p:cNvPr id="3" name="Diagramm 2">
             <a:extLst>
               <a:ext uri="{FF2B5EF4-FFF2-40B4-BE49-F238E27FC236}">
-                <a16:creationId xmlns:a16="http://schemas.microsoft.com/office/drawing/2014/main" id="{D63FD5BD-473F-BA04-3593-2666F704707A}"/>
+                <a16:creationId xmlns:a16="http://schemas.microsoft.com/office/drawing/2014/main" id="{480ACE43-474D-28BF-5361-7F9F51A6DC14}"/>
               </a:ext>
             </a:extLst>
           </p:cNvPr>
@@ -18927,7 +20769,7 @@
           <p:nvPr>
             <p:extLst>
               <p:ext uri="{D42A27DB-BD31-4B8C-83A1-F6EECF244321}">
-                <p14:modId xmlns:p14="http://schemas.microsoft.com/office/powerpoint/2010/main" val="1445020902"/>
+                <p14:modId xmlns:p14="http://schemas.microsoft.com/office/powerpoint/2010/main" val="109636552"/>
               </p:ext>
             </p:extLst>
           </p:nvPr>
@@ -18947,7 +20789,7 @@
           <p:cNvPr id="4" name="Diagramm 3">
             <a:extLst>
               <a:ext uri="{FF2B5EF4-FFF2-40B4-BE49-F238E27FC236}">
-                <a16:creationId xmlns:a16="http://schemas.microsoft.com/office/drawing/2014/main" id="{D159CC3B-8226-9494-CF56-C8F808CFEF85}"/>
+                <a16:creationId xmlns:a16="http://schemas.microsoft.com/office/drawing/2014/main" id="{9F43090B-0028-A2AA-636C-EBC429089782}"/>
               </a:ext>
             </a:extLst>
           </p:cNvPr>
@@ -18955,7 +20797,7 @@
           <p:nvPr>
             <p:extLst>
               <p:ext uri="{D42A27DB-BD31-4B8C-83A1-F6EECF244321}">
-                <p14:modId xmlns:p14="http://schemas.microsoft.com/office/powerpoint/2010/main" val="3054664404"/>
+                <p14:modId xmlns:p14="http://schemas.microsoft.com/office/powerpoint/2010/main" val="2247635909"/>
               </p:ext>
             </p:extLst>
           </p:nvPr>
@@ -18973,7 +20815,7 @@
     </p:spTree>
     <p:extLst>
       <p:ext uri="{BB962C8B-B14F-4D97-AF65-F5344CB8AC3E}">
-        <p14:creationId xmlns:p14="http://schemas.microsoft.com/office/powerpoint/2010/main" val="2399791414"/>
+        <p14:creationId xmlns:p14="http://schemas.microsoft.com/office/powerpoint/2010/main" val="4051267610"/>
       </p:ext>
     </p:extLst>
   </p:cSld>
@@ -19005,7 +20847,121 @@
           <p:cNvPr id="2" name="Titel 1">
             <a:extLst>
               <a:ext uri="{FF2B5EF4-FFF2-40B4-BE49-F238E27FC236}">
-                <a16:creationId xmlns:a16="http://schemas.microsoft.com/office/drawing/2014/main" id="{CDA7E939-C566-0FD2-1130-E7547D9F9868}"/>
+                <a16:creationId xmlns:a16="http://schemas.microsoft.com/office/drawing/2014/main" id="{90264227-0961-4AD1-0370-ED449FB1E4AA}"/>
+              </a:ext>
+            </a:extLst>
+          </p:cNvPr>
+          <p:cNvSpPr>
+            <a:spLocks noGrp="1"/>
+          </p:cNvSpPr>
+          <p:nvPr>
+            <p:ph type="title"/>
+          </p:nvPr>
+        </p:nvSpPr>
+        <p:spPr/>
+        <p:txBody>
+          <a:bodyPr/>
+          <a:lstStyle/>
+          <a:p>
+            <a:r>
+              <a:rPr lang="de-DE"/>
+              <a:t>Smoothed lines</a:t>
+            </a:r>
+          </a:p>
+        </p:txBody>
+      </p:sp>
+      <p:graphicFrame>
+        <p:nvGraphicFramePr>
+          <p:cNvPr id="3" name="Diagramm 2">
+            <a:extLst>
+              <a:ext uri="{FF2B5EF4-FFF2-40B4-BE49-F238E27FC236}">
+                <a16:creationId xmlns:a16="http://schemas.microsoft.com/office/drawing/2014/main" id="{46BFF089-E5EA-DFE5-209D-93C45F554A8F}"/>
+              </a:ext>
+            </a:extLst>
+          </p:cNvPr>
+          <p:cNvGraphicFramePr/>
+          <p:nvPr>
+            <p:extLst>
+              <p:ext uri="{D42A27DB-BD31-4B8C-83A1-F6EECF244321}">
+                <p14:modId xmlns:p14="http://schemas.microsoft.com/office/powerpoint/2010/main" val="16106114"/>
+              </p:ext>
+            </p:extLst>
+          </p:nvPr>
+        </p:nvGraphicFramePr>
+        <p:xfrm>
+          <a:off x="254000" y="1397000"/>
+          <a:ext cx="5842000" cy="5207000"/>
+        </p:xfrm>
+        <a:graphic>
+          <a:graphicData uri="http://schemas.openxmlformats.org/drawingml/2006/chart">
+            <c:chart xmlns:c="http://schemas.openxmlformats.org/drawingml/2006/chart" xmlns:r="http://schemas.openxmlformats.org/officeDocument/2006/relationships" r:id="rId2"/>
+          </a:graphicData>
+        </a:graphic>
+      </p:graphicFrame>
+      <p:graphicFrame>
+        <p:nvGraphicFramePr>
+          <p:cNvPr id="4" name="Diagramm 3">
+            <a:extLst>
+              <a:ext uri="{FF2B5EF4-FFF2-40B4-BE49-F238E27FC236}">
+                <a16:creationId xmlns:a16="http://schemas.microsoft.com/office/drawing/2014/main" id="{4DB6D02C-0695-AAE5-4614-51A60E9F48B9}"/>
+              </a:ext>
+            </a:extLst>
+          </p:cNvPr>
+          <p:cNvGraphicFramePr/>
+          <p:nvPr>
+            <p:extLst>
+              <p:ext uri="{D42A27DB-BD31-4B8C-83A1-F6EECF244321}">
+                <p14:modId xmlns:p14="http://schemas.microsoft.com/office/powerpoint/2010/main" val="2641059650"/>
+              </p:ext>
+            </p:extLst>
+          </p:nvPr>
+        </p:nvGraphicFramePr>
+        <p:xfrm>
+          <a:off x="6223000" y="1397000"/>
+          <a:ext cx="5842000" cy="5207000"/>
+        </p:xfrm>
+        <a:graphic>
+          <a:graphicData uri="http://schemas.openxmlformats.org/drawingml/2006/chart">
+            <c:chart xmlns:c="http://schemas.openxmlformats.org/drawingml/2006/chart" xmlns:r="http://schemas.openxmlformats.org/officeDocument/2006/relationships" r:id="rId3"/>
+          </a:graphicData>
+        </a:graphic>
+      </p:graphicFrame>
+    </p:spTree>
+    <p:extLst>
+      <p:ext uri="{BB962C8B-B14F-4D97-AF65-F5344CB8AC3E}">
+        <p14:creationId xmlns:p14="http://schemas.microsoft.com/office/powerpoint/2010/main" val="1617870766"/>
+      </p:ext>
+    </p:extLst>
+  </p:cSld>
+  <p:clrMapOvr>
+    <a:masterClrMapping/>
+  </p:clrMapOvr>
+</p:sld>
+</file>
+
+<file path=ppt/slides/slide8.xml><?xml version="1.0" encoding="utf-8"?>
+<p:sld xmlns:a="http://schemas.openxmlformats.org/drawingml/2006/main" xmlns:r="http://schemas.openxmlformats.org/officeDocument/2006/relationships" xmlns:p="http://schemas.openxmlformats.org/presentationml/2006/main">
+  <p:cSld>
+    <p:spTree>
+      <p:nvGrpSpPr>
+        <p:cNvPr id="1" name=""/>
+        <p:cNvGrpSpPr/>
+        <p:nvPr/>
+      </p:nvGrpSpPr>
+      <p:grpSpPr>
+        <a:xfrm>
+          <a:off x="0" y="0"/>
+          <a:ext cx="0" cy="0"/>
+          <a:chOff x="0" y="0"/>
+          <a:chExt cx="0" cy="0"/>
+        </a:xfrm>
+      </p:grpSpPr>
+      <p:sp>
+        <p:nvSpPr>
+          <p:cNvPr id="2" name="Titel 1">
+            <a:extLst>
+              <a:ext uri="{FF2B5EF4-FFF2-40B4-BE49-F238E27FC236}">
+                <a16:creationId xmlns:a16="http://schemas.microsoft.com/office/drawing/2014/main" id="{A3DF15D3-1057-D30C-F304-AF9D66300AFF}"/>
               </a:ext>
             </a:extLst>
           </p:cNvPr>
@@ -19034,7 +20990,7 @@
           <p:cNvPr id="3" name="Diagramm 2">
             <a:extLst>
               <a:ext uri="{FF2B5EF4-FFF2-40B4-BE49-F238E27FC236}">
-                <a16:creationId xmlns:a16="http://schemas.microsoft.com/office/drawing/2014/main" id="{F89BC812-A31E-BDD8-6228-A340EFDF1CA2}"/>
+                <a16:creationId xmlns:a16="http://schemas.microsoft.com/office/drawing/2014/main" id="{297695FB-A438-814A-2F1B-5AE9D3261BC9}"/>
               </a:ext>
             </a:extLst>
           </p:cNvPr>
@@ -19042,7 +20998,7 @@
           <p:nvPr>
             <p:extLst>
               <p:ext uri="{D42A27DB-BD31-4B8C-83A1-F6EECF244321}">
-                <p14:modId xmlns:p14="http://schemas.microsoft.com/office/powerpoint/2010/main" val="535731751"/>
+                <p14:modId xmlns:p14="http://schemas.microsoft.com/office/powerpoint/2010/main" val="3857080050"/>
               </p:ext>
             </p:extLst>
           </p:nvPr>
@@ -19062,7 +21018,7 @@
           <p:cNvPr id="4" name="Diagramm 3">
             <a:extLst>
               <a:ext uri="{FF2B5EF4-FFF2-40B4-BE49-F238E27FC236}">
-                <a16:creationId xmlns:a16="http://schemas.microsoft.com/office/drawing/2014/main" id="{64E4F072-FD0E-0E8D-B098-637AE8A8357B}"/>
+                <a16:creationId xmlns:a16="http://schemas.microsoft.com/office/drawing/2014/main" id="{AD220AB8-96CC-827C-AF3F-42A2B76713A3}"/>
               </a:ext>
             </a:extLst>
           </p:cNvPr>
@@ -19070,7 +21026,7 @@
           <p:nvPr>
             <p:extLst>
               <p:ext uri="{D42A27DB-BD31-4B8C-83A1-F6EECF244321}">
-                <p14:modId xmlns:p14="http://schemas.microsoft.com/office/powerpoint/2010/main" val="2333849072"/>
+                <p14:modId xmlns:p14="http://schemas.microsoft.com/office/powerpoint/2010/main" val="657482681"/>
               </p:ext>
             </p:extLst>
           </p:nvPr>
@@ -19090,7 +21046,7 @@
           <p:cNvPr id="5" name="Diagramm 4">
             <a:extLst>
               <a:ext uri="{FF2B5EF4-FFF2-40B4-BE49-F238E27FC236}">
-                <a16:creationId xmlns:a16="http://schemas.microsoft.com/office/drawing/2014/main" id="{884FFB27-DEDF-1653-36E6-40317D5D39FE}"/>
+                <a16:creationId xmlns:a16="http://schemas.microsoft.com/office/drawing/2014/main" id="{2E276F88-1AB9-22A4-DA43-FE3ECEA7B734}"/>
               </a:ext>
             </a:extLst>
           </p:cNvPr>
@@ -19098,7 +21054,7 @@
           <p:nvPr>
             <p:extLst>
               <p:ext uri="{D42A27DB-BD31-4B8C-83A1-F6EECF244321}">
-                <p14:modId xmlns:p14="http://schemas.microsoft.com/office/powerpoint/2010/main" val="4076462071"/>
+                <p14:modId xmlns:p14="http://schemas.microsoft.com/office/powerpoint/2010/main" val="755239979"/>
               </p:ext>
             </p:extLst>
           </p:nvPr>
@@ -19116,7 +21072,7 @@
     </p:spTree>
     <p:extLst>
       <p:ext uri="{BB962C8B-B14F-4D97-AF65-F5344CB8AC3E}">
-        <p14:creationId xmlns:p14="http://schemas.microsoft.com/office/powerpoint/2010/main" val="3030301430"/>
+        <p14:creationId xmlns:p14="http://schemas.microsoft.com/office/powerpoint/2010/main" val="2637578916"/>
       </p:ext>
     </p:extLst>
   </p:cSld>
